--- a/docs/deliverables/발표자료.pptx
+++ b/docs/deliverables/발표자료.pptx
@@ -3713,18 +3713,20 @@
         <p:spPr>
           <a:xfrm>
             <a:off x="502920" y="1645920"/>
-            <a:ext cx="3657600" cy="1828800"/>
+            <a:ext cx="3657600" cy="2423160"/>
           </a:xfrm>
           <a:prstGeom prst="roundRect">
             <a:avLst>
-              <a:gd name="adj" fmla="val 10000"/>
+              <a:gd name="adj" fmla="val 8000"/>
             </a:avLst>
           </a:prstGeom>
           <a:solidFill>
             <a:srgbClr val="FFFFFF"/>
           </a:solidFill>
-          <a:ln>
-            <a:noFill/>
+          <a:ln w="12700">
+            <a:solidFill>
+              <a:srgbClr val="DDE1F2"/>
+            </a:solidFill>
           </a:ln>
           <a:effectLst/>
         </p:spPr>
@@ -3750,429 +3752,9 @@
           </a:p>
         </p:txBody>
       </p:sp>
-      <p:sp>
-        <p:nvSpPr>
-          <p:cNvPr id="8" name="TextBox 7"/>
-          <p:cNvSpPr txBox="1"/>
-          <p:nvPr/>
-        </p:nvSpPr>
-        <p:spPr>
-          <a:xfrm>
-            <a:off x="502920" y="1828800"/>
-            <a:ext cx="3657600" cy="640080"/>
-          </a:xfrm>
-          <a:prstGeom prst="rect">
-            <a:avLst/>
-          </a:prstGeom>
-          <a:noFill/>
-        </p:spPr>
-        <p:txBody>
-          <a:bodyPr wrap="square" anchor="t" lIns="0" rIns="0" tIns="0" bIns="0">
-            <a:spAutoFit/>
-          </a:bodyPr>
-          <a:lstStyle/>
-          <a:p>
-            <a:pPr algn="ctr">
-              <a:lnSpc>
-                <a:spcPct val="115000"/>
-              </a:lnSpc>
-            </a:pPr>
-            <a:r>
-              <a:rPr sz="3200" b="1" i="0">
-                <a:solidFill>
-                  <a:srgbClr val="4A55E8"/>
-                </a:solidFill>
-                <a:latin typeface="맑은 고딕"/>
-              </a:rPr>
-              <a:t>67~86명</a:t>
-            </a:r>
-          </a:p>
-        </p:txBody>
-      </p:sp>
-      <p:sp>
-        <p:nvSpPr>
-          <p:cNvPr id="9" name="TextBox 8"/>
-          <p:cNvSpPr txBox="1"/>
-          <p:nvPr/>
-        </p:nvSpPr>
-        <p:spPr>
-          <a:xfrm>
-            <a:off x="777240" y="2514600"/>
-            <a:ext cx="3108960" cy="822960"/>
-          </a:xfrm>
-          <a:prstGeom prst="rect">
-            <a:avLst/>
-          </a:prstGeom>
-          <a:noFill/>
-        </p:spPr>
-        <p:txBody>
-          <a:bodyPr wrap="square" anchor="t" lIns="0" rIns="0" tIns="0" bIns="0">
-            <a:spAutoFit/>
-          </a:bodyPr>
-          <a:lstStyle/>
-          <a:p>
-            <a:pPr algn="ctr">
-              <a:lnSpc>
-                <a:spcPct val="130000"/>
-              </a:lnSpc>
-            </a:pPr>
-            <a:r>
-              <a:rPr sz="1150" b="0" i="0">
-                <a:solidFill>
-                  <a:srgbClr val="8A8EA3"/>
-                </a:solidFill>
-                <a:latin typeface="맑은 고딕"/>
-              </a:rPr>
-              <a:t>비겹침 구도 영상 탐지 인원</a:t>
-            </a:r>
-          </a:p>
-          <a:p>
-            <a:pPr algn="ctr">
-              <a:lnSpc>
-                <a:spcPct val="130000"/>
-              </a:lnSpc>
-            </a:pPr>
-            <a:r>
-              <a:rPr sz="1150" b="0" i="0">
-                <a:solidFill>
-                  <a:srgbClr val="8A8EA3"/>
-                </a:solidFill>
-                <a:latin typeface="맑은 고딕"/>
-              </a:rPr>
-              <a:t>(육안 체감치와 근접)</a:t>
-            </a:r>
-          </a:p>
-        </p:txBody>
-      </p:sp>
-      <p:sp>
-        <p:nvSpPr>
-          <p:cNvPr id="10" name="Rounded Rectangle 9"/>
-          <p:cNvSpPr/>
-          <p:nvPr/>
-        </p:nvSpPr>
-        <p:spPr>
-          <a:xfrm>
-            <a:off x="4297680" y="1645920"/>
-            <a:ext cx="3657600" cy="1828800"/>
-          </a:xfrm>
-          <a:prstGeom prst="roundRect">
-            <a:avLst>
-              <a:gd name="adj" fmla="val 10000"/>
-            </a:avLst>
-          </a:prstGeom>
-          <a:solidFill>
-            <a:srgbClr val="FFFFFF"/>
-          </a:solidFill>
-          <a:ln>
-            <a:noFill/>
-          </a:ln>
-          <a:effectLst/>
-        </p:spPr>
-        <p:style>
-          <a:lnRef idx="1">
-            <a:schemeClr val="accent1"/>
-          </a:lnRef>
-          <a:fillRef idx="3">
-            <a:schemeClr val="accent1"/>
-          </a:fillRef>
-          <a:effectRef idx="2">
-            <a:schemeClr val="accent1"/>
-          </a:effectRef>
-          <a:fontRef idx="minor">
-            <a:schemeClr val="lt1"/>
-          </a:fontRef>
-        </p:style>
-        <p:txBody>
-          <a:bodyPr rtlCol="0" anchor="ctr"/>
-          <a:lstStyle/>
-          <a:p>
-            <a:pPr algn="ctr"/>
-          </a:p>
-        </p:txBody>
-      </p:sp>
-      <p:sp>
-        <p:nvSpPr>
-          <p:cNvPr id="11" name="TextBox 10"/>
-          <p:cNvSpPr txBox="1"/>
-          <p:nvPr/>
-        </p:nvSpPr>
-        <p:spPr>
-          <a:xfrm>
-            <a:off x="4297680" y="1828800"/>
-            <a:ext cx="3657600" cy="640080"/>
-          </a:xfrm>
-          <a:prstGeom prst="rect">
-            <a:avLst/>
-          </a:prstGeom>
-          <a:noFill/>
-        </p:spPr>
-        <p:txBody>
-          <a:bodyPr wrap="square" anchor="t" lIns="0" rIns="0" tIns="0" bIns="0">
-            <a:spAutoFit/>
-          </a:bodyPr>
-          <a:lstStyle/>
-          <a:p>
-            <a:pPr algn="ctr">
-              <a:lnSpc>
-                <a:spcPct val="115000"/>
-              </a:lnSpc>
-            </a:pPr>
-            <a:r>
-              <a:rPr sz="3200" b="1" i="0">
-                <a:solidFill>
-                  <a:srgbClr val="1FA96B"/>
-                </a:solidFill>
-                <a:latin typeface="맑은 고딕"/>
-              </a:rPr>
-              <a:t>8~14fps</a:t>
-            </a:r>
-          </a:p>
-        </p:txBody>
-      </p:sp>
-      <p:sp>
-        <p:nvSpPr>
-          <p:cNvPr id="12" name="TextBox 11"/>
-          <p:cNvSpPr txBox="1"/>
-          <p:nvPr/>
-        </p:nvSpPr>
-        <p:spPr>
-          <a:xfrm>
-            <a:off x="4572000" y="2514600"/>
-            <a:ext cx="3108960" cy="822960"/>
-          </a:xfrm>
-          <a:prstGeom prst="rect">
-            <a:avLst/>
-          </a:prstGeom>
-          <a:noFill/>
-        </p:spPr>
-        <p:txBody>
-          <a:bodyPr wrap="square" anchor="t" lIns="0" rIns="0" tIns="0" bIns="0">
-            <a:spAutoFit/>
-          </a:bodyPr>
-          <a:lstStyle/>
-          <a:p>
-            <a:pPr algn="ctr">
-              <a:lnSpc>
-                <a:spcPct val="130000"/>
-              </a:lnSpc>
-            </a:pPr>
-            <a:r>
-              <a:rPr sz="1150" b="0" i="0">
-                <a:solidFill>
-                  <a:srgbClr val="8A8EA3"/>
-                </a:solidFill>
-                <a:latin typeface="맑은 고딕"/>
-              </a:rPr>
-              <a:t>경량 영상 7캠 동시 구동</a:t>
-            </a:r>
-          </a:p>
-          <a:p>
-            <a:pPr algn="ctr">
-              <a:lnSpc>
-                <a:spcPct val="130000"/>
-              </a:lnSpc>
-            </a:pPr>
-            <a:r>
-              <a:rPr sz="1150" b="0" i="0">
-                <a:solidFill>
-                  <a:srgbClr val="8A8EA3"/>
-                </a:solidFill>
-                <a:latin typeface="맑은 고딕"/>
-              </a:rPr>
-              <a:t>(성능버그 11건 수정 후)</a:t>
-            </a:r>
-          </a:p>
-        </p:txBody>
-      </p:sp>
-      <p:sp>
-        <p:nvSpPr>
-          <p:cNvPr id="13" name="Rounded Rectangle 12"/>
-          <p:cNvSpPr/>
-          <p:nvPr/>
-        </p:nvSpPr>
-        <p:spPr>
-          <a:xfrm>
-            <a:off x="8092440" y="1645920"/>
-            <a:ext cx="3657600" cy="1828800"/>
-          </a:xfrm>
-          <a:prstGeom prst="roundRect">
-            <a:avLst>
-              <a:gd name="adj" fmla="val 10000"/>
-            </a:avLst>
-          </a:prstGeom>
-          <a:solidFill>
-            <a:srgbClr val="FFFFFF"/>
-          </a:solidFill>
-          <a:ln>
-            <a:noFill/>
-          </a:ln>
-          <a:effectLst/>
-        </p:spPr>
-        <p:style>
-          <a:lnRef idx="1">
-            <a:schemeClr val="accent1"/>
-          </a:lnRef>
-          <a:fillRef idx="3">
-            <a:schemeClr val="accent1"/>
-          </a:fillRef>
-          <a:effectRef idx="2">
-            <a:schemeClr val="accent1"/>
-          </a:effectRef>
-          <a:fontRef idx="minor">
-            <a:schemeClr val="lt1"/>
-          </a:fontRef>
-        </p:style>
-        <p:txBody>
-          <a:bodyPr rtlCol="0" anchor="ctr"/>
-          <a:lstStyle/>
-          <a:p>
-            <a:pPr algn="ctr"/>
-          </a:p>
-        </p:txBody>
-      </p:sp>
-      <p:sp>
-        <p:nvSpPr>
-          <p:cNvPr id="14" name="TextBox 13"/>
-          <p:cNvSpPr txBox="1"/>
-          <p:nvPr/>
-        </p:nvSpPr>
-        <p:spPr>
-          <a:xfrm>
-            <a:off x="8092440" y="1828800"/>
-            <a:ext cx="3657600" cy="640080"/>
-          </a:xfrm>
-          <a:prstGeom prst="rect">
-            <a:avLst/>
-          </a:prstGeom>
-          <a:noFill/>
-        </p:spPr>
-        <p:txBody>
-          <a:bodyPr wrap="square" anchor="t" lIns="0" rIns="0" tIns="0" bIns="0">
-            <a:spAutoFit/>
-          </a:bodyPr>
-          <a:lstStyle/>
-          <a:p>
-            <a:pPr algn="ctr">
-              <a:lnSpc>
-                <a:spcPct val="115000"/>
-              </a:lnSpc>
-            </a:pPr>
-            <a:r>
-              <a:rPr sz="3200" b="1" i="0">
-                <a:solidFill>
-                  <a:srgbClr val="F28A3C"/>
-                </a:solidFill>
-                <a:latin typeface="맑은 고딕"/>
-              </a:rPr>
-              <a:t>2.3~3.0fps</a:t>
-            </a:r>
-          </a:p>
-        </p:txBody>
-      </p:sp>
-      <p:sp>
-        <p:nvSpPr>
-          <p:cNvPr id="15" name="TextBox 14"/>
-          <p:cNvSpPr txBox="1"/>
-          <p:nvPr/>
-        </p:nvSpPr>
-        <p:spPr>
-          <a:xfrm>
-            <a:off x="8366760" y="2514600"/>
-            <a:ext cx="3108960" cy="822960"/>
-          </a:xfrm>
-          <a:prstGeom prst="rect">
-            <a:avLst/>
-          </a:prstGeom>
-          <a:noFill/>
-        </p:spPr>
-        <p:txBody>
-          <a:bodyPr wrap="square" anchor="t" lIns="0" rIns="0" tIns="0" bIns="0">
-            <a:spAutoFit/>
-          </a:bodyPr>
-          <a:lstStyle/>
-          <a:p>
-            <a:pPr algn="ctr">
-              <a:lnSpc>
-                <a:spcPct val="130000"/>
-              </a:lnSpc>
-            </a:pPr>
-            <a:r>
-              <a:rPr sz="1150" b="0" i="0">
-                <a:solidFill>
-                  <a:srgbClr val="8A8EA3"/>
-                </a:solidFill>
-                <a:latin typeface="맑은 고딕"/>
-              </a:rPr>
-              <a:t>4K 영상 7캠 동시 구동</a:t>
-            </a:r>
-          </a:p>
-          <a:p>
-            <a:pPr algn="ctr">
-              <a:lnSpc>
-                <a:spcPct val="130000"/>
-              </a:lnSpc>
-            </a:pPr>
-            <a:r>
-              <a:rPr sz="1150" b="0" i="0">
-                <a:solidFill>
-                  <a:srgbClr val="8A8EA3"/>
-                </a:solidFill>
-                <a:latin typeface="맑은 고딕"/>
-              </a:rPr>
-              <a:t>끊김 없이 안정 유지</a:t>
-            </a:r>
-          </a:p>
-        </p:txBody>
-      </p:sp>
-      <p:sp>
-        <p:nvSpPr>
-          <p:cNvPr id="16" name="Rounded Rectangle 15"/>
-          <p:cNvSpPr/>
-          <p:nvPr/>
-        </p:nvSpPr>
-        <p:spPr>
-          <a:xfrm>
-            <a:off x="502920" y="3749039"/>
-            <a:ext cx="11201400" cy="1371600"/>
-          </a:xfrm>
-          <a:prstGeom prst="roundRect">
-            <a:avLst>
-              <a:gd name="adj" fmla="val 10000"/>
-            </a:avLst>
-          </a:prstGeom>
-          <a:solidFill>
-            <a:srgbClr val="EAECFC"/>
-          </a:solidFill>
-          <a:ln>
-            <a:noFill/>
-          </a:ln>
-          <a:effectLst/>
-        </p:spPr>
-        <p:style>
-          <a:lnRef idx="1">
-            <a:schemeClr val="accent1"/>
-          </a:lnRef>
-          <a:fillRef idx="3">
-            <a:schemeClr val="accent1"/>
-          </a:fillRef>
-          <a:effectRef idx="2">
-            <a:schemeClr val="accent1"/>
-          </a:effectRef>
-          <a:fontRef idx="minor">
-            <a:schemeClr val="lt1"/>
-          </a:fontRef>
-        </p:style>
-        <p:txBody>
-          <a:bodyPr rtlCol="0" anchor="ctr"/>
-          <a:lstStyle/>
-          <a:p>
-            <a:pPr algn="ctr"/>
-          </a:p>
-        </p:txBody>
-      </p:sp>
       <p:pic>
         <p:nvPicPr>
-          <p:cNvPr id="17" name="Picture 16" descr="bell.png"/>
+          <p:cNvPr id="8" name="Picture 7" descr="chart_bar.png"/>
           <p:cNvPicPr>
             <a:picLocks noChangeAspect="1"/>
           </p:cNvPicPr>
@@ -4186,8 +3768,8 @@
         </p:blipFill>
         <p:spPr>
           <a:xfrm>
-            <a:off x="777240" y="3977639"/>
-            <a:ext cx="502920" cy="502920"/>
+            <a:off x="2103120" y="1874519"/>
+            <a:ext cx="457200" cy="457200"/>
           </a:xfrm>
           <a:prstGeom prst="rect">
             <a:avLst/>
@@ -4196,13 +3778,487 @@
       </p:pic>
       <p:sp>
         <p:nvSpPr>
+          <p:cNvPr id="9" name="TextBox 8"/>
+          <p:cNvSpPr txBox="1"/>
+          <p:nvPr/>
+        </p:nvSpPr>
+        <p:spPr>
+          <a:xfrm>
+            <a:off x="502920" y="2450592"/>
+            <a:ext cx="3657600" cy="640080"/>
+          </a:xfrm>
+          <a:prstGeom prst="rect">
+            <a:avLst/>
+          </a:prstGeom>
+          <a:noFill/>
+        </p:spPr>
+        <p:txBody>
+          <a:bodyPr wrap="square" anchor="t" lIns="0" rIns="0" tIns="0" bIns="0">
+            <a:spAutoFit/>
+          </a:bodyPr>
+          <a:lstStyle/>
+          <a:p>
+            <a:pPr algn="ctr">
+              <a:lnSpc>
+                <a:spcPct val="115000"/>
+              </a:lnSpc>
+            </a:pPr>
+            <a:r>
+              <a:rPr sz="3000" b="1" i="0">
+                <a:solidFill>
+                  <a:srgbClr val="4A55E8"/>
+                </a:solidFill>
+                <a:latin typeface="맑은 고딕"/>
+              </a:rPr>
+              <a:t>67~86명</a:t>
+            </a:r>
+          </a:p>
+        </p:txBody>
+      </p:sp>
+      <p:sp>
+        <p:nvSpPr>
+          <p:cNvPr id="10" name="TextBox 9"/>
+          <p:cNvSpPr txBox="1"/>
+          <p:nvPr/>
+        </p:nvSpPr>
+        <p:spPr>
+          <a:xfrm>
+            <a:off x="777240" y="3108960"/>
+            <a:ext cx="3108960" cy="822960"/>
+          </a:xfrm>
+          <a:prstGeom prst="rect">
+            <a:avLst/>
+          </a:prstGeom>
+          <a:noFill/>
+        </p:spPr>
+        <p:txBody>
+          <a:bodyPr wrap="square" anchor="t" lIns="0" rIns="0" tIns="0" bIns="0">
+            <a:spAutoFit/>
+          </a:bodyPr>
+          <a:lstStyle/>
+          <a:p>
+            <a:pPr algn="ctr">
+              <a:lnSpc>
+                <a:spcPct val="130000"/>
+              </a:lnSpc>
+            </a:pPr>
+            <a:r>
+              <a:rPr sz="1150" b="0" i="0">
+                <a:solidFill>
+                  <a:srgbClr val="8A8EA3"/>
+                </a:solidFill>
+                <a:latin typeface="맑은 고딕"/>
+              </a:rPr>
+              <a:t>비겹침 구도 영상 탐지 인원</a:t>
+            </a:r>
+          </a:p>
+          <a:p>
+            <a:pPr algn="ctr">
+              <a:lnSpc>
+                <a:spcPct val="130000"/>
+              </a:lnSpc>
+            </a:pPr>
+            <a:r>
+              <a:rPr sz="1150" b="0" i="0">
+                <a:solidFill>
+                  <a:srgbClr val="8A8EA3"/>
+                </a:solidFill>
+                <a:latin typeface="맑은 고딕"/>
+              </a:rPr>
+              <a:t>(육안 체감치와 근접)</a:t>
+            </a:r>
+          </a:p>
+        </p:txBody>
+      </p:sp>
+      <p:sp>
+        <p:nvSpPr>
+          <p:cNvPr id="11" name="Rounded Rectangle 10"/>
+          <p:cNvSpPr/>
+          <p:nvPr/>
+        </p:nvSpPr>
+        <p:spPr>
+          <a:xfrm>
+            <a:off x="4297680" y="1645920"/>
+            <a:ext cx="3657600" cy="2423160"/>
+          </a:xfrm>
+          <a:prstGeom prst="roundRect">
+            <a:avLst>
+              <a:gd name="adj" fmla="val 8000"/>
+            </a:avLst>
+          </a:prstGeom>
+          <a:solidFill>
+            <a:srgbClr val="FFFFFF"/>
+          </a:solidFill>
+          <a:ln w="12700">
+            <a:solidFill>
+              <a:srgbClr val="DDE1F2"/>
+            </a:solidFill>
+          </a:ln>
+          <a:effectLst/>
+        </p:spPr>
+        <p:style>
+          <a:lnRef idx="1">
+            <a:schemeClr val="accent1"/>
+          </a:lnRef>
+          <a:fillRef idx="3">
+            <a:schemeClr val="accent1"/>
+          </a:fillRef>
+          <a:effectRef idx="2">
+            <a:schemeClr val="accent1"/>
+          </a:effectRef>
+          <a:fontRef idx="minor">
+            <a:schemeClr val="lt1"/>
+          </a:fontRef>
+        </p:style>
+        <p:txBody>
+          <a:bodyPr rtlCol="0" anchor="ctr"/>
+          <a:lstStyle/>
+          <a:p>
+            <a:pPr algn="ctr"/>
+          </a:p>
+        </p:txBody>
+      </p:sp>
+      <p:pic>
+        <p:nvPicPr>
+          <p:cNvPr id="12" name="Picture 11" descr="bolt.png"/>
+          <p:cNvPicPr>
+            <a:picLocks noChangeAspect="1"/>
+          </p:cNvPicPr>
+          <p:nvPr/>
+        </p:nvPicPr>
+        <p:blipFill>
+          <a:blip r:embed="rId4"/>
+          <a:stretch>
+            <a:fillRect/>
+          </a:stretch>
+        </p:blipFill>
+        <p:spPr>
+          <a:xfrm>
+            <a:off x="5897880" y="1874519"/>
+            <a:ext cx="457200" cy="457200"/>
+          </a:xfrm>
+          <a:prstGeom prst="rect">
+            <a:avLst/>
+          </a:prstGeom>
+        </p:spPr>
+      </p:pic>
+      <p:sp>
+        <p:nvSpPr>
+          <p:cNvPr id="13" name="TextBox 12"/>
+          <p:cNvSpPr txBox="1"/>
+          <p:nvPr/>
+        </p:nvSpPr>
+        <p:spPr>
+          <a:xfrm>
+            <a:off x="4297680" y="2450592"/>
+            <a:ext cx="3657600" cy="640080"/>
+          </a:xfrm>
+          <a:prstGeom prst="rect">
+            <a:avLst/>
+          </a:prstGeom>
+          <a:noFill/>
+        </p:spPr>
+        <p:txBody>
+          <a:bodyPr wrap="square" anchor="t" lIns="0" rIns="0" tIns="0" bIns="0">
+            <a:spAutoFit/>
+          </a:bodyPr>
+          <a:lstStyle/>
+          <a:p>
+            <a:pPr algn="ctr">
+              <a:lnSpc>
+                <a:spcPct val="115000"/>
+              </a:lnSpc>
+            </a:pPr>
+            <a:r>
+              <a:rPr sz="3000" b="1" i="0">
+                <a:solidFill>
+                  <a:srgbClr val="1FA96B"/>
+                </a:solidFill>
+                <a:latin typeface="맑은 고딕"/>
+              </a:rPr>
+              <a:t>8~14fps</a:t>
+            </a:r>
+          </a:p>
+        </p:txBody>
+      </p:sp>
+      <p:sp>
+        <p:nvSpPr>
+          <p:cNvPr id="14" name="TextBox 13"/>
+          <p:cNvSpPr txBox="1"/>
+          <p:nvPr/>
+        </p:nvSpPr>
+        <p:spPr>
+          <a:xfrm>
+            <a:off x="4572000" y="3108960"/>
+            <a:ext cx="3108960" cy="822960"/>
+          </a:xfrm>
+          <a:prstGeom prst="rect">
+            <a:avLst/>
+          </a:prstGeom>
+          <a:noFill/>
+        </p:spPr>
+        <p:txBody>
+          <a:bodyPr wrap="square" anchor="t" lIns="0" rIns="0" tIns="0" bIns="0">
+            <a:spAutoFit/>
+          </a:bodyPr>
+          <a:lstStyle/>
+          <a:p>
+            <a:pPr algn="ctr">
+              <a:lnSpc>
+                <a:spcPct val="130000"/>
+              </a:lnSpc>
+            </a:pPr>
+            <a:r>
+              <a:rPr sz="1150" b="0" i="0">
+                <a:solidFill>
+                  <a:srgbClr val="8A8EA3"/>
+                </a:solidFill>
+                <a:latin typeface="맑은 고딕"/>
+              </a:rPr>
+              <a:t>경량 영상 7캠 동시 구동</a:t>
+            </a:r>
+          </a:p>
+          <a:p>
+            <a:pPr algn="ctr">
+              <a:lnSpc>
+                <a:spcPct val="130000"/>
+              </a:lnSpc>
+            </a:pPr>
+            <a:r>
+              <a:rPr sz="1150" b="0" i="0">
+                <a:solidFill>
+                  <a:srgbClr val="8A8EA3"/>
+                </a:solidFill>
+                <a:latin typeface="맑은 고딕"/>
+              </a:rPr>
+              <a:t>(성능버그 11건 수정 후)</a:t>
+            </a:r>
+          </a:p>
+        </p:txBody>
+      </p:sp>
+      <p:sp>
+        <p:nvSpPr>
+          <p:cNvPr id="15" name="Rounded Rectangle 14"/>
+          <p:cNvSpPr/>
+          <p:nvPr/>
+        </p:nvSpPr>
+        <p:spPr>
+          <a:xfrm>
+            <a:off x="8092440" y="1645920"/>
+            <a:ext cx="3657600" cy="2423160"/>
+          </a:xfrm>
+          <a:prstGeom prst="roundRect">
+            <a:avLst>
+              <a:gd name="adj" fmla="val 8000"/>
+            </a:avLst>
+          </a:prstGeom>
+          <a:solidFill>
+            <a:srgbClr val="FFFFFF"/>
+          </a:solidFill>
+          <a:ln w="12700">
+            <a:solidFill>
+              <a:srgbClr val="DDE1F2"/>
+            </a:solidFill>
+          </a:ln>
+          <a:effectLst/>
+        </p:spPr>
+        <p:style>
+          <a:lnRef idx="1">
+            <a:schemeClr val="accent1"/>
+          </a:lnRef>
+          <a:fillRef idx="3">
+            <a:schemeClr val="accent1"/>
+          </a:fillRef>
+          <a:effectRef idx="2">
+            <a:schemeClr val="accent1"/>
+          </a:effectRef>
+          <a:fontRef idx="minor">
+            <a:schemeClr val="lt1"/>
+          </a:fontRef>
+        </p:style>
+        <p:txBody>
+          <a:bodyPr rtlCol="0" anchor="ctr"/>
+          <a:lstStyle/>
+          <a:p>
+            <a:pPr algn="ctr"/>
+          </a:p>
+        </p:txBody>
+      </p:sp>
+      <p:pic>
+        <p:nvPicPr>
+          <p:cNvPr id="16" name="Picture 15" descr="shield_check.png"/>
+          <p:cNvPicPr>
+            <a:picLocks noChangeAspect="1"/>
+          </p:cNvPicPr>
+          <p:nvPr/>
+        </p:nvPicPr>
+        <p:blipFill>
+          <a:blip r:embed="rId5"/>
+          <a:stretch>
+            <a:fillRect/>
+          </a:stretch>
+        </p:blipFill>
+        <p:spPr>
+          <a:xfrm>
+            <a:off x="9692640" y="1874519"/>
+            <a:ext cx="457200" cy="457200"/>
+          </a:xfrm>
+          <a:prstGeom prst="rect">
+            <a:avLst/>
+          </a:prstGeom>
+        </p:spPr>
+      </p:pic>
+      <p:sp>
+        <p:nvSpPr>
+          <p:cNvPr id="17" name="TextBox 16"/>
+          <p:cNvSpPr txBox="1"/>
+          <p:nvPr/>
+        </p:nvSpPr>
+        <p:spPr>
+          <a:xfrm>
+            <a:off x="8092440" y="2450592"/>
+            <a:ext cx="3657600" cy="640080"/>
+          </a:xfrm>
+          <a:prstGeom prst="rect">
+            <a:avLst/>
+          </a:prstGeom>
+          <a:noFill/>
+        </p:spPr>
+        <p:txBody>
+          <a:bodyPr wrap="square" anchor="t" lIns="0" rIns="0" tIns="0" bIns="0">
+            <a:spAutoFit/>
+          </a:bodyPr>
+          <a:lstStyle/>
+          <a:p>
+            <a:pPr algn="ctr">
+              <a:lnSpc>
+                <a:spcPct val="115000"/>
+              </a:lnSpc>
+            </a:pPr>
+            <a:r>
+              <a:rPr sz="3000" b="1" i="0">
+                <a:solidFill>
+                  <a:srgbClr val="F28A3C"/>
+                </a:solidFill>
+                <a:latin typeface="맑은 고딕"/>
+              </a:rPr>
+              <a:t>2.3~3.0fps</a:t>
+            </a:r>
+          </a:p>
+        </p:txBody>
+      </p:sp>
+      <p:sp>
+        <p:nvSpPr>
           <p:cNvPr id="18" name="TextBox 17"/>
           <p:cNvSpPr txBox="1"/>
           <p:nvPr/>
         </p:nvSpPr>
         <p:spPr>
           <a:xfrm>
-            <a:off x="1508760" y="3931920"/>
+            <a:off x="8366760" y="3108960"/>
+            <a:ext cx="3108960" cy="822960"/>
+          </a:xfrm>
+          <a:prstGeom prst="rect">
+            <a:avLst/>
+          </a:prstGeom>
+          <a:noFill/>
+        </p:spPr>
+        <p:txBody>
+          <a:bodyPr wrap="square" anchor="t" lIns="0" rIns="0" tIns="0" bIns="0">
+            <a:spAutoFit/>
+          </a:bodyPr>
+          <a:lstStyle/>
+          <a:p>
+            <a:pPr algn="ctr">
+              <a:lnSpc>
+                <a:spcPct val="130000"/>
+              </a:lnSpc>
+            </a:pPr>
+            <a:r>
+              <a:rPr sz="1150" b="0" i="0">
+                <a:solidFill>
+                  <a:srgbClr val="8A8EA3"/>
+                </a:solidFill>
+                <a:latin typeface="맑은 고딕"/>
+              </a:rPr>
+              <a:t>4K 영상 7캠 동시 구동</a:t>
+            </a:r>
+          </a:p>
+          <a:p>
+            <a:pPr algn="ctr">
+              <a:lnSpc>
+                <a:spcPct val="130000"/>
+              </a:lnSpc>
+            </a:pPr>
+            <a:r>
+              <a:rPr sz="1150" b="0" i="0">
+                <a:solidFill>
+                  <a:srgbClr val="8A8EA3"/>
+                </a:solidFill>
+                <a:latin typeface="맑은 고딕"/>
+              </a:rPr>
+              <a:t>끊김 없이 안정 유지</a:t>
+            </a:r>
+          </a:p>
+        </p:txBody>
+      </p:sp>
+      <p:sp>
+        <p:nvSpPr>
+          <p:cNvPr id="19" name="Rounded Rectangle 18"/>
+          <p:cNvSpPr/>
+          <p:nvPr/>
+        </p:nvSpPr>
+        <p:spPr>
+          <a:xfrm>
+            <a:off x="502920" y="4343400"/>
+            <a:ext cx="11201400" cy="1920240"/>
+          </a:xfrm>
+          <a:prstGeom prst="roundRect">
+            <a:avLst>
+              <a:gd name="adj" fmla="val 8000"/>
+            </a:avLst>
+          </a:prstGeom>
+          <a:solidFill>
+            <a:srgbClr val="EAECFC"/>
+          </a:solidFill>
+          <a:ln w="12700">
+            <a:solidFill>
+              <a:srgbClr val="DDE1F2"/>
+            </a:solidFill>
+          </a:ln>
+          <a:effectLst/>
+        </p:spPr>
+        <p:style>
+          <a:lnRef idx="1">
+            <a:schemeClr val="accent1"/>
+          </a:lnRef>
+          <a:fillRef idx="3">
+            <a:schemeClr val="accent1"/>
+          </a:fillRef>
+          <a:effectRef idx="2">
+            <a:schemeClr val="accent1"/>
+          </a:effectRef>
+          <a:fontRef idx="minor">
+            <a:schemeClr val="lt1"/>
+          </a:fontRef>
+        </p:style>
+        <p:txBody>
+          <a:bodyPr rtlCol="0" anchor="ctr"/>
+          <a:lstStyle/>
+          <a:p>
+            <a:pPr algn="ctr"/>
+          </a:p>
+        </p:txBody>
+      </p:sp>
+      <p:sp>
+        <p:nvSpPr>
+          <p:cNvPr id="20" name="TextBox 19"/>
+          <p:cNvSpPr txBox="1"/>
+          <p:nvPr/>
+        </p:nvSpPr>
+        <p:spPr>
+          <a:xfrm>
+            <a:off x="777240" y="4553712"/>
             <a:ext cx="9966960" cy="365760"/>
           </a:xfrm>
           <a:prstGeom prst="rect">
@@ -4233,16 +4289,40 @@
           </a:p>
         </p:txBody>
       </p:sp>
-      <p:sp>
-        <p:nvSpPr>
-          <p:cNvPr id="19" name="TextBox 18"/>
-          <p:cNvSpPr txBox="1"/>
-          <p:nvPr/>
-        </p:nvSpPr>
-        <p:spPr>
-          <a:xfrm>
-            <a:off x="1508760" y="4297680"/>
-            <a:ext cx="9966960" cy="731520"/>
+      <p:pic>
+        <p:nvPicPr>
+          <p:cNvPr id="21" name="Picture 20" descr="person.png"/>
+          <p:cNvPicPr>
+            <a:picLocks noChangeAspect="1"/>
+          </p:cNvPicPr>
+          <p:nvPr/>
+        </p:nvPicPr>
+        <p:blipFill>
+          <a:blip r:embed="rId6"/>
+          <a:stretch>
+            <a:fillRect/>
+          </a:stretch>
+        </p:blipFill>
+        <p:spPr>
+          <a:xfrm>
+            <a:off x="777240" y="4992624"/>
+            <a:ext cx="329184" cy="329184"/>
+          </a:xfrm>
+          <a:prstGeom prst="rect">
+            <a:avLst/>
+          </a:prstGeom>
+        </p:spPr>
+      </p:pic>
+      <p:sp>
+        <p:nvSpPr>
+          <p:cNvPr id="22" name="TextBox 21"/>
+          <p:cNvSpPr txBox="1"/>
+          <p:nvPr/>
+        </p:nvSpPr>
+        <p:spPr>
+          <a:xfrm>
+            <a:off x="1280160" y="4974336"/>
+            <a:ext cx="2743200" cy="365760"/>
           </a:xfrm>
           <a:prstGeom prst="rect">
             <a:avLst/>
@@ -4257,27 +4337,152 @@
           <a:p>
             <a:pPr algn="l">
               <a:lnSpc>
-                <a:spcPct val="140000"/>
-              </a:lnSpc>
-            </a:pPr>
-            <a:r>
-              <a:rPr sz="1150" b="0" i="0">
+                <a:spcPct val="115000"/>
+              </a:lnSpc>
+            </a:pPr>
+            <a:r>
+              <a:rPr sz="1100" b="1" i="0">
+                <a:solidFill>
+                  <a:srgbClr val="363FC9"/>
+                </a:solidFill>
+                <a:latin typeface="맑은 고딕"/>
+              </a:rPr>
+              <a:t>상시 감시 인력 부담 경감</a:t>
+            </a:r>
+          </a:p>
+        </p:txBody>
+      </p:sp>
+      <p:sp>
+        <p:nvSpPr>
+          <p:cNvPr id="23" name="TextBox 22"/>
+          <p:cNvSpPr txBox="1"/>
+          <p:nvPr/>
+        </p:nvSpPr>
+        <p:spPr>
+          <a:xfrm>
+            <a:off x="4114800" y="4992624"/>
+            <a:ext cx="7315200" cy="365760"/>
+          </a:xfrm>
+          <a:prstGeom prst="rect">
+            <a:avLst/>
+          </a:prstGeom>
+          <a:noFill/>
+        </p:spPr>
+        <p:txBody>
+          <a:bodyPr wrap="square" anchor="ctr" lIns="0" rIns="0" tIns="0" bIns="0">
+            <a:spAutoFit/>
+          </a:bodyPr>
+          <a:lstStyle/>
+          <a:p>
+            <a:pPr algn="l">
+              <a:lnSpc>
+                <a:spcPct val="120000"/>
+              </a:lnSpc>
+            </a:pPr>
+            <a:r>
+              <a:rPr sz="1030" b="0" i="0">
                 <a:solidFill>
                   <a:srgbClr val="26283A"/>
                 </a:solidFill>
                 <a:latin typeface="맑은 고딕"/>
               </a:rPr>
-              <a:t>상시 감시 인력 부담 경감 — 혼잡 단계가 자동 판정되어 위험 구역 위주로 대응 가능</a:t>
-            </a:r>
-          </a:p>
+              <a:t>혼잡 단계가 자동 판정되어 관제 담당자가 위험 구역 위주로만 대응 가능</a:t>
+            </a:r>
+          </a:p>
+        </p:txBody>
+      </p:sp>
+      <p:pic>
+        <p:nvPicPr>
+          <p:cNvPr id="24" name="Picture 23" descr="gear.png"/>
+          <p:cNvPicPr>
+            <a:picLocks noChangeAspect="1"/>
+          </p:cNvPicPr>
+          <p:nvPr/>
+        </p:nvPicPr>
+        <p:blipFill>
+          <a:blip r:embed="rId7"/>
+          <a:stretch>
+            <a:fillRect/>
+          </a:stretch>
+        </p:blipFill>
+        <p:spPr>
+          <a:xfrm>
+            <a:off x="777240" y="5376672"/>
+            <a:ext cx="329184" cy="329184"/>
+          </a:xfrm>
+          <a:prstGeom prst="rect">
+            <a:avLst/>
+          </a:prstGeom>
+        </p:spPr>
+      </p:pic>
+      <p:sp>
+        <p:nvSpPr>
+          <p:cNvPr id="25" name="TextBox 24"/>
+          <p:cNvSpPr txBox="1"/>
+          <p:nvPr/>
+        </p:nvSpPr>
+        <p:spPr>
+          <a:xfrm>
+            <a:off x="1280160" y="5358384"/>
+            <a:ext cx="2743200" cy="365760"/>
+          </a:xfrm>
+          <a:prstGeom prst="rect">
+            <a:avLst/>
+          </a:prstGeom>
+          <a:noFill/>
+        </p:spPr>
+        <p:txBody>
+          <a:bodyPr wrap="square" anchor="t" lIns="0" rIns="0" tIns="0" bIns="0">
+            <a:spAutoFit/>
+          </a:bodyPr>
+          <a:lstStyle/>
           <a:p>
             <a:pPr algn="l">
               <a:lnSpc>
-                <a:spcPct val="140000"/>
-              </a:lnSpc>
-            </a:pPr>
-            <a:r>
-              <a:rPr sz="1150" b="0" i="0">
+                <a:spcPct val="115000"/>
+              </a:lnSpc>
+            </a:pPr>
+            <a:r>
+              <a:rPr sz="1100" b="1" i="0">
+                <a:solidFill>
+                  <a:srgbClr val="363FC9"/>
+                </a:solidFill>
+                <a:latin typeface="맑은 고딕"/>
+              </a:rPr>
+              <a:t>장소별 맞춤 민감도 설정</a:t>
+            </a:r>
+          </a:p>
+        </p:txBody>
+      </p:sp>
+      <p:sp>
+        <p:nvSpPr>
+          <p:cNvPr id="26" name="TextBox 25"/>
+          <p:cNvSpPr txBox="1"/>
+          <p:nvPr/>
+        </p:nvSpPr>
+        <p:spPr>
+          <a:xfrm>
+            <a:off x="4114800" y="5376672"/>
+            <a:ext cx="7315200" cy="365760"/>
+          </a:xfrm>
+          <a:prstGeom prst="rect">
+            <a:avLst/>
+          </a:prstGeom>
+          <a:noFill/>
+        </p:spPr>
+        <p:txBody>
+          <a:bodyPr wrap="square" anchor="ctr" lIns="0" rIns="0" tIns="0" bIns="0">
+            <a:spAutoFit/>
+          </a:bodyPr>
+          <a:lstStyle/>
+          <a:p>
+            <a:pPr algn="l">
+              <a:lnSpc>
+                <a:spcPct val="120000"/>
+              </a:lnSpc>
+            </a:pPr>
+            <a:r>
+              <a:rPr sz="1030" b="0" i="0">
                 <a:solidFill>
                   <a:srgbClr val="26283A"/>
                 </a:solidFill>
@@ -4288,9 +4493,111 @@
           </a:p>
         </p:txBody>
       </p:sp>
-      <p:sp>
-        <p:nvSpPr>
-          <p:cNvPr id="20" name="TextBox 19"/>
+      <p:pic>
+        <p:nvPicPr>
+          <p:cNvPr id="27" name="Picture 26" descr="play.png"/>
+          <p:cNvPicPr>
+            <a:picLocks noChangeAspect="1"/>
+          </p:cNvPicPr>
+          <p:nvPr/>
+        </p:nvPicPr>
+        <p:blipFill>
+          <a:blip r:embed="rId8"/>
+          <a:stretch>
+            <a:fillRect/>
+          </a:stretch>
+        </p:blipFill>
+        <p:spPr>
+          <a:xfrm>
+            <a:off x="777240" y="5760720"/>
+            <a:ext cx="329184" cy="329184"/>
+          </a:xfrm>
+          <a:prstGeom prst="rect">
+            <a:avLst/>
+          </a:prstGeom>
+        </p:spPr>
+      </p:pic>
+      <p:sp>
+        <p:nvSpPr>
+          <p:cNvPr id="28" name="TextBox 27"/>
+          <p:cNvSpPr txBox="1"/>
+          <p:nvPr/>
+        </p:nvSpPr>
+        <p:spPr>
+          <a:xfrm>
+            <a:off x="1280160" y="5742432"/>
+            <a:ext cx="2743200" cy="365760"/>
+          </a:xfrm>
+          <a:prstGeom prst="rect">
+            <a:avLst/>
+          </a:prstGeom>
+          <a:noFill/>
+        </p:spPr>
+        <p:txBody>
+          <a:bodyPr wrap="square" anchor="t" lIns="0" rIns="0" tIns="0" bIns="0">
+            <a:spAutoFit/>
+          </a:bodyPr>
+          <a:lstStyle/>
+          <a:p>
+            <a:pPr algn="l">
+              <a:lnSpc>
+                <a:spcPct val="115000"/>
+              </a:lnSpc>
+            </a:pPr>
+            <a:r>
+              <a:rPr sz="1100" b="1" i="0">
+                <a:solidFill>
+                  <a:srgbClr val="363FC9"/>
+                </a:solidFill>
+                <a:latin typeface="맑은 고딕"/>
+              </a:rPr>
+              <a:t>실카메라 없이도 데모 가능</a:t>
+            </a:r>
+          </a:p>
+        </p:txBody>
+      </p:sp>
+      <p:sp>
+        <p:nvSpPr>
+          <p:cNvPr id="29" name="TextBox 28"/>
+          <p:cNvSpPr txBox="1"/>
+          <p:nvPr/>
+        </p:nvSpPr>
+        <p:spPr>
+          <a:xfrm>
+            <a:off x="4114800" y="5760720"/>
+            <a:ext cx="7315200" cy="365760"/>
+          </a:xfrm>
+          <a:prstGeom prst="rect">
+            <a:avLst/>
+          </a:prstGeom>
+          <a:noFill/>
+        </p:spPr>
+        <p:txBody>
+          <a:bodyPr wrap="square" anchor="ctr" lIns="0" rIns="0" tIns="0" bIns="0">
+            <a:spAutoFit/>
+          </a:bodyPr>
+          <a:lstStyle/>
+          <a:p>
+            <a:pPr algn="l">
+              <a:lnSpc>
+                <a:spcPct val="120000"/>
+              </a:lnSpc>
+            </a:pPr>
+            <a:r>
+              <a:rPr sz="1030" b="0" i="0">
+                <a:solidFill>
+                  <a:srgbClr val="26283A"/>
+                </a:solidFill>
+                <a:latin typeface="맑은 고딕"/>
+              </a:rPr>
+              <a:t>더미캠 구조로 실제 드론·CCTV 장비 없이도 전체 파이프라인을 반복 검증·시연</a:t>
+            </a:r>
+          </a:p>
+        </p:txBody>
+      </p:sp>
+      <p:sp>
+        <p:nvSpPr>
+          <p:cNvPr id="30" name="TextBox 29"/>
           <p:cNvSpPr txBox="1"/>
           <p:nvPr/>
         </p:nvSpPr>
@@ -4329,7 +4636,7 @@
       </p:sp>
       <p:sp>
         <p:nvSpPr>
-          <p:cNvPr id="21" name="TextBox 20"/>
+          <p:cNvPr id="31" name="TextBox 30"/>
           <p:cNvSpPr txBox="1"/>
           <p:nvPr/>
         </p:nvSpPr>
@@ -4627,8 +4934,10 @@
           <a:solidFill>
             <a:srgbClr val="FFFFFF"/>
           </a:solidFill>
-          <a:ln>
-            <a:noFill/>
+          <a:ln w="12700">
+            <a:solidFill>
+              <a:srgbClr val="DDE1F2"/>
+            </a:solidFill>
           </a:ln>
           <a:effectLst/>
         </p:spPr>
@@ -4717,11 +5026,11 @@
           <a:p>
             <a:pPr algn="l">
               <a:lnSpc>
-                <a:spcPct val="125000"/>
-              </a:lnSpc>
-            </a:pPr>
-            <a:r>
-              <a:rPr sz="1000" b="0" i="0">
+                <a:spcPct val="130000"/>
+              </a:lnSpc>
+            </a:pPr>
+            <a:r>
+              <a:rPr sz="950" b="0" i="0">
                 <a:solidFill>
                   <a:srgbClr val="26283A"/>
                 </a:solidFill>
@@ -4741,7 +5050,7 @@
         <p:spPr>
           <a:xfrm>
             <a:off x="502920" y="2331720"/>
-            <a:ext cx="5440680" cy="548640"/>
+            <a:ext cx="5440680" cy="502920"/>
           </a:xfrm>
           <a:prstGeom prst="roundRect">
             <a:avLst>
@@ -4751,8 +5060,10 @@
           <a:solidFill>
             <a:srgbClr val="FFFFFF"/>
           </a:solidFill>
-          <a:ln>
-            <a:noFill/>
+          <a:ln w="12700">
+            <a:solidFill>
+              <a:srgbClr val="DDE1F2"/>
+            </a:solidFill>
           </a:ln>
           <a:effectLst/>
         </p:spPr>
@@ -4826,7 +5137,7 @@
         <p:spPr>
           <a:xfrm>
             <a:off x="667512" y="2679192"/>
-            <a:ext cx="5166360" cy="182879"/>
+            <a:ext cx="5166360" cy="137160"/>
           </a:xfrm>
           <a:prstGeom prst="rect">
             <a:avLst/>
@@ -4841,11 +5152,11 @@
           <a:p>
             <a:pPr algn="l">
               <a:lnSpc>
-                <a:spcPct val="125000"/>
-              </a:lnSpc>
-            </a:pPr>
-            <a:r>
-              <a:rPr sz="1000" b="0" i="0">
+                <a:spcPct val="130000"/>
+              </a:lnSpc>
+            </a:pPr>
+            <a:r>
+              <a:rPr sz="950" b="0" i="0">
                 <a:solidFill>
                   <a:srgbClr val="26283A"/>
                 </a:solidFill>
@@ -4864,7 +5175,7 @@
         </p:nvSpPr>
         <p:spPr>
           <a:xfrm>
-            <a:off x="502920" y="2971800"/>
+            <a:off x="502920" y="2926080"/>
             <a:ext cx="5440680" cy="1188720"/>
           </a:xfrm>
           <a:prstGeom prst="roundRect">
@@ -4875,8 +5186,10 @@
           <a:solidFill>
             <a:srgbClr val="FFFFFF"/>
           </a:solidFill>
-          <a:ln>
-            <a:noFill/>
+          <a:ln w="12700">
+            <a:solidFill>
+              <a:srgbClr val="DDE1F2"/>
+            </a:solidFill>
           </a:ln>
           <a:effectLst/>
         </p:spPr>
@@ -4910,7 +5223,7 @@
         </p:nvSpPr>
         <p:spPr>
           <a:xfrm>
-            <a:off x="667512" y="3044952"/>
+            <a:off x="667512" y="2999232"/>
             <a:ext cx="5166360" cy="274320"/>
           </a:xfrm>
           <a:prstGeom prst="rect">
@@ -4949,7 +5262,7 @@
         </p:nvSpPr>
         <p:spPr>
           <a:xfrm>
-            <a:off x="667512" y="3319272"/>
+            <a:off x="667512" y="3273552"/>
             <a:ext cx="5166360" cy="822960"/>
           </a:xfrm>
           <a:prstGeom prst="rect">
@@ -4965,17 +5278,33 @@
           <a:p>
             <a:pPr algn="l">
               <a:lnSpc>
-                <a:spcPct val="125000"/>
-              </a:lnSpc>
-            </a:pPr>
-            <a:r>
-              <a:rPr sz="1000" b="0" i="0">
+                <a:spcPct val="130000"/>
+              </a:lnSpc>
+            </a:pPr>
+            <a:r>
+              <a:rPr sz="950" b="0" i="0">
                 <a:solidFill>
                   <a:srgbClr val="26283A"/>
                 </a:solidFill>
                 <a:latin typeface="맑은 고딕"/>
               </a:rPr>
-              <a:t>구역별 상태색 마커 + 이벤트 배지, 클릭→확대모달</a:t>
+              <a:t>구역별 상태색 마커(정상·주의·위험) + 진행 중 이벤트 수 배지, 클릭 시 해당 캠 확대모달</a:t>
+            </a:r>
+          </a:p>
+          <a:p>
+            <a:pPr algn="l">
+              <a:lnSpc>
+                <a:spcPct val="130000"/>
+              </a:lnSpc>
+            </a:pPr>
+            <a:r>
+              <a:rPr sz="950" b="0" i="0">
+                <a:solidFill>
+                  <a:srgbClr val="26283A"/>
+                </a:solidFill>
+                <a:latin typeface="맑은 고딕"/>
+              </a:rPr>
+              <a:t>드래그로 지도 높이 조절, 빈 곳 우클릭 시 새 구역·카메라 바로 등록</a:t>
             </a:r>
           </a:p>
         </p:txBody>
@@ -4988,8 +5317,8 @@
         </p:nvSpPr>
         <p:spPr>
           <a:xfrm>
-            <a:off x="502920" y="4251960"/>
-            <a:ext cx="5440680" cy="1234440"/>
+            <a:off x="502920" y="4206240"/>
+            <a:ext cx="5440680" cy="1188720"/>
           </a:xfrm>
           <a:prstGeom prst="roundRect">
             <a:avLst>
@@ -4999,8 +5328,10 @@
           <a:solidFill>
             <a:srgbClr val="FFFFFF"/>
           </a:solidFill>
-          <a:ln>
-            <a:noFill/>
+          <a:ln w="12700">
+            <a:solidFill>
+              <a:srgbClr val="DDE1F2"/>
+            </a:solidFill>
           </a:ln>
           <a:effectLst/>
         </p:spPr>
@@ -5034,7 +5365,7 @@
         </p:nvSpPr>
         <p:spPr>
           <a:xfrm>
-            <a:off x="667512" y="4325112"/>
+            <a:off x="667512" y="4279392"/>
             <a:ext cx="5166360" cy="274320"/>
           </a:xfrm>
           <a:prstGeom prst="rect">
@@ -5073,8 +5404,8 @@
         </p:nvSpPr>
         <p:spPr>
           <a:xfrm>
-            <a:off x="667512" y="4599432"/>
-            <a:ext cx="5166360" cy="868680"/>
+            <a:off x="667512" y="4553712"/>
+            <a:ext cx="5166360" cy="822960"/>
           </a:xfrm>
           <a:prstGeom prst="rect">
             <a:avLst/>
@@ -5089,81 +5420,60 @@
           <a:p>
             <a:pPr algn="l">
               <a:lnSpc>
-                <a:spcPct val="125000"/>
-              </a:lnSpc>
-            </a:pPr>
-            <a:r>
-              <a:rPr sz="1000" b="0" i="0">
+                <a:spcPct val="130000"/>
+              </a:lnSpc>
+            </a:pPr>
+            <a:r>
+              <a:rPr sz="950" b="0" i="0">
                 <a:solidFill>
                   <a:srgbClr val="26283A"/>
                 </a:solidFill>
                 <a:latin typeface="맑은 고딕"/>
               </a:rPr>
-              <a:t>체크박스·상태뱃지·썸네일·액션버튼, '▶통계' 패널</a:t>
-            </a:r>
-          </a:p>
-        </p:txBody>
-      </p:sp>
-      <p:sp>
-        <p:nvSpPr>
-          <p:cNvPr id="20" name="TextBox 19"/>
-          <p:cNvSpPr txBox="1"/>
-          <p:nvPr/>
-        </p:nvSpPr>
-        <p:spPr>
-          <a:xfrm>
-            <a:off x="6217920" y="1417320"/>
-            <a:ext cx="5440680" cy="320040"/>
-          </a:xfrm>
-          <a:prstGeom prst="rect">
-            <a:avLst/>
-          </a:prstGeom>
-          <a:noFill/>
-        </p:spPr>
-        <p:txBody>
-          <a:bodyPr wrap="square" anchor="t" lIns="0" rIns="0" tIns="0" bIns="0">
-            <a:spAutoFit/>
-          </a:bodyPr>
-          <a:lstStyle/>
+              <a:t>체크박스·상태뱃지·위치(구·동·면적)·실시간 썸네일('영상 없음' 포함)·액션버튼</a:t>
+            </a:r>
+          </a:p>
           <a:p>
             <a:pPr algn="l">
               <a:lnSpc>
-                <a:spcPct val="115000"/>
-              </a:lnSpc>
-            </a:pPr>
-            <a:r>
-              <a:rPr sz="1250" b="1" i="0">
-                <a:solidFill>
-                  <a:srgbClr val="363FC9"/>
-                </a:solidFill>
-                <a:latin typeface="맑은 고딕"/>
-              </a:rPr>
-              <a:t>mobile-app (Android) — 화면 흐름</a:t>
-            </a:r>
-          </a:p>
-        </p:txBody>
-      </p:sp>
-      <p:sp>
-        <p:nvSpPr>
-          <p:cNvPr id="21" name="Rounded Rectangle 20"/>
+                <a:spcPct val="130000"/>
+              </a:lnSpc>
+            </a:pPr>
+            <a:r>
+              <a:rPr sz="950" b="0" i="0">
+                <a:solidFill>
+                  <a:srgbClr val="26283A"/>
+                </a:solidFill>
+                <a:latin typeface="맑은 고딕"/>
+              </a:rPr>
+              <a:t>'전체 펼치기'/'4분할 보기' 토글, 클릭 시 '▶통계' 패널</a:t>
+            </a:r>
+          </a:p>
+        </p:txBody>
+      </p:sp>
+      <p:sp>
+        <p:nvSpPr>
+          <p:cNvPr id="20" name="Rounded Rectangle 19"/>
           <p:cNvSpPr/>
           <p:nvPr/>
         </p:nvSpPr>
         <p:spPr>
           <a:xfrm>
-            <a:off x="6217920" y="1783080"/>
-            <a:ext cx="5440680" cy="530352"/>
+            <a:off x="502920" y="5486400"/>
+            <a:ext cx="5440680" cy="914400"/>
           </a:xfrm>
           <a:prstGeom prst="roundRect">
             <a:avLst>
-              <a:gd name="adj" fmla="val 20000"/>
+              <a:gd name="adj" fmla="val 8000"/>
             </a:avLst>
           </a:prstGeom>
           <a:solidFill>
-            <a:srgbClr val="EAECFC"/>
+            <a:srgbClr val="FFFFFF"/>
           </a:solidFill>
-          <a:ln>
-            <a:noFill/>
+          <a:ln w="12700">
+            <a:solidFill>
+              <a:srgbClr val="DDE1F2"/>
+            </a:solidFill>
           </a:ln>
           <a:effectLst/>
         </p:spPr>
@@ -5191,14 +5501,179 @@
       </p:sp>
       <p:sp>
         <p:nvSpPr>
-          <p:cNvPr id="22" name="Oval 21"/>
+          <p:cNvPr id="21" name="TextBox 20"/>
+          <p:cNvSpPr txBox="1"/>
+          <p:nvPr/>
+        </p:nvSpPr>
+        <p:spPr>
+          <a:xfrm>
+            <a:off x="667512" y="5559552"/>
+            <a:ext cx="5166360" cy="274320"/>
+          </a:xfrm>
+          <a:prstGeom prst="rect">
+            <a:avLst/>
+          </a:prstGeom>
+          <a:noFill/>
+        </p:spPr>
+        <p:txBody>
+          <a:bodyPr wrap="square" anchor="t" lIns="0" rIns="0" tIns="0" bIns="0">
+            <a:spAutoFit/>
+          </a:bodyPr>
+          <a:lstStyle/>
+          <a:p>
+            <a:pPr algn="l">
+              <a:lnSpc>
+                <a:spcPct val="115000"/>
+              </a:lnSpc>
+            </a:pPr>
+            <a:r>
+              <a:rPr sz="1100" b="1" i="0">
+                <a:solidFill>
+                  <a:srgbClr val="363FC9"/>
+                </a:solidFill>
+                <a:latin typeface="맑은 고딕"/>
+              </a:rPr>
+              <a:t>통계 패널(오버레이)</a:t>
+            </a:r>
+          </a:p>
+        </p:txBody>
+      </p:sp>
+      <p:sp>
+        <p:nvSpPr>
+          <p:cNvPr id="22" name="TextBox 21"/>
+          <p:cNvSpPr txBox="1"/>
+          <p:nvPr/>
+        </p:nvSpPr>
+        <p:spPr>
+          <a:xfrm>
+            <a:off x="667512" y="5833872"/>
+            <a:ext cx="5166360" cy="548640"/>
+          </a:xfrm>
+          <a:prstGeom prst="rect">
+            <a:avLst/>
+          </a:prstGeom>
+          <a:noFill/>
+        </p:spPr>
+        <p:txBody>
+          <a:bodyPr wrap="square" anchor="t" lIns="0" rIns="0" tIns="0" bIns="0">
+            <a:spAutoFit/>
+          </a:bodyPr>
+          <a:lstStyle/>
+          <a:p>
+            <a:pPr algn="l">
+              <a:lnSpc>
+                <a:spcPct val="130000"/>
+              </a:lnSpc>
+            </a:pPr>
+            <a:r>
+              <a:rPr sz="950" b="0" i="0">
+                <a:solidFill>
+                  <a:srgbClr val="26283A"/>
+                </a:solidFill>
+                <a:latin typeface="맑은 고딕"/>
+              </a:rPr>
+              <a:t>도넛차트+요약 카드 + 아코디언(인원·밀집도 / 유입유출 / 이동분석 / 임계치 설정 / 피크시간 / 비정상변동)</a:t>
+            </a:r>
+          </a:p>
+        </p:txBody>
+      </p:sp>
+      <p:sp>
+        <p:nvSpPr>
+          <p:cNvPr id="23" name="TextBox 22"/>
+          <p:cNvSpPr txBox="1"/>
+          <p:nvPr/>
+        </p:nvSpPr>
+        <p:spPr>
+          <a:xfrm>
+            <a:off x="6217920" y="1417320"/>
+            <a:ext cx="5440680" cy="320040"/>
+          </a:xfrm>
+          <a:prstGeom prst="rect">
+            <a:avLst/>
+          </a:prstGeom>
+          <a:noFill/>
+        </p:spPr>
+        <p:txBody>
+          <a:bodyPr wrap="square" anchor="t" lIns="0" rIns="0" tIns="0" bIns="0">
+            <a:spAutoFit/>
+          </a:bodyPr>
+          <a:lstStyle/>
+          <a:p>
+            <a:pPr algn="l">
+              <a:lnSpc>
+                <a:spcPct val="115000"/>
+              </a:lnSpc>
+            </a:pPr>
+            <a:r>
+              <a:rPr sz="1250" b="1" i="0">
+                <a:solidFill>
+                  <a:srgbClr val="363FC9"/>
+                </a:solidFill>
+                <a:latin typeface="맑은 고딕"/>
+              </a:rPr>
+              <a:t>mobile-app (Android) — 화면 흐름</a:t>
+            </a:r>
+          </a:p>
+        </p:txBody>
+      </p:sp>
+      <p:sp>
+        <p:nvSpPr>
+          <p:cNvPr id="24" name="Rounded Rectangle 23"/>
           <p:cNvSpPr/>
           <p:nvPr/>
         </p:nvSpPr>
         <p:spPr>
           <a:xfrm>
-            <a:off x="6373368" y="1911096"/>
-            <a:ext cx="274320" cy="274320"/>
+            <a:off x="6217920" y="1783080"/>
+            <a:ext cx="5440680" cy="841248"/>
+          </a:xfrm>
+          <a:prstGeom prst="roundRect">
+            <a:avLst>
+              <a:gd name="adj" fmla="val 12000"/>
+            </a:avLst>
+          </a:prstGeom>
+          <a:solidFill>
+            <a:srgbClr val="EAECFC"/>
+          </a:solidFill>
+          <a:ln w="12700">
+            <a:solidFill>
+              <a:srgbClr val="DDE1F2"/>
+            </a:solidFill>
+          </a:ln>
+          <a:effectLst/>
+        </p:spPr>
+        <p:style>
+          <a:lnRef idx="1">
+            <a:schemeClr val="accent1"/>
+          </a:lnRef>
+          <a:fillRef idx="3">
+            <a:schemeClr val="accent1"/>
+          </a:fillRef>
+          <a:effectRef idx="2">
+            <a:schemeClr val="accent1"/>
+          </a:effectRef>
+          <a:fontRef idx="minor">
+            <a:schemeClr val="lt1"/>
+          </a:fontRef>
+        </p:style>
+        <p:txBody>
+          <a:bodyPr rtlCol="0" anchor="ctr"/>
+          <a:lstStyle/>
+          <a:p>
+            <a:pPr algn="ctr"/>
+          </a:p>
+        </p:txBody>
+      </p:sp>
+      <p:sp>
+        <p:nvSpPr>
+          <p:cNvPr id="25" name="Oval 24"/>
+          <p:cNvSpPr/>
+          <p:nvPr/>
+        </p:nvSpPr>
+        <p:spPr>
+          <a:xfrm>
+            <a:off x="6428232" y="2048256"/>
+            <a:ext cx="310896" cy="310896"/>
           </a:xfrm>
           <a:prstGeom prst="ellipse">
             <a:avLst/>
@@ -5231,7 +5706,7 @@
           <a:p>
             <a:pPr algn="ctr"/>
             <a:r>
-              <a:rPr sz="1100" b="1">
+              <a:rPr sz="1200" b="1">
                 <a:solidFill>
                   <a:srgbClr val="FFFFFF"/>
                 </a:solidFill>
@@ -5244,14 +5719,14 @@
       </p:sp>
       <p:sp>
         <p:nvSpPr>
-          <p:cNvPr id="23" name="TextBox 22"/>
-          <p:cNvSpPr txBox="1"/>
-          <p:nvPr/>
-        </p:nvSpPr>
-        <p:spPr>
-          <a:xfrm>
-            <a:off x="6766560" y="1837944"/>
-            <a:ext cx="2103120" cy="256032"/>
+          <p:cNvPr id="26" name="TextBox 25"/>
+          <p:cNvSpPr txBox="1"/>
+          <p:nvPr/>
+        </p:nvSpPr>
+        <p:spPr>
+          <a:xfrm>
+            <a:off x="6876288" y="1856232"/>
+            <a:ext cx="4617720" cy="256032"/>
           </a:xfrm>
           <a:prstGeom prst="rect">
             <a:avLst/>
@@ -5270,7 +5745,7 @@
               </a:lnSpc>
             </a:pPr>
             <a:r>
-              <a:rPr sz="1100" b="1" i="0">
+              <a:rPr sz="1150" b="1" i="0">
                 <a:solidFill>
                   <a:srgbClr val="363FC9"/>
                 </a:solidFill>
@@ -5283,14 +5758,14 @@
       </p:sp>
       <p:sp>
         <p:nvSpPr>
-          <p:cNvPr id="24" name="TextBox 23"/>
-          <p:cNvSpPr txBox="1"/>
-          <p:nvPr/>
-        </p:nvSpPr>
-        <p:spPr>
-          <a:xfrm>
-            <a:off x="6766560" y="2075688"/>
-            <a:ext cx="4754880" cy="219456"/>
+          <p:cNvPr id="27" name="TextBox 26"/>
+          <p:cNvSpPr txBox="1"/>
+          <p:nvPr/>
+        </p:nvSpPr>
+        <p:spPr>
+          <a:xfrm>
+            <a:off x="6876288" y="2130552"/>
+            <a:ext cx="4617720" cy="219456"/>
           </a:xfrm>
           <a:prstGeom prst="rect">
             <a:avLst/>
@@ -5311,36 +5786,77 @@
             <a:r>
               <a:rPr sz="950" b="0" i="0">
                 <a:solidFill>
+                  <a:srgbClr val="26283A"/>
+                </a:solidFill>
+                <a:latin typeface="맑은 고딕"/>
+              </a:rPr>
+              <a:t>로그인/회원가입 탭 전환</a:t>
+            </a:r>
+          </a:p>
+        </p:txBody>
+      </p:sp>
+      <p:sp>
+        <p:nvSpPr>
+          <p:cNvPr id="28" name="TextBox 27"/>
+          <p:cNvSpPr txBox="1"/>
+          <p:nvPr/>
+        </p:nvSpPr>
+        <p:spPr>
+          <a:xfrm>
+            <a:off x="6876288" y="2359152"/>
+            <a:ext cx="4617720" cy="237744"/>
+          </a:xfrm>
+          <a:prstGeom prst="rect">
+            <a:avLst/>
+          </a:prstGeom>
+          <a:noFill/>
+        </p:spPr>
+        <p:txBody>
+          <a:bodyPr wrap="square" anchor="t" lIns="0" rIns="0" tIns="0" bIns="0">
+            <a:spAutoFit/>
+          </a:bodyPr>
+          <a:lstStyle/>
+          <a:p>
+            <a:pPr algn="l">
+              <a:lnSpc>
+                <a:spcPct val="115000"/>
+              </a:lnSpc>
+            </a:pPr>
+            <a:r>
+              <a:rPr sz="850" b="0" i="0">
+                <a:solidFill>
                   <a:srgbClr val="8A8EA3"/>
                 </a:solidFill>
                 <a:latin typeface="맑은 고딕"/>
               </a:rPr>
-              <a:t>로그인/회원가입 탭 전환</a:t>
-            </a:r>
-          </a:p>
-        </p:txBody>
-      </p:sp>
-      <p:sp>
-        <p:nvSpPr>
-          <p:cNvPr id="25" name="Rounded Rectangle 24"/>
+              <a:t>세션 쿠키 유지(CookieManager 등록)</a:t>
+            </a:r>
+          </a:p>
+        </p:txBody>
+      </p:sp>
+      <p:sp>
+        <p:nvSpPr>
+          <p:cNvPr id="29" name="Rounded Rectangle 28"/>
           <p:cNvSpPr/>
           <p:nvPr/>
         </p:nvSpPr>
         <p:spPr>
           <a:xfrm>
-            <a:off x="6217920" y="2404872"/>
-            <a:ext cx="5440680" cy="530352"/>
+            <a:off x="6217920" y="2734056"/>
+            <a:ext cx="5440680" cy="841248"/>
           </a:xfrm>
           <a:prstGeom prst="roundRect">
             <a:avLst>
-              <a:gd name="adj" fmla="val 20000"/>
+              <a:gd name="adj" fmla="val 12000"/>
             </a:avLst>
           </a:prstGeom>
           <a:solidFill>
             <a:srgbClr val="FFFFFF"/>
           </a:solidFill>
-          <a:ln>
-            <a:noFill/>
+          <a:ln w="12700">
+            <a:solidFill>
+              <a:srgbClr val="DDE1F2"/>
+            </a:solidFill>
           </a:ln>
           <a:effectLst/>
         </p:spPr>
@@ -5368,14 +5884,14 @@
       </p:sp>
       <p:sp>
         <p:nvSpPr>
-          <p:cNvPr id="26" name="Oval 25"/>
+          <p:cNvPr id="30" name="Oval 29"/>
           <p:cNvSpPr/>
           <p:nvPr/>
         </p:nvSpPr>
         <p:spPr>
           <a:xfrm>
-            <a:off x="6373368" y="2532888"/>
-            <a:ext cx="274320" cy="274320"/>
+            <a:off x="6428232" y="2999232"/>
+            <a:ext cx="310896" cy="310896"/>
           </a:xfrm>
           <a:prstGeom prst="ellipse">
             <a:avLst/>
@@ -5408,7 +5924,7 @@
           <a:p>
             <a:pPr algn="ctr"/>
             <a:r>
-              <a:rPr sz="1100" b="1">
+              <a:rPr sz="1200" b="1">
                 <a:solidFill>
                   <a:srgbClr val="FFFFFF"/>
                 </a:solidFill>
@@ -5421,14 +5937,14 @@
       </p:sp>
       <p:sp>
         <p:nvSpPr>
-          <p:cNvPr id="27" name="TextBox 26"/>
-          <p:cNvSpPr txBox="1"/>
-          <p:nvPr/>
-        </p:nvSpPr>
-        <p:spPr>
-          <a:xfrm>
-            <a:off x="6766560" y="2459736"/>
-            <a:ext cx="2103120" cy="256032"/>
+          <p:cNvPr id="31" name="TextBox 30"/>
+          <p:cNvSpPr txBox="1"/>
+          <p:nvPr/>
+        </p:nvSpPr>
+        <p:spPr>
+          <a:xfrm>
+            <a:off x="6876288" y="2807208"/>
+            <a:ext cx="4617720" cy="256032"/>
           </a:xfrm>
           <a:prstGeom prst="rect">
             <a:avLst/>
@@ -5447,7 +5963,7 @@
               </a:lnSpc>
             </a:pPr>
             <a:r>
-              <a:rPr sz="1100" b="1" i="0">
+              <a:rPr sz="1150" b="1" i="0">
                 <a:solidFill>
                   <a:srgbClr val="363FC9"/>
                 </a:solidFill>
@@ -5460,14 +5976,14 @@
       </p:sp>
       <p:sp>
         <p:nvSpPr>
-          <p:cNvPr id="28" name="TextBox 27"/>
-          <p:cNvSpPr txBox="1"/>
-          <p:nvPr/>
-        </p:nvSpPr>
-        <p:spPr>
-          <a:xfrm>
-            <a:off x="6766560" y="2697480"/>
-            <a:ext cx="4754880" cy="219456"/>
+          <p:cNvPr id="32" name="TextBox 31"/>
+          <p:cNvSpPr txBox="1"/>
+          <p:nvPr/>
+        </p:nvSpPr>
+        <p:spPr>
+          <a:xfrm>
+            <a:off x="6876288" y="3081528"/>
+            <a:ext cx="4617720" cy="219456"/>
           </a:xfrm>
           <a:prstGeom prst="rect">
             <a:avLst/>
@@ -5488,36 +6004,77 @@
             <a:r>
               <a:rPr sz="950" b="0" i="0">
                 <a:solidFill>
+                  <a:srgbClr val="26283A"/>
+                </a:solidFill>
+                <a:latin typeface="맑은 고딕"/>
+              </a:rPr>
+              <a:t>구역 목록 + 대표 캠 상태</a:t>
+            </a:r>
+          </a:p>
+        </p:txBody>
+      </p:sp>
+      <p:sp>
+        <p:nvSpPr>
+          <p:cNvPr id="33" name="TextBox 32"/>
+          <p:cNvSpPr txBox="1"/>
+          <p:nvPr/>
+        </p:nvSpPr>
+        <p:spPr>
+          <a:xfrm>
+            <a:off x="6876288" y="3310128"/>
+            <a:ext cx="4617720" cy="237744"/>
+          </a:xfrm>
+          <a:prstGeom prst="rect">
+            <a:avLst/>
+          </a:prstGeom>
+          <a:noFill/>
+        </p:spPr>
+        <p:txBody>
+          <a:bodyPr wrap="square" anchor="t" lIns="0" rIns="0" tIns="0" bIns="0">
+            <a:spAutoFit/>
+          </a:bodyPr>
+          <a:lstStyle/>
+          <a:p>
+            <a:pPr algn="l">
+              <a:lnSpc>
+                <a:spcPct val="115000"/>
+              </a:lnSpc>
+            </a:pPr>
+            <a:r>
+              <a:rPr sz="850" b="0" i="0">
+                <a:solidFill>
                   <a:srgbClr val="8A8EA3"/>
                 </a:solidFill>
                 <a:latin typeface="맑은 고딕"/>
               </a:rPr>
-              <a:t>구역 목록 + 대표 캠 상태</a:t>
-            </a:r>
-          </a:p>
-        </p:txBody>
-      </p:sp>
-      <p:sp>
-        <p:nvSpPr>
-          <p:cNvPr id="29" name="Rounded Rectangle 28"/>
+              <a:t>구역별 카드에 대표 캠 상태 표시</a:t>
+            </a:r>
+          </a:p>
+        </p:txBody>
+      </p:sp>
+      <p:sp>
+        <p:nvSpPr>
+          <p:cNvPr id="34" name="Rounded Rectangle 33"/>
           <p:cNvSpPr/>
           <p:nvPr/>
         </p:nvSpPr>
         <p:spPr>
           <a:xfrm>
-            <a:off x="6217920" y="3026664"/>
-            <a:ext cx="5440680" cy="530352"/>
+            <a:off x="6217920" y="3685032"/>
+            <a:ext cx="5440680" cy="841248"/>
           </a:xfrm>
           <a:prstGeom prst="roundRect">
             <a:avLst>
-              <a:gd name="adj" fmla="val 20000"/>
+              <a:gd name="adj" fmla="val 12000"/>
             </a:avLst>
           </a:prstGeom>
           <a:solidFill>
             <a:srgbClr val="EAECFC"/>
           </a:solidFill>
-          <a:ln>
-            <a:noFill/>
+          <a:ln w="12700">
+            <a:solidFill>
+              <a:srgbClr val="DDE1F2"/>
+            </a:solidFill>
           </a:ln>
           <a:effectLst/>
         </p:spPr>
@@ -5545,14 +6102,14 @@
       </p:sp>
       <p:sp>
         <p:nvSpPr>
-          <p:cNvPr id="30" name="Oval 29"/>
+          <p:cNvPr id="35" name="Oval 34"/>
           <p:cNvSpPr/>
           <p:nvPr/>
         </p:nvSpPr>
         <p:spPr>
           <a:xfrm>
-            <a:off x="6373368" y="3154680"/>
-            <a:ext cx="274320" cy="274320"/>
+            <a:off x="6428232" y="3950208"/>
+            <a:ext cx="310896" cy="310896"/>
           </a:xfrm>
           <a:prstGeom prst="ellipse">
             <a:avLst/>
@@ -5585,7 +6142,7 @@
           <a:p>
             <a:pPr algn="ctr"/>
             <a:r>
-              <a:rPr sz="1100" b="1">
+              <a:rPr sz="1200" b="1">
                 <a:solidFill>
                   <a:srgbClr val="FFFFFF"/>
                 </a:solidFill>
@@ -5598,14 +6155,14 @@
       </p:sp>
       <p:sp>
         <p:nvSpPr>
-          <p:cNvPr id="31" name="TextBox 30"/>
-          <p:cNvSpPr txBox="1"/>
-          <p:nvPr/>
-        </p:nvSpPr>
-        <p:spPr>
-          <a:xfrm>
-            <a:off x="6766560" y="3081528"/>
-            <a:ext cx="2103120" cy="256032"/>
+          <p:cNvPr id="36" name="TextBox 35"/>
+          <p:cNvSpPr txBox="1"/>
+          <p:nvPr/>
+        </p:nvSpPr>
+        <p:spPr>
+          <a:xfrm>
+            <a:off x="6876288" y="3758184"/>
+            <a:ext cx="4617720" cy="256032"/>
           </a:xfrm>
           <a:prstGeom prst="rect">
             <a:avLst/>
@@ -5624,7 +6181,7 @@
               </a:lnSpc>
             </a:pPr>
             <a:r>
-              <a:rPr sz="1100" b="1" i="0">
+              <a:rPr sz="1150" b="1" i="0">
                 <a:solidFill>
                   <a:srgbClr val="363FC9"/>
                 </a:solidFill>
@@ -5637,14 +6194,14 @@
       </p:sp>
       <p:sp>
         <p:nvSpPr>
-          <p:cNvPr id="32" name="TextBox 31"/>
-          <p:cNvSpPr txBox="1"/>
-          <p:nvPr/>
-        </p:nvSpPr>
-        <p:spPr>
-          <a:xfrm>
-            <a:off x="6766560" y="3319272"/>
-            <a:ext cx="4754880" cy="219456"/>
+          <p:cNvPr id="37" name="TextBox 36"/>
+          <p:cNvSpPr txBox="1"/>
+          <p:nvPr/>
+        </p:nvSpPr>
+        <p:spPr>
+          <a:xfrm>
+            <a:off x="6876288" y="4032504"/>
+            <a:ext cx="4617720" cy="219456"/>
           </a:xfrm>
           <a:prstGeom prst="rect">
             <a:avLst/>
@@ -5665,36 +6222,77 @@
             <a:r>
               <a:rPr sz="950" b="0" i="0">
                 <a:solidFill>
+                  <a:srgbClr val="26283A"/>
+                </a:solidFill>
+                <a:latin typeface="맑은 고딕"/>
+              </a:rPr>
+              <a:t>통계 폴링, 가동·정지, 라이브뷰</a:t>
+            </a:r>
+          </a:p>
+        </p:txBody>
+      </p:sp>
+      <p:sp>
+        <p:nvSpPr>
+          <p:cNvPr id="38" name="TextBox 37"/>
+          <p:cNvSpPr txBox="1"/>
+          <p:nvPr/>
+        </p:nvSpPr>
+        <p:spPr>
+          <a:xfrm>
+            <a:off x="6876288" y="4261104"/>
+            <a:ext cx="4617720" cy="237744"/>
+          </a:xfrm>
+          <a:prstGeom prst="rect">
+            <a:avLst/>
+          </a:prstGeom>
+          <a:noFill/>
+        </p:spPr>
+        <p:txBody>
+          <a:bodyPr wrap="square" anchor="t" lIns="0" rIns="0" tIns="0" bIns="0">
+            <a:spAutoFit/>
+          </a:bodyPr>
+          <a:lstStyle/>
+          <a:p>
+            <a:pPr algn="l">
+              <a:lnSpc>
+                <a:spcPct val="115000"/>
+              </a:lnSpc>
+            </a:pPr>
+            <a:r>
+              <a:rPr sz="850" b="0" i="0">
+                <a:solidFill>
                   <a:srgbClr val="8A8EA3"/>
                 </a:solidFill>
                 <a:latin typeface="맑은 고딕"/>
               </a:rPr>
-              <a:t>통계 폴링, 가동·정지, 라이브뷰</a:t>
-            </a:r>
-          </a:p>
-        </p:txBody>
-      </p:sp>
-      <p:sp>
-        <p:nvSpPr>
-          <p:cNvPr id="33" name="Rounded Rectangle 32"/>
+              <a:t>5초 폴링 + WebView MJPEG 라이브뷰</a:t>
+            </a:r>
+          </a:p>
+        </p:txBody>
+      </p:sp>
+      <p:sp>
+        <p:nvSpPr>
+          <p:cNvPr id="39" name="Rounded Rectangle 38"/>
           <p:cNvSpPr/>
           <p:nvPr/>
         </p:nvSpPr>
         <p:spPr>
           <a:xfrm>
-            <a:off x="6217920" y="3648456"/>
-            <a:ext cx="5440680" cy="530352"/>
+            <a:off x="6217920" y="4636008"/>
+            <a:ext cx="5440680" cy="841248"/>
           </a:xfrm>
           <a:prstGeom prst="roundRect">
             <a:avLst>
-              <a:gd name="adj" fmla="val 20000"/>
+              <a:gd name="adj" fmla="val 12000"/>
             </a:avLst>
           </a:prstGeom>
           <a:solidFill>
             <a:srgbClr val="FFFFFF"/>
           </a:solidFill>
-          <a:ln>
-            <a:noFill/>
+          <a:ln w="12700">
+            <a:solidFill>
+              <a:srgbClr val="DDE1F2"/>
+            </a:solidFill>
           </a:ln>
           <a:effectLst/>
         </p:spPr>
@@ -5722,14 +6320,14 @@
       </p:sp>
       <p:sp>
         <p:nvSpPr>
-          <p:cNvPr id="34" name="Oval 33"/>
+          <p:cNvPr id="40" name="Oval 39"/>
           <p:cNvSpPr/>
           <p:nvPr/>
         </p:nvSpPr>
         <p:spPr>
           <a:xfrm>
-            <a:off x="6373368" y="3776472"/>
-            <a:ext cx="274320" cy="274320"/>
+            <a:off x="6428232" y="4901184"/>
+            <a:ext cx="310896" cy="310896"/>
           </a:xfrm>
           <a:prstGeom prst="ellipse">
             <a:avLst/>
@@ -5762,7 +6360,7 @@
           <a:p>
             <a:pPr algn="ctr"/>
             <a:r>
-              <a:rPr sz="1100" b="1">
+              <a:rPr sz="1200" b="1">
                 <a:solidFill>
                   <a:srgbClr val="FFFFFF"/>
                 </a:solidFill>
@@ -5775,14 +6373,14 @@
       </p:sp>
       <p:sp>
         <p:nvSpPr>
-          <p:cNvPr id="35" name="TextBox 34"/>
-          <p:cNvSpPr txBox="1"/>
-          <p:nvPr/>
-        </p:nvSpPr>
-        <p:spPr>
-          <a:xfrm>
-            <a:off x="6766560" y="3703320"/>
-            <a:ext cx="2103120" cy="256032"/>
+          <p:cNvPr id="41" name="TextBox 40"/>
+          <p:cNvSpPr txBox="1"/>
+          <p:nvPr/>
+        </p:nvSpPr>
+        <p:spPr>
+          <a:xfrm>
+            <a:off x="6876288" y="4709160"/>
+            <a:ext cx="4617720" cy="256032"/>
           </a:xfrm>
           <a:prstGeom prst="rect">
             <a:avLst/>
@@ -5801,7 +6399,7 @@
               </a:lnSpc>
             </a:pPr>
             <a:r>
-              <a:rPr sz="1100" b="1" i="0">
+              <a:rPr sz="1150" b="1" i="0">
                 <a:solidFill>
                   <a:srgbClr val="363FC9"/>
                 </a:solidFill>
@@ -5814,14 +6412,14 @@
       </p:sp>
       <p:sp>
         <p:nvSpPr>
-          <p:cNvPr id="36" name="TextBox 35"/>
-          <p:cNvSpPr txBox="1"/>
-          <p:nvPr/>
-        </p:nvSpPr>
-        <p:spPr>
-          <a:xfrm>
-            <a:off x="6766560" y="3941064"/>
-            <a:ext cx="4754880" cy="219456"/>
+          <p:cNvPr id="42" name="TextBox 41"/>
+          <p:cNvSpPr txBox="1"/>
+          <p:nvPr/>
+        </p:nvSpPr>
+        <p:spPr>
+          <a:xfrm>
+            <a:off x="6876288" y="4983480"/>
+            <a:ext cx="4617720" cy="219456"/>
           </a:xfrm>
           <a:prstGeom prst="rect">
             <a:avLst/>
@@ -5842,36 +6440,77 @@
             <a:r>
               <a:rPr sz="950" b="0" i="0">
                 <a:solidFill>
+                  <a:srgbClr val="26283A"/>
+                </a:solidFill>
+                <a:latin typeface="맑은 고딕"/>
+              </a:rPr>
+              <a:t>구역 마커 → 상세 이동</a:t>
+            </a:r>
+          </a:p>
+        </p:txBody>
+      </p:sp>
+      <p:sp>
+        <p:nvSpPr>
+          <p:cNvPr id="43" name="TextBox 42"/>
+          <p:cNvSpPr txBox="1"/>
+          <p:nvPr/>
+        </p:nvSpPr>
+        <p:spPr>
+          <a:xfrm>
+            <a:off x="6876288" y="5212080"/>
+            <a:ext cx="4617720" cy="237744"/>
+          </a:xfrm>
+          <a:prstGeom prst="rect">
+            <a:avLst/>
+          </a:prstGeom>
+          <a:noFill/>
+        </p:spPr>
+        <p:txBody>
+          <a:bodyPr wrap="square" anchor="t" lIns="0" rIns="0" tIns="0" bIns="0">
+            <a:spAutoFit/>
+          </a:bodyPr>
+          <a:lstStyle/>
+          <a:p>
+            <a:pPr algn="l">
+              <a:lnSpc>
+                <a:spcPct val="115000"/>
+              </a:lnSpc>
+            </a:pPr>
+            <a:r>
+              <a:rPr sz="850" b="0" i="0">
+                <a:solidFill>
                   <a:srgbClr val="8A8EA3"/>
                 </a:solidFill>
                 <a:latin typeface="맑은 고딕"/>
               </a:rPr>
-              <a:t>구역 마커 → 상세 이동</a:t>
-            </a:r>
-          </a:p>
-        </p:txBody>
-      </p:sp>
-      <p:sp>
-        <p:nvSpPr>
-          <p:cNvPr id="37" name="Rounded Rectangle 36"/>
+              <a:t>Google Maps SDK, 마커 클릭 시 상세 이동</a:t>
+            </a:r>
+          </a:p>
+        </p:txBody>
+      </p:sp>
+      <p:sp>
+        <p:nvSpPr>
+          <p:cNvPr id="44" name="Rounded Rectangle 43"/>
           <p:cNvSpPr/>
           <p:nvPr/>
         </p:nvSpPr>
         <p:spPr>
           <a:xfrm>
-            <a:off x="6217920" y="4270248"/>
-            <a:ext cx="5440680" cy="530352"/>
+            <a:off x="6217920" y="5586984"/>
+            <a:ext cx="5440680" cy="841248"/>
           </a:xfrm>
           <a:prstGeom prst="roundRect">
             <a:avLst>
-              <a:gd name="adj" fmla="val 20000"/>
+              <a:gd name="adj" fmla="val 12000"/>
             </a:avLst>
           </a:prstGeom>
           <a:solidFill>
             <a:srgbClr val="EAECFC"/>
           </a:solidFill>
-          <a:ln>
-            <a:noFill/>
+          <a:ln w="12700">
+            <a:solidFill>
+              <a:srgbClr val="DDE1F2"/>
+            </a:solidFill>
           </a:ln>
           <a:effectLst/>
         </p:spPr>
@@ -5899,14 +6538,14 @@
       </p:sp>
       <p:sp>
         <p:nvSpPr>
-          <p:cNvPr id="38" name="Oval 37"/>
+          <p:cNvPr id="45" name="Oval 44"/>
           <p:cNvSpPr/>
           <p:nvPr/>
         </p:nvSpPr>
         <p:spPr>
           <a:xfrm>
-            <a:off x="6373368" y="4398264"/>
-            <a:ext cx="274320" cy="274320"/>
+            <a:off x="6428232" y="5852160"/>
+            <a:ext cx="310896" cy="310896"/>
           </a:xfrm>
           <a:prstGeom prst="ellipse">
             <a:avLst/>
@@ -5939,7 +6578,7 @@
           <a:p>
             <a:pPr algn="ctr"/>
             <a:r>
-              <a:rPr sz="1100" b="1">
+              <a:rPr sz="1200" b="1">
                 <a:solidFill>
                   <a:srgbClr val="FFFFFF"/>
                 </a:solidFill>
@@ -5952,14 +6591,14 @@
       </p:sp>
       <p:sp>
         <p:nvSpPr>
-          <p:cNvPr id="39" name="TextBox 38"/>
-          <p:cNvSpPr txBox="1"/>
-          <p:nvPr/>
-        </p:nvSpPr>
-        <p:spPr>
-          <a:xfrm>
-            <a:off x="6766560" y="4325112"/>
-            <a:ext cx="2103120" cy="256032"/>
+          <p:cNvPr id="46" name="TextBox 45"/>
+          <p:cNvSpPr txBox="1"/>
+          <p:nvPr/>
+        </p:nvSpPr>
+        <p:spPr>
+          <a:xfrm>
+            <a:off x="6876288" y="5660136"/>
+            <a:ext cx="4617720" cy="256032"/>
           </a:xfrm>
           <a:prstGeom prst="rect">
             <a:avLst/>
@@ -5978,7 +6617,7 @@
               </a:lnSpc>
             </a:pPr>
             <a:r>
-              <a:rPr sz="1100" b="1" i="0">
+              <a:rPr sz="1150" b="1" i="0">
                 <a:solidFill>
                   <a:srgbClr val="363FC9"/>
                 </a:solidFill>
@@ -5991,14 +6630,14 @@
       </p:sp>
       <p:sp>
         <p:nvSpPr>
-          <p:cNvPr id="40" name="TextBox 39"/>
-          <p:cNvSpPr txBox="1"/>
-          <p:nvPr/>
-        </p:nvSpPr>
-        <p:spPr>
-          <a:xfrm>
-            <a:off x="6766560" y="4562856"/>
-            <a:ext cx="4754880" cy="219456"/>
+          <p:cNvPr id="47" name="TextBox 46"/>
+          <p:cNvSpPr txBox="1"/>
+          <p:nvPr/>
+        </p:nvSpPr>
+        <p:spPr>
+          <a:xfrm>
+            <a:off x="6876288" y="5934456"/>
+            <a:ext cx="4617720" cy="219456"/>
           </a:xfrm>
           <a:prstGeom prst="rect">
             <a:avLst/>
@@ -6019,18 +6658,57 @@
             <a:r>
               <a:rPr sz="950" b="0" i="0">
                 <a:solidFill>
+                  <a:srgbClr val="26283A"/>
+                </a:solidFill>
+                <a:latin typeface="맑은 고딕"/>
+              </a:rPr>
+              <a:t>이벤트 확인·조치완료</a:t>
+            </a:r>
+          </a:p>
+        </p:txBody>
+      </p:sp>
+      <p:sp>
+        <p:nvSpPr>
+          <p:cNvPr id="48" name="TextBox 47"/>
+          <p:cNvSpPr txBox="1"/>
+          <p:nvPr/>
+        </p:nvSpPr>
+        <p:spPr>
+          <a:xfrm>
+            <a:off x="6876288" y="6163056"/>
+            <a:ext cx="4617720" cy="237744"/>
+          </a:xfrm>
+          <a:prstGeom prst="rect">
+            <a:avLst/>
+          </a:prstGeom>
+          <a:noFill/>
+        </p:spPr>
+        <p:txBody>
+          <a:bodyPr wrap="square" anchor="t" lIns="0" rIns="0" tIns="0" bIns="0">
+            <a:spAutoFit/>
+          </a:bodyPr>
+          <a:lstStyle/>
+          <a:p>
+            <a:pPr algn="l">
+              <a:lnSpc>
+                <a:spcPct val="115000"/>
+              </a:lnSpc>
+            </a:pPr>
+            <a:r>
+              <a:rPr sz="850" b="0" i="0">
+                <a:solidFill>
                   <a:srgbClr val="8A8EA3"/>
                 </a:solidFill>
                 <a:latin typeface="맑은 고딕"/>
               </a:rPr>
-              <a:t>이벤트 확인·조치완료</a:t>
-            </a:r>
-          </a:p>
-        </p:txBody>
-      </p:sp>
-      <p:sp>
-        <p:nvSpPr>
-          <p:cNvPr id="41" name="TextBox 40"/>
+              <a:t>임계치 초과 이벤트 목록 처리</a:t>
+            </a:r>
+          </a:p>
+        </p:txBody>
+      </p:sp>
+      <p:sp>
+        <p:nvSpPr>
+          <p:cNvPr id="49" name="TextBox 48"/>
           <p:cNvSpPr txBox="1"/>
           <p:nvPr/>
         </p:nvSpPr>
@@ -6069,7 +6747,7 @@
       </p:sp>
       <p:sp>
         <p:nvSpPr>
-          <p:cNvPr id="42" name="TextBox 41"/>
+          <p:cNvPr id="50" name="TextBox 49"/>
           <p:cNvSpPr txBox="1"/>
           <p:nvPr/>
         </p:nvSpPr>
@@ -7548,8 +8226,10 @@
           <a:solidFill>
             <a:srgbClr val="FFFFFF"/>
           </a:solidFill>
-          <a:ln>
-            <a:noFill/>
+          <a:ln w="12700">
+            <a:solidFill>
+              <a:srgbClr val="DDE1F2"/>
+            </a:solidFill>
           </a:ln>
           <a:effectLst/>
         </p:spPr>
@@ -7751,8 +8431,10 @@
           <a:solidFill>
             <a:srgbClr val="FFFFFF"/>
           </a:solidFill>
-          <a:ln>
-            <a:noFill/>
+          <a:ln w="12700">
+            <a:solidFill>
+              <a:srgbClr val="DDE1F2"/>
+            </a:solidFill>
           </a:ln>
           <a:effectLst/>
         </p:spPr>
@@ -7954,8 +8636,10 @@
           <a:solidFill>
             <a:srgbClr val="FFFFFF"/>
           </a:solidFill>
-          <a:ln>
-            <a:noFill/>
+          <a:ln w="12700">
+            <a:solidFill>
+              <a:srgbClr val="DDE1F2"/>
+            </a:solidFill>
           </a:ln>
           <a:effectLst/>
         </p:spPr>
@@ -8227,8 +8911,10 @@
           <a:solidFill>
             <a:srgbClr val="FFFFFF"/>
           </a:solidFill>
-          <a:ln>
-            <a:noFill/>
+          <a:ln w="12700">
+            <a:solidFill>
+              <a:srgbClr val="DDE1F2"/>
+            </a:solidFill>
           </a:ln>
           <a:effectLst/>
         </p:spPr>
@@ -8622,18 +9308,20 @@
         <p:spPr>
           <a:xfrm>
             <a:off x="502920" y="1508760"/>
-            <a:ext cx="11201400" cy="1051560"/>
+            <a:ext cx="11201400" cy="1280160"/>
           </a:xfrm>
           <a:prstGeom prst="roundRect">
             <a:avLst>
-              <a:gd name="adj" fmla="val 12000"/>
+              <a:gd name="adj" fmla="val 10000"/>
             </a:avLst>
           </a:prstGeom>
           <a:solidFill>
             <a:srgbClr val="EAECFC"/>
           </a:solidFill>
-          <a:ln>
-            <a:noFill/>
+          <a:ln w="12700">
+            <a:solidFill>
+              <a:srgbClr val="DDE1F2"/>
+            </a:solidFill>
           </a:ln>
           <a:effectLst/>
         </p:spPr>
@@ -8675,7 +9363,7 @@
         </p:blipFill>
         <p:spPr>
           <a:xfrm>
-            <a:off x="777240" y="1737360"/>
+            <a:off x="777240" y="1783080"/>
             <a:ext cx="566928" cy="566928"/>
           </a:xfrm>
           <a:prstGeom prst="rect">
@@ -8691,7 +9379,7 @@
         </p:nvSpPr>
         <p:spPr>
           <a:xfrm>
-            <a:off x="1508760" y="1691640"/>
+            <a:off x="1508760" y="1755648"/>
             <a:ext cx="9875520" cy="365760"/>
           </a:xfrm>
           <a:prstGeom prst="rect">
@@ -8730,8 +9418,8 @@
         </p:nvSpPr>
         <p:spPr>
           <a:xfrm>
-            <a:off x="1508760" y="2103120"/>
-            <a:ext cx="9875520" cy="384048"/>
+            <a:off x="1508760" y="2286000"/>
+            <a:ext cx="9875520" cy="457200"/>
           </a:xfrm>
           <a:prstGeom prst="rect">
             <a:avLst/>
@@ -8746,7 +9434,7 @@
           <a:p>
             <a:pPr algn="l">
               <a:lnSpc>
-                <a:spcPct val="130000"/>
+                <a:spcPct val="135000"/>
               </a:lnSpc>
             </a:pPr>
             <a:r>
@@ -8769,19 +9457,21 @@
         </p:nvSpPr>
         <p:spPr>
           <a:xfrm>
-            <a:off x="502920" y="2788920"/>
-            <a:ext cx="5486400" cy="2651760"/>
+            <a:off x="502920" y="2971800"/>
+            <a:ext cx="5486400" cy="3246120"/>
           </a:xfrm>
           <a:prstGeom prst="roundRect">
             <a:avLst>
-              <a:gd name="adj" fmla="val 8000"/>
+              <a:gd name="adj" fmla="val 7000"/>
             </a:avLst>
           </a:prstGeom>
           <a:solidFill>
             <a:srgbClr val="FFFFFF"/>
           </a:solidFill>
-          <a:ln>
-            <a:noFill/>
+          <a:ln w="12700">
+            <a:solidFill>
+              <a:srgbClr val="DDE1F2"/>
+            </a:solidFill>
           </a:ln>
           <a:effectLst/>
         </p:spPr>
@@ -8823,8 +9513,8 @@
         </p:blipFill>
         <p:spPr>
           <a:xfrm>
-            <a:off x="777240" y="3017520"/>
-            <a:ext cx="457200" cy="457200"/>
+            <a:off x="795528" y="3200400"/>
+            <a:ext cx="475488" cy="475488"/>
           </a:xfrm>
           <a:prstGeom prst="rect">
             <a:avLst/>
@@ -8839,8 +9529,8 @@
         </p:nvSpPr>
         <p:spPr>
           <a:xfrm>
-            <a:off x="1371600" y="3063240"/>
-            <a:ext cx="4480560" cy="548640"/>
+            <a:off x="1417320" y="3246120"/>
+            <a:ext cx="4343400" cy="594360"/>
           </a:xfrm>
           <a:prstGeom prst="rect">
             <a:avLst/>
@@ -8859,7 +9549,7 @@
               </a:lnSpc>
             </a:pPr>
             <a:r>
-              <a:rPr sz="1300" b="1" i="0">
+              <a:rPr sz="1350" b="1" i="0">
                 <a:solidFill>
                   <a:srgbClr val="363FC9"/>
                 </a:solidFill>
@@ -8878,8 +9568,8 @@
         </p:nvSpPr>
         <p:spPr>
           <a:xfrm>
-            <a:off x="795528" y="3703320"/>
-            <a:ext cx="5029200" cy="1645920"/>
+            <a:off x="813816" y="3931920"/>
+            <a:ext cx="5029200" cy="2194560"/>
           </a:xfrm>
           <a:prstGeom prst="rect">
             <a:avLst/>
@@ -8897,11 +9587,11 @@
                 <a:spcPct val="130000"/>
               </a:lnSpc>
               <a:spcAft>
-                <a:spcPts val="900"/>
+                <a:spcPts val="1400"/>
               </a:spcAft>
             </a:pPr>
             <a:r>
-              <a:rPr sz="1050" b="1">
+              <a:rPr sz="1080" b="1">
                 <a:solidFill>
                   <a:srgbClr val="26283A"/>
                 </a:solidFill>
@@ -8916,11 +9606,11 @@
                 <a:spcPct val="130000"/>
               </a:lnSpc>
               <a:spcAft>
-                <a:spcPts val="900"/>
+                <a:spcPts val="1400"/>
               </a:spcAft>
             </a:pPr>
             <a:r>
-              <a:rPr sz="1050" b="1">
+              <a:rPr sz="1080" b="1">
                 <a:solidFill>
                   <a:srgbClr val="26283A"/>
                 </a:solidFill>
@@ -8935,17 +9625,36 @@
                 <a:spcPct val="130000"/>
               </a:lnSpc>
               <a:spcAft>
-                <a:spcPts val="900"/>
+                <a:spcPts val="1400"/>
               </a:spcAft>
             </a:pPr>
             <a:r>
-              <a:rPr sz="1050" b="1">
+              <a:rPr sz="1080" b="1">
                 <a:solidFill>
                   <a:srgbClr val="26283A"/>
                 </a:solidFill>
                 <a:latin typeface="맑은 고딕"/>
               </a:rPr>
               <a:t>●  분석 파이프라인은 입력이 드론이든 CCTV든 동일하게 동작·검증됨</a:t>
+            </a:r>
+          </a:p>
+          <a:p>
+            <a:pPr marL="0" indent="0">
+              <a:lnSpc>
+                <a:spcPct val="130000"/>
+              </a:lnSpc>
+              <a:spcAft>
+                <a:spcPts val="1400"/>
+              </a:spcAft>
+            </a:pPr>
+            <a:r>
+              <a:rPr sz="1080" b="1">
+                <a:solidFill>
+                  <a:srgbClr val="26283A"/>
+                </a:solidFill>
+                <a:latin typeface="맑은 고딕"/>
+              </a:rPr>
+              <a:t>●  16개 카메라에 라이선스가 명확한 영상 2종을 분산 배정해 다양성 확보</a:t>
             </a:r>
           </a:p>
         </p:txBody>
@@ -8958,19 +9667,21 @@
         </p:nvSpPr>
         <p:spPr>
           <a:xfrm>
-            <a:off x="6217920" y="2788920"/>
-            <a:ext cx="5486400" cy="2651760"/>
+            <a:off x="6217920" y="2971800"/>
+            <a:ext cx="5486400" cy="3246120"/>
           </a:xfrm>
           <a:prstGeom prst="roundRect">
             <a:avLst>
-              <a:gd name="adj" fmla="val 8000"/>
+              <a:gd name="adj" fmla="val 7000"/>
             </a:avLst>
           </a:prstGeom>
           <a:solidFill>
             <a:srgbClr val="FFFFFF"/>
           </a:solidFill>
-          <a:ln>
-            <a:noFill/>
+          <a:ln w="12700">
+            <a:solidFill>
+              <a:srgbClr val="DDE1F2"/>
+            </a:solidFill>
           </a:ln>
           <a:effectLst/>
         </p:spPr>
@@ -9012,8 +9723,8 @@
         </p:blipFill>
         <p:spPr>
           <a:xfrm>
-            <a:off x="6492240" y="3017520"/>
-            <a:ext cx="457200" cy="457200"/>
+            <a:off x="6510528" y="3200400"/>
+            <a:ext cx="475488" cy="475488"/>
           </a:xfrm>
           <a:prstGeom prst="rect">
             <a:avLst/>
@@ -9028,8 +9739,8 @@
         </p:nvSpPr>
         <p:spPr>
           <a:xfrm>
-            <a:off x="7086600" y="3063240"/>
-            <a:ext cx="4480560" cy="548640"/>
+            <a:off x="7132320" y="3246120"/>
+            <a:ext cx="4343400" cy="594360"/>
           </a:xfrm>
           <a:prstGeom prst="rect">
             <a:avLst/>
@@ -9048,7 +9759,7 @@
               </a:lnSpc>
             </a:pPr>
             <a:r>
-              <a:rPr sz="1300" b="1" i="0">
+              <a:rPr sz="1350" b="1" i="0">
                 <a:solidFill>
                   <a:srgbClr val="363FC9"/>
                 </a:solidFill>
@@ -9067,8 +9778,8 @@
         </p:nvSpPr>
         <p:spPr>
           <a:xfrm>
-            <a:off x="6510528" y="3703320"/>
-            <a:ext cx="5029200" cy="1645920"/>
+            <a:off x="6528816" y="3931920"/>
+            <a:ext cx="5029200" cy="2194560"/>
           </a:xfrm>
           <a:prstGeom prst="rect">
             <a:avLst/>
@@ -9086,11 +9797,11 @@
                 <a:spcPct val="130000"/>
               </a:lnSpc>
               <a:spcAft>
-                <a:spcPts val="900"/>
+                <a:spcPts val="1400"/>
               </a:spcAft>
             </a:pPr>
             <a:r>
-              <a:rPr sz="1050" b="1">
+              <a:rPr sz="1080" b="1">
                 <a:solidFill>
                   <a:srgbClr val="26283A"/>
                 </a:solidFill>
@@ -9105,11 +9816,11 @@
                 <a:spcPct val="130000"/>
               </a:lnSpc>
               <a:spcAft>
-                <a:spcPts val="900"/>
+                <a:spcPts val="1400"/>
               </a:spcAft>
             </a:pPr>
             <a:r>
-              <a:rPr sz="1050" b="1">
+              <a:rPr sz="1080" b="1">
                 <a:solidFill>
                   <a:srgbClr val="26283A"/>
                 </a:solidFill>
@@ -9124,17 +9835,36 @@
                 <a:spcPct val="130000"/>
               </a:lnSpc>
               <a:spcAft>
-                <a:spcPts val="900"/>
+                <a:spcPts val="1400"/>
               </a:spcAft>
             </a:pPr>
             <a:r>
-              <a:rPr sz="1050" b="1">
+              <a:rPr sz="1080" b="1">
                 <a:solidFill>
                   <a:srgbClr val="26283A"/>
                 </a:solidFill>
                 <a:latin typeface="맑은 고딕"/>
               </a:rPr>
               <a:t>●  실제 드론 RTSP 라이브 연동 자체는 미검증(확인 필요로 명시, 추측 배제)</a:t>
+            </a:r>
+          </a:p>
+          <a:p>
+            <a:pPr marL="0" indent="0">
+              <a:lnSpc>
+                <a:spcPct val="130000"/>
+              </a:lnSpc>
+              <a:spcAft>
+                <a:spcPts val="1400"/>
+              </a:spcAft>
+            </a:pPr>
+            <a:r>
+              <a:rPr sz="1080" b="1">
+                <a:solidFill>
+                  <a:srgbClr val="26283A"/>
+                </a:solidFill>
+                <a:latin typeface="맑은 고딕"/>
+              </a:rPr>
+              <a:t>●  RTSP 라이브 연동 실험은 04-3 향후 확장 항목으로 별도 계획</a:t>
             </a:r>
           </a:p>
         </p:txBody>
@@ -9829,8 +10559,8 @@
         </p:nvSpPr>
         <p:spPr>
           <a:xfrm>
-            <a:off x="7040880" y="1920240"/>
-            <a:ext cx="4663440" cy="3657600"/>
+            <a:off x="7040880" y="1965960"/>
+            <a:ext cx="4663440" cy="3566160"/>
           </a:xfrm>
           <a:prstGeom prst="rect">
             <a:avLst/>
@@ -9845,33 +10575,33 @@
           <a:p>
             <a:pPr marL="0" indent="0">
               <a:lnSpc>
-                <a:spcPct val="130000"/>
+                <a:spcPct val="150000"/>
               </a:lnSpc>
               <a:spcAft>
-                <a:spcPts val="1000"/>
+                <a:spcPts val="2600"/>
               </a:spcAft>
             </a:pPr>
             <a:r>
-              <a:rPr sz="1150" b="1">
+              <a:rPr sz="1350" b="1">
                 <a:solidFill>
                   <a:srgbClr val="26283A"/>
                 </a:solidFill>
                 <a:latin typeface="맑은 고딕"/>
               </a:rPr>
-              <a:t>●  판정선(화면 안쪽 15%) 기준 8개 구역 분류</a:t>
+              <a:t>●  판정선(화면 안쪽 15%) 기준 CENTER·N·E·S·W 5개 구역 분류</a:t>
             </a:r>
           </a:p>
           <a:p>
             <a:pPr marL="0" indent="0">
               <a:lnSpc>
-                <a:spcPct val="130000"/>
+                <a:spcPct val="150000"/>
               </a:lnSpc>
               <a:spcAft>
-                <a:spcPts val="1000"/>
+                <a:spcPts val="2600"/>
               </a:spcAft>
             </a:pPr>
             <a:r>
-              <a:rPr sz="1150" b="1">
+              <a:rPr sz="1350" b="1">
                 <a:solidFill>
                   <a:srgbClr val="26283A"/>
                 </a:solidFill>
@@ -9883,14 +10613,14 @@
           <a:p>
             <a:pPr marL="0" indent="0">
               <a:lnSpc>
-                <a:spcPct val="130000"/>
+                <a:spcPct val="150000"/>
               </a:lnSpc>
               <a:spcAft>
-                <a:spcPts val="1000"/>
+                <a:spcPts val="2600"/>
               </a:spcAft>
             </a:pPr>
             <a:r>
-              <a:rPr sz="1150" b="1">
+              <a:rPr sz="1350" b="1">
                 <a:solidFill>
                   <a:srgbClr val="26283A"/>
                 </a:solidFill>
@@ -9902,14 +10632,14 @@
           <a:p>
             <a:pPr marL="0" indent="0">
               <a:lnSpc>
-                <a:spcPct val="130000"/>
+                <a:spcPct val="150000"/>
               </a:lnSpc>
               <a:spcAft>
-                <a:spcPts val="1000"/>
+                <a:spcPts val="2600"/>
               </a:spcAft>
             </a:pPr>
             <a:r>
-              <a:rPr sz="1150" b="1">
+              <a:rPr sz="1350" b="1">
                 <a:solidFill>
                   <a:srgbClr val="26283A"/>
                 </a:solidFill>
@@ -10658,8 +11388,8 @@
         </p:nvSpPr>
         <p:spPr>
           <a:xfrm>
-            <a:off x="7315200" y="1920240"/>
-            <a:ext cx="4389120" cy="3657600"/>
+            <a:off x="7315200" y="1965960"/>
+            <a:ext cx="4389120" cy="3566160"/>
           </a:xfrm>
           <a:prstGeom prst="rect">
             <a:avLst/>
@@ -10674,14 +11404,14 @@
           <a:p>
             <a:pPr marL="0" indent="0">
               <a:lnSpc>
-                <a:spcPct val="130000"/>
+                <a:spcPct val="150000"/>
               </a:lnSpc>
               <a:spcAft>
-                <a:spcPts val="1000"/>
+                <a:spcPts val="2600"/>
               </a:spcAft>
             </a:pPr>
             <a:r>
-              <a:rPr sz="1150" b="1">
+              <a:rPr sz="1350" b="1">
                 <a:solidFill>
                   <a:srgbClr val="26283A"/>
                 </a:solidFill>
@@ -10693,14 +11423,14 @@
           <a:p>
             <a:pPr marL="0" indent="0">
               <a:lnSpc>
-                <a:spcPct val="130000"/>
+                <a:spcPct val="150000"/>
               </a:lnSpc>
               <a:spcAft>
-                <a:spcPts val="1000"/>
+                <a:spcPts val="2600"/>
               </a:spcAft>
             </a:pPr>
             <a:r>
-              <a:rPr sz="1150" b="1">
+              <a:rPr sz="1350" b="1">
                 <a:solidFill>
                   <a:srgbClr val="26283A"/>
                 </a:solidFill>
@@ -10712,14 +11442,14 @@
           <a:p>
             <a:pPr marL="0" indent="0">
               <a:lnSpc>
-                <a:spcPct val="130000"/>
+                <a:spcPct val="150000"/>
               </a:lnSpc>
               <a:spcAft>
-                <a:spcPts val="1000"/>
+                <a:spcPts val="2600"/>
               </a:spcAft>
             </a:pPr>
             <a:r>
-              <a:rPr sz="1150" b="1">
+              <a:rPr sz="1350" b="1">
                 <a:solidFill>
                   <a:srgbClr val="26283A"/>
                 </a:solidFill>
@@ -10731,14 +11461,14 @@
           <a:p>
             <a:pPr marL="0" indent="0">
               <a:lnSpc>
-                <a:spcPct val="130000"/>
+                <a:spcPct val="150000"/>
               </a:lnSpc>
               <a:spcAft>
-                <a:spcPts val="1000"/>
+                <a:spcPts val="2600"/>
               </a:spcAft>
             </a:pPr>
             <a:r>
-              <a:rPr sz="1150" b="1">
+              <a:rPr sz="1350" b="1">
                 <a:solidFill>
                   <a:srgbClr val="26283A"/>
                 </a:solidFill>
@@ -11040,8 +11770,10 @@
           <a:solidFill>
             <a:srgbClr val="FFFFFF"/>
           </a:solidFill>
-          <a:ln>
-            <a:noFill/>
+          <a:ln w="12700">
+            <a:solidFill>
+              <a:srgbClr val="DDE1F2"/>
+            </a:solidFill>
           </a:ln>
           <a:effectLst/>
         </p:spPr>
@@ -11227,8 +11959,10 @@
           <a:solidFill>
             <a:srgbClr val="FFFFFF"/>
           </a:solidFill>
-          <a:ln>
-            <a:noFill/>
+          <a:ln w="12700">
+            <a:solidFill>
+              <a:srgbClr val="DDE1F2"/>
+            </a:solidFill>
           </a:ln>
           <a:effectLst/>
         </p:spPr>
@@ -11414,8 +12148,10 @@
           <a:solidFill>
             <a:srgbClr val="FFFFFF"/>
           </a:solidFill>
-          <a:ln>
-            <a:noFill/>
+          <a:ln w="12700">
+            <a:solidFill>
+              <a:srgbClr val="DDE1F2"/>
+            </a:solidFill>
           </a:ln>
           <a:effectLst/>
         </p:spPr>
@@ -11601,8 +12337,10 @@
           <a:solidFill>
             <a:srgbClr val="FFFFFF"/>
           </a:solidFill>
-          <a:ln>
-            <a:noFill/>
+          <a:ln w="12700">
+            <a:solidFill>
+              <a:srgbClr val="DDE1F2"/>
+            </a:solidFill>
           </a:ln>
           <a:effectLst/>
         </p:spPr>
@@ -11788,8 +12526,10 @@
           <a:solidFill>
             <a:srgbClr val="FFFFFF"/>
           </a:solidFill>
-          <a:ln>
-            <a:noFill/>
+          <a:ln w="12700">
+            <a:solidFill>
+              <a:srgbClr val="DDE1F2"/>
+            </a:solidFill>
           </a:ln>
           <a:effectLst/>
         </p:spPr>
@@ -13724,7 +14464,7 @@
                 </a:solidFill>
                 <a:latin typeface="맑은 고딕"/>
               </a:rPr>
-              <a:t>아쉬운 점 (한계를 숨기지 않고)</a:t>
+              <a:t>아쉬운 점</a:t>
             </a:r>
           </a:p>
         </p:txBody>
@@ -13782,18 +14522,20 @@
         <p:spPr>
           <a:xfrm>
             <a:off x="502920" y="1600200"/>
-            <a:ext cx="2121408" cy="2697480"/>
+            <a:ext cx="2606040" cy="4160520"/>
           </a:xfrm>
           <a:prstGeom prst="roundRect">
             <a:avLst>
-              <a:gd name="adj" fmla="val 10000"/>
+              <a:gd name="adj" fmla="val 7000"/>
             </a:avLst>
           </a:prstGeom>
           <a:solidFill>
             <a:srgbClr val="FFFFFF"/>
           </a:solidFill>
-          <a:ln>
-            <a:noFill/>
+          <a:ln w="12700">
+            <a:solidFill>
+              <a:srgbClr val="DDE1F2"/>
+            </a:solidFill>
           </a:ln>
           <a:effectLst/>
         </p:spPr>
@@ -13835,8 +14577,8 @@
         </p:blipFill>
         <p:spPr>
           <a:xfrm>
-            <a:off x="1202985" y="1856232"/>
-            <a:ext cx="721278" cy="721278"/>
+            <a:off x="1577340" y="1828800"/>
+            <a:ext cx="457200" cy="457200"/>
           </a:xfrm>
           <a:prstGeom prst="rect">
             <a:avLst/>
@@ -13851,8 +14593,8 @@
         </p:nvSpPr>
         <p:spPr>
           <a:xfrm>
-            <a:off x="594360" y="2687238"/>
-            <a:ext cx="1938528" cy="457200"/>
+            <a:off x="612648" y="2377440"/>
+            <a:ext cx="2386584" cy="548640"/>
           </a:xfrm>
           <a:prstGeom prst="rect">
             <a:avLst/>
@@ -13867,94 +14609,53 @@
           <a:p>
             <a:pPr algn="ctr">
               <a:lnSpc>
-                <a:spcPct val="115000"/>
-              </a:lnSpc>
-            </a:pPr>
-            <a:r>
-              <a:rPr sz="1200" b="1" i="0">
+                <a:spcPct val="120000"/>
+              </a:lnSpc>
+            </a:pPr>
+            <a:r>
+              <a:rPr sz="1250" b="1" i="0">
                 <a:solidFill>
                   <a:srgbClr val="26283A"/>
                 </a:solidFill>
                 <a:latin typeface="맑은 고딕"/>
               </a:rPr>
-              <a:t>구역 간 이동 조회 미구현</a:t>
-            </a:r>
-          </a:p>
-        </p:txBody>
-      </p:sp>
-      <p:sp>
-        <p:nvSpPr>
-          <p:cNvPr id="10" name="TextBox 9"/>
-          <p:cNvSpPr txBox="1"/>
-          <p:nvPr/>
-        </p:nvSpPr>
-        <p:spPr>
-          <a:xfrm>
-            <a:off x="594360" y="3107862"/>
-            <a:ext cx="1938528" cy="457200"/>
-          </a:xfrm>
-          <a:prstGeom prst="rect">
-            <a:avLst/>
-          </a:prstGeom>
-          <a:noFill/>
-        </p:spPr>
-        <p:txBody>
-          <a:bodyPr wrap="square" anchor="t" lIns="0" rIns="0" tIns="0" bIns="0">
-            <a:spAutoFit/>
-          </a:bodyPr>
-          <a:lstStyle/>
+              <a:t>구역 간 이동 조회</a:t>
+            </a:r>
+          </a:p>
           <a:p>
             <a:pPr algn="ctr">
               <a:lnSpc>
-                <a:spcPct val="125000"/>
-              </a:lnSpc>
-            </a:pPr>
-            <a:r>
-              <a:rPr sz="1100" b="0" i="0">
-                <a:solidFill>
-                  <a:srgbClr val="8A8EA3"/>
-                </a:solidFill>
-                <a:latin typeface="맑은 고딕"/>
-              </a:rPr>
-              <a:t>zone_flows 집계 로직 자체가</a:t>
-            </a:r>
-          </a:p>
-          <a:p>
-            <a:pPr algn="ctr">
-              <a:lnSpc>
-                <a:spcPct val="125000"/>
-              </a:lnSpc>
-            </a:pPr>
-            <a:r>
-              <a:rPr sz="1100" b="0" i="0">
-                <a:solidFill>
-                  <a:srgbClr val="8A8EA3"/>
-                </a:solidFill>
-                <a:latin typeface="맑은 고딕"/>
-              </a:rPr>
-              <a:t>아직 없음 — 설계만 완료</a:t>
-            </a:r>
-          </a:p>
-        </p:txBody>
-      </p:sp>
-      <p:sp>
-        <p:nvSpPr>
-          <p:cNvPr id="11" name="Rounded Rectangle 10"/>
+                <a:spcPct val="120000"/>
+              </a:lnSpc>
+            </a:pPr>
+            <a:r>
+              <a:rPr sz="1250" b="1" i="0">
+                <a:solidFill>
+                  <a:srgbClr val="26283A"/>
+                </a:solidFill>
+                <a:latin typeface="맑은 고딕"/>
+              </a:rPr>
+              <a:t>미구현</a:t>
+            </a:r>
+          </a:p>
+        </p:txBody>
+      </p:sp>
+      <p:sp>
+        <p:nvSpPr>
+          <p:cNvPr id="10" name="Rectangle 9"/>
           <p:cNvSpPr/>
           <p:nvPr/>
         </p:nvSpPr>
         <p:spPr>
           <a:xfrm>
-            <a:off x="2756916" y="1600200"/>
-            <a:ext cx="2121408" cy="2697480"/>
-          </a:xfrm>
-          <a:prstGeom prst="roundRect">
-            <a:avLst>
-              <a:gd name="adj" fmla="val 10000"/>
-            </a:avLst>
+            <a:off x="704088" y="3017520"/>
+            <a:ext cx="2203704" cy="16510"/>
+          </a:xfrm>
+          <a:prstGeom prst="rect">
+            <a:avLst/>
           </a:prstGeom>
           <a:solidFill>
-            <a:srgbClr val="FFFFFF"/>
+            <a:srgbClr val="ECEEF6"/>
           </a:solidFill>
           <a:ln>
             <a:noFill/>
@@ -13983,9 +14684,137 @@
           </a:p>
         </p:txBody>
       </p:sp>
+      <p:sp>
+        <p:nvSpPr>
+          <p:cNvPr id="11" name="TextBox 10"/>
+          <p:cNvSpPr txBox="1"/>
+          <p:nvPr/>
+        </p:nvSpPr>
+        <p:spPr>
+          <a:xfrm>
+            <a:off x="722376" y="3291840"/>
+            <a:ext cx="2203704" cy="2286000"/>
+          </a:xfrm>
+          <a:prstGeom prst="rect">
+            <a:avLst/>
+          </a:prstGeom>
+          <a:noFill/>
+        </p:spPr>
+        <p:txBody>
+          <a:bodyPr wrap="square" anchor="t" lIns="0" rIns="0">
+            <a:spAutoFit/>
+          </a:bodyPr>
+          <a:lstStyle/>
+          <a:p>
+            <a:pPr marL="0" indent="0">
+              <a:lnSpc>
+                <a:spcPct val="130000"/>
+              </a:lnSpc>
+              <a:spcAft>
+                <a:spcPts val="2000"/>
+              </a:spcAft>
+            </a:pPr>
+            <a:r>
+              <a:rPr sz="960" b="1">
+                <a:solidFill>
+                  <a:srgbClr val="26283A"/>
+                </a:solidFill>
+                <a:latin typeface="맑은 고딕"/>
+              </a:rPr>
+              <a:t>●  zone_flows 집계 로직 자체가 아직 없음</a:t>
+            </a:r>
+          </a:p>
+          <a:p>
+            <a:pPr marL="0" indent="0">
+              <a:lnSpc>
+                <a:spcPct val="130000"/>
+              </a:lnSpc>
+              <a:spcAft>
+                <a:spcPts val="2000"/>
+              </a:spcAft>
+            </a:pPr>
+            <a:r>
+              <a:rPr sz="960" b="1">
+                <a:solidFill>
+                  <a:srgbClr val="26283A"/>
+                </a:solidFill>
+                <a:latin typeface="맑은 고딕"/>
+              </a:rPr>
+              <a:t>●  요구사항·설계는 완료했지만 보류</a:t>
+            </a:r>
+          </a:p>
+          <a:p>
+            <a:pPr marL="0" indent="0">
+              <a:lnSpc>
+                <a:spcPct val="130000"/>
+              </a:lnSpc>
+              <a:spcAft>
+                <a:spcPts val="2000"/>
+              </a:spcAft>
+            </a:pPr>
+            <a:r>
+              <a:rPr sz="960" b="1">
+                <a:solidFill>
+                  <a:srgbClr val="26283A"/>
+                </a:solidFill>
+                <a:latin typeface="맑은 고딕"/>
+              </a:rPr>
+              <a:t>●  다음 작업 1순위로 개선계획에 반영</a:t>
+            </a:r>
+          </a:p>
+        </p:txBody>
+      </p:sp>
+      <p:sp>
+        <p:nvSpPr>
+          <p:cNvPr id="12" name="Rounded Rectangle 11"/>
+          <p:cNvSpPr/>
+          <p:nvPr/>
+        </p:nvSpPr>
+        <p:spPr>
+          <a:xfrm>
+            <a:off x="3310128" y="1600200"/>
+            <a:ext cx="2606040" cy="4160520"/>
+          </a:xfrm>
+          <a:prstGeom prst="roundRect">
+            <a:avLst>
+              <a:gd name="adj" fmla="val 7000"/>
+            </a:avLst>
+          </a:prstGeom>
+          <a:solidFill>
+            <a:srgbClr val="FFFFFF"/>
+          </a:solidFill>
+          <a:ln w="12700">
+            <a:solidFill>
+              <a:srgbClr val="DDE1F2"/>
+            </a:solidFill>
+          </a:ln>
+          <a:effectLst/>
+        </p:spPr>
+        <p:style>
+          <a:lnRef idx="1">
+            <a:schemeClr val="accent1"/>
+          </a:lnRef>
+          <a:fillRef idx="3">
+            <a:schemeClr val="accent1"/>
+          </a:fillRef>
+          <a:effectRef idx="2">
+            <a:schemeClr val="accent1"/>
+          </a:effectRef>
+          <a:fontRef idx="minor">
+            <a:schemeClr val="lt1"/>
+          </a:fontRef>
+        </p:style>
+        <p:txBody>
+          <a:bodyPr rtlCol="0" anchor="ctr"/>
+          <a:lstStyle/>
+          <a:p>
+            <a:pPr algn="ctr"/>
+          </a:p>
+        </p:txBody>
+      </p:sp>
       <p:pic>
         <p:nvPicPr>
-          <p:cNvPr id="12" name="Picture 11" descr="warning.png"/>
+          <p:cNvPr id="13" name="Picture 12" descr="warning.png"/>
           <p:cNvPicPr>
             <a:picLocks noChangeAspect="1"/>
           </p:cNvPicPr>
@@ -13999,8 +14828,8 @@
         </p:blipFill>
         <p:spPr>
           <a:xfrm>
-            <a:off x="3456981" y="1856232"/>
-            <a:ext cx="721278" cy="721278"/>
+            <a:off x="4384548" y="1828800"/>
+            <a:ext cx="457200" cy="457200"/>
           </a:xfrm>
           <a:prstGeom prst="rect">
             <a:avLst/>
@@ -14009,14 +14838,14 @@
       </p:pic>
       <p:sp>
         <p:nvSpPr>
-          <p:cNvPr id="13" name="TextBox 12"/>
-          <p:cNvSpPr txBox="1"/>
-          <p:nvPr/>
-        </p:nvSpPr>
-        <p:spPr>
-          <a:xfrm>
-            <a:off x="2848356" y="2687238"/>
-            <a:ext cx="1938528" cy="457200"/>
+          <p:cNvPr id="14" name="TextBox 13"/>
+          <p:cNvSpPr txBox="1"/>
+          <p:nvPr/>
+        </p:nvSpPr>
+        <p:spPr>
+          <a:xfrm>
+            <a:off x="3419856" y="2377440"/>
+            <a:ext cx="2386584" cy="548640"/>
           </a:xfrm>
           <a:prstGeom prst="rect">
             <a:avLst/>
@@ -14031,94 +14860,53 @@
           <a:p>
             <a:pPr algn="ctr">
               <a:lnSpc>
-                <a:spcPct val="115000"/>
-              </a:lnSpc>
-            </a:pPr>
-            <a:r>
-              <a:rPr sz="1200" b="1" i="0">
+                <a:spcPct val="120000"/>
+              </a:lnSpc>
+            </a:pPr>
+            <a:r>
+              <a:rPr sz="1250" b="1" i="0">
                 <a:solidFill>
                   <a:srgbClr val="26283A"/>
                 </a:solidFill>
                 <a:latin typeface="맑은 고딕"/>
               </a:rPr>
-              <a:t>극밀집 군중 탐지 한계</a:t>
-            </a:r>
-          </a:p>
-        </p:txBody>
-      </p:sp>
-      <p:sp>
-        <p:nvSpPr>
-          <p:cNvPr id="14" name="TextBox 13"/>
-          <p:cNvSpPr txBox="1"/>
-          <p:nvPr/>
-        </p:nvSpPr>
-        <p:spPr>
-          <a:xfrm>
-            <a:off x="2848356" y="3107862"/>
-            <a:ext cx="1938528" cy="457200"/>
-          </a:xfrm>
-          <a:prstGeom prst="rect">
-            <a:avLst/>
-          </a:prstGeom>
-          <a:noFill/>
-        </p:spPr>
-        <p:txBody>
-          <a:bodyPr wrap="square" anchor="t" lIns="0" rIns="0" tIns="0" bIns="0">
-            <a:spAutoFit/>
-          </a:bodyPr>
-          <a:lstStyle/>
+              <a:t>극밀집 군중 탐지</a:t>
+            </a:r>
+          </a:p>
           <a:p>
             <a:pPr algn="ctr">
               <a:lnSpc>
-                <a:spcPct val="125000"/>
-              </a:lnSpc>
-            </a:pPr>
-            <a:r>
-              <a:rPr sz="1100" b="0" i="0">
-                <a:solidFill>
-                  <a:srgbClr val="8A8EA3"/>
-                </a:solidFill>
-                <a:latin typeface="맑은 고딕"/>
-              </a:rPr>
-              <a:t>수백명 겹침은 YOLOv8s도 일부</a:t>
-            </a:r>
-          </a:p>
-          <a:p>
-            <a:pPr algn="ctr">
-              <a:lnSpc>
-                <a:spcPct val="125000"/>
-              </a:lnSpc>
-            </a:pPr>
-            <a:r>
-              <a:rPr sz="1100" b="0" i="0">
-                <a:solidFill>
-                  <a:srgbClr val="8A8EA3"/>
-                </a:solidFill>
-                <a:latin typeface="맑은 고딕"/>
-              </a:rPr>
-              <a:t>누락 — 더 큰 모델 필요</a:t>
-            </a:r>
-          </a:p>
-        </p:txBody>
-      </p:sp>
-      <p:sp>
-        <p:nvSpPr>
-          <p:cNvPr id="15" name="Rounded Rectangle 14"/>
+                <a:spcPct val="120000"/>
+              </a:lnSpc>
+            </a:pPr>
+            <a:r>
+              <a:rPr sz="1250" b="1" i="0">
+                <a:solidFill>
+                  <a:srgbClr val="26283A"/>
+                </a:solidFill>
+                <a:latin typeface="맑은 고딕"/>
+              </a:rPr>
+              <a:t>한계</a:t>
+            </a:r>
+          </a:p>
+        </p:txBody>
+      </p:sp>
+      <p:sp>
+        <p:nvSpPr>
+          <p:cNvPr id="15" name="Rectangle 14"/>
           <p:cNvSpPr/>
           <p:nvPr/>
         </p:nvSpPr>
         <p:spPr>
           <a:xfrm>
-            <a:off x="5010912" y="1600200"/>
-            <a:ext cx="2121408" cy="2697480"/>
-          </a:xfrm>
-          <a:prstGeom prst="roundRect">
-            <a:avLst>
-              <a:gd name="adj" fmla="val 10000"/>
-            </a:avLst>
+            <a:off x="3511296" y="3017520"/>
+            <a:ext cx="2203704" cy="16510"/>
+          </a:xfrm>
+          <a:prstGeom prst="rect">
+            <a:avLst/>
           </a:prstGeom>
           <a:solidFill>
-            <a:srgbClr val="FFFFFF"/>
+            <a:srgbClr val="ECEEF6"/>
           </a:solidFill>
           <a:ln>
             <a:noFill/>
@@ -14147,9 +14935,137 @@
           </a:p>
         </p:txBody>
       </p:sp>
+      <p:sp>
+        <p:nvSpPr>
+          <p:cNvPr id="16" name="TextBox 15"/>
+          <p:cNvSpPr txBox="1"/>
+          <p:nvPr/>
+        </p:nvSpPr>
+        <p:spPr>
+          <a:xfrm>
+            <a:off x="3529584" y="3291840"/>
+            <a:ext cx="2203704" cy="2286000"/>
+          </a:xfrm>
+          <a:prstGeom prst="rect">
+            <a:avLst/>
+          </a:prstGeom>
+          <a:noFill/>
+        </p:spPr>
+        <p:txBody>
+          <a:bodyPr wrap="square" anchor="t" lIns="0" rIns="0">
+            <a:spAutoFit/>
+          </a:bodyPr>
+          <a:lstStyle/>
+          <a:p>
+            <a:pPr marL="0" indent="0">
+              <a:lnSpc>
+                <a:spcPct val="130000"/>
+              </a:lnSpc>
+              <a:spcAft>
+                <a:spcPts val="2000"/>
+              </a:spcAft>
+            </a:pPr>
+            <a:r>
+              <a:rPr sz="960" b="1">
+                <a:solidFill>
+                  <a:srgbClr val="26283A"/>
+                </a:solidFill>
+                <a:latin typeface="맑은 고딕"/>
+              </a:rPr>
+              <a:t>●  수백명이 겹치는 장면은 YOLOv8s도 일부 누락</a:t>
+            </a:r>
+          </a:p>
+          <a:p>
+            <a:pPr marL="0" indent="0">
+              <a:lnSpc>
+                <a:spcPct val="130000"/>
+              </a:lnSpc>
+              <a:spcAft>
+                <a:spcPts val="2000"/>
+              </a:spcAft>
+            </a:pPr>
+            <a:r>
+              <a:rPr sz="960" b="1">
+                <a:solidFill>
+                  <a:srgbClr val="26283A"/>
+                </a:solidFill>
+                <a:latin typeface="맑은 고딕"/>
+              </a:rPr>
+              <a:t>●  추론해상도 상향으로 4명→11명까지는 개선</a:t>
+            </a:r>
+          </a:p>
+          <a:p>
+            <a:pPr marL="0" indent="0">
+              <a:lnSpc>
+                <a:spcPct val="130000"/>
+              </a:lnSpc>
+              <a:spcAft>
+                <a:spcPts val="2000"/>
+              </a:spcAft>
+            </a:pPr>
+            <a:r>
+              <a:rPr sz="960" b="1">
+                <a:solidFill>
+                  <a:srgbClr val="26283A"/>
+                </a:solidFill>
+                <a:latin typeface="맑은 고딕"/>
+              </a:rPr>
+              <a:t>●  더 큰 모델(YOLOv8m/l)이 필요함을 확인</a:t>
+            </a:r>
+          </a:p>
+        </p:txBody>
+      </p:sp>
+      <p:sp>
+        <p:nvSpPr>
+          <p:cNvPr id="17" name="Rounded Rectangle 16"/>
+          <p:cNvSpPr/>
+          <p:nvPr/>
+        </p:nvSpPr>
+        <p:spPr>
+          <a:xfrm>
+            <a:off x="6117336" y="1600200"/>
+            <a:ext cx="2606040" cy="4160520"/>
+          </a:xfrm>
+          <a:prstGeom prst="roundRect">
+            <a:avLst>
+              <a:gd name="adj" fmla="val 7000"/>
+            </a:avLst>
+          </a:prstGeom>
+          <a:solidFill>
+            <a:srgbClr val="FFFFFF"/>
+          </a:solidFill>
+          <a:ln w="12700">
+            <a:solidFill>
+              <a:srgbClr val="DDE1F2"/>
+            </a:solidFill>
+          </a:ln>
+          <a:effectLst/>
+        </p:spPr>
+        <p:style>
+          <a:lnRef idx="1">
+            <a:schemeClr val="accent1"/>
+          </a:lnRef>
+          <a:fillRef idx="3">
+            <a:schemeClr val="accent1"/>
+          </a:fillRef>
+          <a:effectRef idx="2">
+            <a:schemeClr val="accent1"/>
+          </a:effectRef>
+          <a:fontRef idx="minor">
+            <a:schemeClr val="lt1"/>
+          </a:fontRef>
+        </p:style>
+        <p:txBody>
+          <a:bodyPr rtlCol="0" anchor="ctr"/>
+          <a:lstStyle/>
+          <a:p>
+            <a:pPr algn="ctr"/>
+          </a:p>
+        </p:txBody>
+      </p:sp>
       <p:pic>
         <p:nvPicPr>
-          <p:cNvPr id="16" name="Picture 15" descr="gear.png"/>
+          <p:cNvPr id="18" name="Picture 17" descr="gear.png"/>
           <p:cNvPicPr>
             <a:picLocks noChangeAspect="1"/>
           </p:cNvPicPr>
@@ -14163,8 +15079,8 @@
         </p:blipFill>
         <p:spPr>
           <a:xfrm>
-            <a:off x="5710977" y="1856232"/>
-            <a:ext cx="721278" cy="721278"/>
+            <a:off x="7191756" y="1828800"/>
+            <a:ext cx="457200" cy="457200"/>
           </a:xfrm>
           <a:prstGeom prst="rect">
             <a:avLst/>
@@ -14173,14 +15089,14 @@
       </p:pic>
       <p:sp>
         <p:nvSpPr>
-          <p:cNvPr id="17" name="TextBox 16"/>
-          <p:cNvSpPr txBox="1"/>
-          <p:nvPr/>
-        </p:nvSpPr>
-        <p:spPr>
-          <a:xfrm>
-            <a:off x="5102352" y="2687238"/>
-            <a:ext cx="1938528" cy="457200"/>
+          <p:cNvPr id="19" name="TextBox 18"/>
+          <p:cNvSpPr txBox="1"/>
+          <p:nvPr/>
+        </p:nvSpPr>
+        <p:spPr>
+          <a:xfrm>
+            <a:off x="6227064" y="2377440"/>
+            <a:ext cx="2386584" cy="548640"/>
           </a:xfrm>
           <a:prstGeom prst="rect">
             <a:avLst/>
@@ -14195,94 +15111,53 @@
           <a:p>
             <a:pPr algn="ctr">
               <a:lnSpc>
-                <a:spcPct val="115000"/>
-              </a:lnSpc>
-            </a:pPr>
-            <a:r>
-              <a:rPr sz="1200" b="1" i="0">
+                <a:spcPct val="120000"/>
+              </a:lnSpc>
+            </a:pPr>
+            <a:r>
+              <a:rPr sz="1250" b="1" i="0">
                 <a:solidFill>
                   <a:srgbClr val="26283A"/>
                 </a:solidFill>
                 <a:latin typeface="맑은 고딕"/>
               </a:rPr>
-              <a:t>자동화 테스트 부재</a:t>
-            </a:r>
-          </a:p>
-        </p:txBody>
-      </p:sp>
-      <p:sp>
-        <p:nvSpPr>
-          <p:cNvPr id="18" name="TextBox 17"/>
-          <p:cNvSpPr txBox="1"/>
-          <p:nvPr/>
-        </p:nvSpPr>
-        <p:spPr>
-          <a:xfrm>
-            <a:off x="5102352" y="3107862"/>
-            <a:ext cx="1938528" cy="457200"/>
-          </a:xfrm>
-          <a:prstGeom prst="rect">
-            <a:avLst/>
-          </a:prstGeom>
-          <a:noFill/>
-        </p:spPr>
-        <p:txBody>
-          <a:bodyPr wrap="square" anchor="t" lIns="0" rIns="0" tIns="0" bIns="0">
-            <a:spAutoFit/>
-          </a:bodyPr>
-          <a:lstStyle/>
+              <a:t>자동화 테스트</a:t>
+            </a:r>
+          </a:p>
           <a:p>
             <a:pPr algn="ctr">
               <a:lnSpc>
-                <a:spcPct val="125000"/>
-              </a:lnSpc>
-            </a:pPr>
-            <a:r>
-              <a:rPr sz="1100" b="0" i="0">
-                <a:solidFill>
-                  <a:srgbClr val="8A8EA3"/>
-                </a:solidFill>
-                <a:latin typeface="맑은 고딕"/>
-              </a:rPr>
-              <a:t>전부 curl·브라우저·에뮬레이터</a:t>
-            </a:r>
-          </a:p>
-          <a:p>
-            <a:pPr algn="ctr">
-              <a:lnSpc>
-                <a:spcPct val="125000"/>
-              </a:lnSpc>
-            </a:pPr>
-            <a:r>
-              <a:rPr sz="1100" b="0" i="0">
-                <a:solidFill>
-                  <a:srgbClr val="8A8EA3"/>
-                </a:solidFill>
-                <a:latin typeface="맑은 고딕"/>
-              </a:rPr>
-              <a:t>수동 검증, 단위테스트 없음</a:t>
-            </a:r>
-          </a:p>
-        </p:txBody>
-      </p:sp>
-      <p:sp>
-        <p:nvSpPr>
-          <p:cNvPr id="19" name="Rounded Rectangle 18"/>
+                <a:spcPct val="120000"/>
+              </a:lnSpc>
+            </a:pPr>
+            <a:r>
+              <a:rPr sz="1250" b="1" i="0">
+                <a:solidFill>
+                  <a:srgbClr val="26283A"/>
+                </a:solidFill>
+                <a:latin typeface="맑은 고딕"/>
+              </a:rPr>
+              <a:t>부재</a:t>
+            </a:r>
+          </a:p>
+        </p:txBody>
+      </p:sp>
+      <p:sp>
+        <p:nvSpPr>
+          <p:cNvPr id="20" name="Rectangle 19"/>
           <p:cNvSpPr/>
           <p:nvPr/>
         </p:nvSpPr>
         <p:spPr>
           <a:xfrm>
-            <a:off x="7264908" y="1600200"/>
-            <a:ext cx="2121408" cy="2697480"/>
-          </a:xfrm>
-          <a:prstGeom prst="roundRect">
-            <a:avLst>
-              <a:gd name="adj" fmla="val 10000"/>
-            </a:avLst>
+            <a:off x="6318504" y="3017520"/>
+            <a:ext cx="2203704" cy="16510"/>
+          </a:xfrm>
+          <a:prstGeom prst="rect">
+            <a:avLst/>
           </a:prstGeom>
           <a:solidFill>
-            <a:srgbClr val="FFFFFF"/>
+            <a:srgbClr val="ECEEF6"/>
           </a:solidFill>
           <a:ln>
             <a:noFill/>
@@ -14311,9 +15186,137 @@
           </a:p>
         </p:txBody>
       </p:sp>
+      <p:sp>
+        <p:nvSpPr>
+          <p:cNvPr id="21" name="TextBox 20"/>
+          <p:cNvSpPr txBox="1"/>
+          <p:nvPr/>
+        </p:nvSpPr>
+        <p:spPr>
+          <a:xfrm>
+            <a:off x="6336792" y="3291840"/>
+            <a:ext cx="2203704" cy="2286000"/>
+          </a:xfrm>
+          <a:prstGeom prst="rect">
+            <a:avLst/>
+          </a:prstGeom>
+          <a:noFill/>
+        </p:spPr>
+        <p:txBody>
+          <a:bodyPr wrap="square" anchor="t" lIns="0" rIns="0">
+            <a:spAutoFit/>
+          </a:bodyPr>
+          <a:lstStyle/>
+          <a:p>
+            <a:pPr marL="0" indent="0">
+              <a:lnSpc>
+                <a:spcPct val="130000"/>
+              </a:lnSpc>
+              <a:spcAft>
+                <a:spcPts val="2000"/>
+              </a:spcAft>
+            </a:pPr>
+            <a:r>
+              <a:rPr sz="960" b="1">
+                <a:solidFill>
+                  <a:srgbClr val="26283A"/>
+                </a:solidFill>
+                <a:latin typeface="맑은 고딕"/>
+              </a:rPr>
+              <a:t>●  전부 curl·브라우저·에뮬레이터 수동 검증</a:t>
+            </a:r>
+          </a:p>
+          <a:p>
+            <a:pPr marL="0" indent="0">
+              <a:lnSpc>
+                <a:spcPct val="130000"/>
+              </a:lnSpc>
+              <a:spcAft>
+                <a:spcPts val="2000"/>
+              </a:spcAft>
+            </a:pPr>
+            <a:r>
+              <a:rPr sz="960" b="1">
+                <a:solidFill>
+                  <a:srgbClr val="26283A"/>
+                </a:solidFill>
+                <a:latin typeface="맑은 고딕"/>
+              </a:rPr>
+              <a:t>●  회귀 테스트를 매번 수동으로 재현하는 중</a:t>
+            </a:r>
+          </a:p>
+          <a:p>
+            <a:pPr marL="0" indent="0">
+              <a:lnSpc>
+                <a:spcPct val="130000"/>
+              </a:lnSpc>
+              <a:spcAft>
+                <a:spcPts val="2000"/>
+              </a:spcAft>
+            </a:pPr>
+            <a:r>
+              <a:rPr sz="960" b="1">
+                <a:solidFill>
+                  <a:srgbClr val="26283A"/>
+                </a:solidFill>
+                <a:latin typeface="맑은 고딕"/>
+              </a:rPr>
+              <a:t>●  JUnit 단위테스트 추가를 개선계획에 반영</a:t>
+            </a:r>
+          </a:p>
+        </p:txBody>
+      </p:sp>
+      <p:sp>
+        <p:nvSpPr>
+          <p:cNvPr id="22" name="Rounded Rectangle 21"/>
+          <p:cNvSpPr/>
+          <p:nvPr/>
+        </p:nvSpPr>
+        <p:spPr>
+          <a:xfrm>
+            <a:off x="8924544" y="1600200"/>
+            <a:ext cx="2606040" cy="4160520"/>
+          </a:xfrm>
+          <a:prstGeom prst="roundRect">
+            <a:avLst>
+              <a:gd name="adj" fmla="val 7000"/>
+            </a:avLst>
+          </a:prstGeom>
+          <a:solidFill>
+            <a:srgbClr val="FFFFFF"/>
+          </a:solidFill>
+          <a:ln w="12700">
+            <a:solidFill>
+              <a:srgbClr val="DDE1F2"/>
+            </a:solidFill>
+          </a:ln>
+          <a:effectLst/>
+        </p:spPr>
+        <p:style>
+          <a:lnRef idx="1">
+            <a:schemeClr val="accent1"/>
+          </a:lnRef>
+          <a:fillRef idx="3">
+            <a:schemeClr val="accent1"/>
+          </a:fillRef>
+          <a:effectRef idx="2">
+            <a:schemeClr val="accent1"/>
+          </a:effectRef>
+          <a:fontRef idx="minor">
+            <a:schemeClr val="lt1"/>
+          </a:fontRef>
+        </p:style>
+        <p:txBody>
+          <a:bodyPr rtlCol="0" anchor="ctr"/>
+          <a:lstStyle/>
+          <a:p>
+            <a:pPr algn="ctr"/>
+          </a:p>
+        </p:txBody>
+      </p:sp>
       <p:pic>
         <p:nvPicPr>
-          <p:cNvPr id="20" name="Picture 19" descr="doc.png"/>
+          <p:cNvPr id="23" name="Picture 22" descr="doc.png"/>
           <p:cNvPicPr>
             <a:picLocks noChangeAspect="1"/>
           </p:cNvPicPr>
@@ -14327,8 +15330,8 @@
         </p:blipFill>
         <p:spPr>
           <a:xfrm>
-            <a:off x="7964973" y="1856232"/>
-            <a:ext cx="721278" cy="721278"/>
+            <a:off x="9998964" y="1828800"/>
+            <a:ext cx="457200" cy="457200"/>
           </a:xfrm>
           <a:prstGeom prst="rect">
             <a:avLst/>
@@ -14337,14 +15340,14 @@
       </p:pic>
       <p:sp>
         <p:nvSpPr>
-          <p:cNvPr id="21" name="TextBox 20"/>
-          <p:cNvSpPr txBox="1"/>
-          <p:nvPr/>
-        </p:nvSpPr>
-        <p:spPr>
-          <a:xfrm>
-            <a:off x="7356348" y="2687238"/>
-            <a:ext cx="1938528" cy="457200"/>
+          <p:cNvPr id="24" name="TextBox 23"/>
+          <p:cNvSpPr txBox="1"/>
+          <p:nvPr/>
+        </p:nvSpPr>
+        <p:spPr>
+          <a:xfrm>
+            <a:off x="9034272" y="2377440"/>
+            <a:ext cx="2386584" cy="548640"/>
           </a:xfrm>
           <a:prstGeom prst="rect">
             <a:avLst/>
@@ -14359,79 +15362,164 @@
           <a:p>
             <a:pPr algn="ctr">
               <a:lnSpc>
-                <a:spcPct val="115000"/>
-              </a:lnSpc>
-            </a:pPr>
-            <a:r>
-              <a:rPr sz="1200" b="1" i="0">
+                <a:spcPct val="120000"/>
+              </a:lnSpc>
+            </a:pPr>
+            <a:r>
+              <a:rPr sz="1250" b="1" i="0">
                 <a:solidFill>
                   <a:srgbClr val="26283A"/>
                 </a:solidFill>
                 <a:latin typeface="맑은 고딕"/>
               </a:rPr>
-              <a:t>영상 출처 기록 미흡</a:t>
-            </a:r>
-          </a:p>
-        </p:txBody>
-      </p:sp>
-      <p:sp>
-        <p:nvSpPr>
-          <p:cNvPr id="22" name="TextBox 21"/>
-          <p:cNvSpPr txBox="1"/>
-          <p:nvPr/>
-        </p:nvSpPr>
-        <p:spPr>
-          <a:xfrm>
-            <a:off x="7356348" y="3107862"/>
-            <a:ext cx="1938528" cy="457200"/>
-          </a:xfrm>
-          <a:prstGeom prst="rect">
-            <a:avLst/>
-          </a:prstGeom>
-          <a:noFill/>
-        </p:spPr>
-        <p:txBody>
-          <a:bodyPr wrap="square" anchor="t" lIns="0" rIns="0" tIns="0" bIns="0">
-            <a:spAutoFit/>
-          </a:bodyPr>
-          <a:lstStyle/>
+              <a:t>영상 출처 기록</a:t>
+            </a:r>
+          </a:p>
           <a:p>
             <a:pPr algn="ctr">
               <a:lnSpc>
-                <a:spcPct val="125000"/>
-              </a:lnSpc>
-            </a:pPr>
-            <a:r>
-              <a:rPr sz="1100" b="0" i="0">
-                <a:solidFill>
-                  <a:srgbClr val="8A8EA3"/>
-                </a:solidFill>
-                <a:latin typeface="맑은 고딕"/>
-              </a:rPr>
-              <a:t>Pexels 영상 5개 다운로드</a:t>
-            </a:r>
-          </a:p>
-          <a:p>
-            <a:pPr algn="ctr">
-              <a:lnSpc>
-                <a:spcPct val="125000"/>
-              </a:lnSpc>
-            </a:pPr>
-            <a:r>
-              <a:rPr sz="1100" b="0" i="0">
-                <a:solidFill>
-                  <a:srgbClr val="8A8EA3"/>
-                </a:solidFill>
-                <a:latin typeface="맑은 고딕"/>
-              </a:rPr>
-              <a:t>URL 미기록(라이선스는 문제없음)</a:t>
-            </a:r>
-          </a:p>
-        </p:txBody>
-      </p:sp>
-      <p:sp>
-        <p:nvSpPr>
-          <p:cNvPr id="23" name="TextBox 22"/>
+                <a:spcPct val="120000"/>
+              </a:lnSpc>
+            </a:pPr>
+            <a:r>
+              <a:rPr sz="1250" b="1" i="0">
+                <a:solidFill>
+                  <a:srgbClr val="26283A"/>
+                </a:solidFill>
+                <a:latin typeface="맑은 고딕"/>
+              </a:rPr>
+              <a:t>미흡</a:t>
+            </a:r>
+          </a:p>
+        </p:txBody>
+      </p:sp>
+      <p:sp>
+        <p:nvSpPr>
+          <p:cNvPr id="25" name="Rectangle 24"/>
+          <p:cNvSpPr/>
+          <p:nvPr/>
+        </p:nvSpPr>
+        <p:spPr>
+          <a:xfrm>
+            <a:off x="9125712" y="3017520"/>
+            <a:ext cx="2203704" cy="16510"/>
+          </a:xfrm>
+          <a:prstGeom prst="rect">
+            <a:avLst/>
+          </a:prstGeom>
+          <a:solidFill>
+            <a:srgbClr val="ECEEF6"/>
+          </a:solidFill>
+          <a:ln>
+            <a:noFill/>
+          </a:ln>
+          <a:effectLst/>
+        </p:spPr>
+        <p:style>
+          <a:lnRef idx="1">
+            <a:schemeClr val="accent1"/>
+          </a:lnRef>
+          <a:fillRef idx="3">
+            <a:schemeClr val="accent1"/>
+          </a:fillRef>
+          <a:effectRef idx="2">
+            <a:schemeClr val="accent1"/>
+          </a:effectRef>
+          <a:fontRef idx="minor">
+            <a:schemeClr val="lt1"/>
+          </a:fontRef>
+        </p:style>
+        <p:txBody>
+          <a:bodyPr rtlCol="0" anchor="ctr"/>
+          <a:lstStyle/>
+          <a:p>
+            <a:pPr algn="ctr"/>
+          </a:p>
+        </p:txBody>
+      </p:sp>
+      <p:sp>
+        <p:nvSpPr>
+          <p:cNvPr id="26" name="TextBox 25"/>
+          <p:cNvSpPr txBox="1"/>
+          <p:nvPr/>
+        </p:nvSpPr>
+        <p:spPr>
+          <a:xfrm>
+            <a:off x="9144000" y="3291840"/>
+            <a:ext cx="2203704" cy="2286000"/>
+          </a:xfrm>
+          <a:prstGeom prst="rect">
+            <a:avLst/>
+          </a:prstGeom>
+          <a:noFill/>
+        </p:spPr>
+        <p:txBody>
+          <a:bodyPr wrap="square" anchor="t" lIns="0" rIns="0">
+            <a:spAutoFit/>
+          </a:bodyPr>
+          <a:lstStyle/>
+          <a:p>
+            <a:pPr marL="0" indent="0">
+              <a:lnSpc>
+                <a:spcPct val="130000"/>
+              </a:lnSpc>
+              <a:spcAft>
+                <a:spcPts val="2000"/>
+              </a:spcAft>
+            </a:pPr>
+            <a:r>
+              <a:rPr sz="960" b="1">
+                <a:solidFill>
+                  <a:srgbClr val="26283A"/>
+                </a:solidFill>
+                <a:latin typeface="맑은 고딕"/>
+              </a:rPr>
+              <a:t>●  Pexels 영상 5개 다운로드 URL 미기록</a:t>
+            </a:r>
+          </a:p>
+          <a:p>
+            <a:pPr marL="0" indent="0">
+              <a:lnSpc>
+                <a:spcPct val="130000"/>
+              </a:lnSpc>
+              <a:spcAft>
+                <a:spcPts val="2000"/>
+              </a:spcAft>
+            </a:pPr>
+            <a:r>
+              <a:rPr sz="960" b="1">
+                <a:solidFill>
+                  <a:srgbClr val="26283A"/>
+                </a:solidFill>
+                <a:latin typeface="맑은 고딕"/>
+              </a:rPr>
+              <a:t>●  라이선스 자체는 상업적 이용 가능해 문제없음</a:t>
+            </a:r>
+          </a:p>
+          <a:p>
+            <a:pPr marL="0" indent="0">
+              <a:lnSpc>
+                <a:spcPct val="130000"/>
+              </a:lnSpc>
+              <a:spcAft>
+                <a:spcPts val="2000"/>
+              </a:spcAft>
+            </a:pPr>
+            <a:r>
+              <a:rPr sz="960" b="1">
+                <a:solidFill>
+                  <a:srgbClr val="26283A"/>
+                </a:solidFill>
+                <a:latin typeface="맑은 고딕"/>
+              </a:rPr>
+              <a:t>●  앞으로는 수집 시 URL 즉시 기록 규칙화</a:t>
+            </a:r>
+          </a:p>
+        </p:txBody>
+      </p:sp>
+      <p:sp>
+        <p:nvSpPr>
+          <p:cNvPr id="27" name="TextBox 26"/>
           <p:cNvSpPr txBox="1"/>
           <p:nvPr/>
         </p:nvSpPr>
@@ -14470,7 +15558,7 @@
       </p:sp>
       <p:sp>
         <p:nvSpPr>
-          <p:cNvPr id="24" name="TextBox 23"/>
+          <p:cNvPr id="28" name="TextBox 27"/>
           <p:cNvSpPr txBox="1"/>
           <p:nvPr/>
         </p:nvSpPr>
@@ -14729,8 +15817,10 @@
           <a:solidFill>
             <a:srgbClr val="FFFFFF"/>
           </a:solidFill>
-          <a:ln>
-            <a:noFill/>
+          <a:ln w="12700">
+            <a:solidFill>
+              <a:srgbClr val="DDE1F2"/>
+            </a:solidFill>
           </a:ln>
           <a:effectLst/>
         </p:spPr>
@@ -14867,8 +15957,10 @@
           <a:solidFill>
             <a:srgbClr val="FFFFFF"/>
           </a:solidFill>
-          <a:ln>
-            <a:noFill/>
+          <a:ln w="12700">
+            <a:solidFill>
+              <a:srgbClr val="DDE1F2"/>
+            </a:solidFill>
           </a:ln>
           <a:effectLst/>
         </p:spPr>
@@ -15005,8 +16097,10 @@
           <a:solidFill>
             <a:srgbClr val="FFFFFF"/>
           </a:solidFill>
-          <a:ln>
-            <a:noFill/>
+          <a:ln w="12700">
+            <a:solidFill>
+              <a:srgbClr val="DDE1F2"/>
+            </a:solidFill>
           </a:ln>
           <a:effectLst/>
         </p:spPr>
@@ -15143,8 +16237,10 @@
           <a:solidFill>
             <a:srgbClr val="FFFFFF"/>
           </a:solidFill>
-          <a:ln>
-            <a:noFill/>
+          <a:ln w="12700">
+            <a:solidFill>
+              <a:srgbClr val="DDE1F2"/>
+            </a:solidFill>
           </a:ln>
           <a:effectLst/>
         </p:spPr>
@@ -15281,8 +16377,10 @@
           <a:solidFill>
             <a:srgbClr val="FFFFFF"/>
           </a:solidFill>
-          <a:ln>
-            <a:noFill/>
+          <a:ln w="12700">
+            <a:solidFill>
+              <a:srgbClr val="DDE1F2"/>
+            </a:solidFill>
           </a:ln>
           <a:effectLst/>
         </p:spPr>
@@ -15593,7 +16691,7 @@
                 </a:solidFill>
                 <a:latin typeface="맑은 고딕"/>
               </a:rPr>
-              <a:t>ROADMAP &amp; CONTRIBUTION</a:t>
+              <a:t>ROADMAP</a:t>
             </a:r>
           </a:p>
         </p:txBody>
@@ -15632,7 +16730,7 @@
                 </a:solidFill>
                 <a:latin typeface="맑은 고딕"/>
               </a:rPr>
-              <a:t>향후 확장 · 개인 기여</a:t>
+              <a:t>향후 확장</a:t>
             </a:r>
           </a:p>
         </p:txBody>
@@ -15683,199 +16781,170 @@
       </p:sp>
       <p:sp>
         <p:nvSpPr>
-          <p:cNvPr id="7" name="TextBox 6"/>
-          <p:cNvSpPr txBox="1"/>
-          <p:nvPr/>
-        </p:nvSpPr>
-        <p:spPr>
-          <a:xfrm>
-            <a:off x="502920" y="1463040"/>
-            <a:ext cx="5486400" cy="320040"/>
-          </a:xfrm>
-          <a:prstGeom prst="rect">
-            <a:avLst/>
-          </a:prstGeom>
-          <a:noFill/>
-        </p:spPr>
-        <p:txBody>
-          <a:bodyPr wrap="square" anchor="t" lIns="0" rIns="0" tIns="0" bIns="0">
-            <a:spAutoFit/>
-          </a:bodyPr>
-          <a:lstStyle/>
-          <a:p>
-            <a:pPr algn="l">
-              <a:lnSpc>
-                <a:spcPct val="115000"/>
-              </a:lnSpc>
-            </a:pPr>
-            <a:r>
-              <a:rPr sz="1350" b="1" i="0">
-                <a:solidFill>
-                  <a:srgbClr val="26283A"/>
-                </a:solidFill>
-                <a:latin typeface="맑은 고딕"/>
-              </a:rPr>
-              <a:t>향후 고도화 방향</a:t>
-            </a:r>
-          </a:p>
-        </p:txBody>
-      </p:sp>
-      <p:sp>
-        <p:nvSpPr>
-          <p:cNvPr id="8" name="TextBox 7"/>
-          <p:cNvSpPr txBox="1"/>
-          <p:nvPr/>
-        </p:nvSpPr>
-        <p:spPr>
-          <a:xfrm>
-            <a:off x="502920" y="1828800"/>
-            <a:ext cx="5486400" cy="2743200"/>
-          </a:xfrm>
-          <a:prstGeom prst="rect">
-            <a:avLst/>
-          </a:prstGeom>
-          <a:noFill/>
-        </p:spPr>
-        <p:txBody>
-          <a:bodyPr wrap="square" anchor="t" lIns="0" rIns="0">
-            <a:spAutoFit/>
-          </a:bodyPr>
-          <a:lstStyle/>
-          <a:p>
-            <a:pPr marL="0" indent="0">
-              <a:lnSpc>
-                <a:spcPct val="130000"/>
-              </a:lnSpc>
-              <a:spcAft>
-                <a:spcPts val="1400"/>
-              </a:spcAft>
-            </a:pPr>
-            <a:r>
-              <a:rPr sz="1200" b="1">
-                <a:solidFill>
-                  <a:srgbClr val="26283A"/>
-                </a:solidFill>
-                <a:latin typeface="맑은 고딕"/>
-              </a:rPr>
-              <a:t>●  실제 RTSP 라이브 카메라(CCTV·드론) 연동 실험</a:t>
-            </a:r>
-          </a:p>
-          <a:p>
-            <a:pPr marL="0" indent="0">
-              <a:lnSpc>
-                <a:spcPct val="130000"/>
-              </a:lnSpc>
-              <a:spcAft>
-                <a:spcPts val="1400"/>
-              </a:spcAft>
-            </a:pPr>
-            <a:r>
-              <a:rPr sz="1200" b="1">
-                <a:solidFill>
-                  <a:srgbClr val="26283A"/>
-                </a:solidFill>
-                <a:latin typeface="맑은 고딕"/>
-              </a:rPr>
-              <a:t>●  구역 간 이동 조회(zone_flows), 비밀번호 재설정 구현</a:t>
-            </a:r>
-          </a:p>
-          <a:p>
-            <a:pPr marL="0" indent="0">
-              <a:lnSpc>
-                <a:spcPct val="130000"/>
-              </a:lnSpc>
-              <a:spcAft>
-                <a:spcPts val="1400"/>
-              </a:spcAft>
-            </a:pPr>
-            <a:r>
-              <a:rPr sz="1200" b="1">
-                <a:solidFill>
-                  <a:srgbClr val="26283A"/>
-                </a:solidFill>
-                <a:latin typeface="맑은 고딕"/>
-              </a:rPr>
-              <a:t>●  YOLOv8m/l 비교 실험, 멀티존 혼잡 예측</a:t>
-            </a:r>
-          </a:p>
-          <a:p>
-            <a:pPr marL="0" indent="0">
-              <a:lnSpc>
-                <a:spcPct val="130000"/>
-              </a:lnSpc>
-              <a:spcAft>
-                <a:spcPts val="1400"/>
-              </a:spcAft>
-            </a:pPr>
-            <a:r>
-              <a:rPr sz="1200" b="1">
-                <a:solidFill>
-                  <a:srgbClr val="26283A"/>
-                </a:solidFill>
-                <a:latin typeface="맑은 고딕"/>
-              </a:rPr>
-              <a:t>●  이벤트 알림 채널 확장(푸시·문자), 클라우드 배포</a:t>
-            </a:r>
-          </a:p>
-        </p:txBody>
-      </p:sp>
-      <p:sp>
-        <p:nvSpPr>
-          <p:cNvPr id="9" name="TextBox 8"/>
-          <p:cNvSpPr txBox="1"/>
-          <p:nvPr/>
-        </p:nvSpPr>
-        <p:spPr>
-          <a:xfrm>
-            <a:off x="6309360" y="1463040"/>
-            <a:ext cx="5394960" cy="320040"/>
-          </a:xfrm>
-          <a:prstGeom prst="rect">
-            <a:avLst/>
-          </a:prstGeom>
-          <a:noFill/>
-        </p:spPr>
-        <p:txBody>
-          <a:bodyPr wrap="square" anchor="t" lIns="0" rIns="0" tIns="0" bIns="0">
-            <a:spAutoFit/>
-          </a:bodyPr>
-          <a:lstStyle/>
-          <a:p>
-            <a:pPr algn="l">
-              <a:lnSpc>
-                <a:spcPct val="115000"/>
-              </a:lnSpc>
-            </a:pPr>
-            <a:r>
-              <a:rPr sz="1350" b="1" i="0">
-                <a:solidFill>
-                  <a:srgbClr val="26283A"/>
-                </a:solidFill>
-                <a:latin typeface="맑은 고딕"/>
-              </a:rPr>
-              <a:t>개인 기여 (1인 프로젝트)</a:t>
-            </a:r>
-          </a:p>
-        </p:txBody>
-      </p:sp>
-      <p:sp>
-        <p:nvSpPr>
-          <p:cNvPr id="10" name="Rounded Rectangle 9"/>
+          <p:cNvPr id="7" name="Rounded Rectangle 6"/>
           <p:cNvSpPr/>
           <p:nvPr/>
         </p:nvSpPr>
         <p:spPr>
           <a:xfrm>
-            <a:off x="6309360" y="1828800"/>
-            <a:ext cx="1737360" cy="1188720"/>
+            <a:off x="502920" y="1600200"/>
+            <a:ext cx="5486400" cy="2240280"/>
           </a:xfrm>
           <a:prstGeom prst="roundRect">
             <a:avLst>
-              <a:gd name="adj" fmla="val 12000"/>
+              <a:gd name="adj" fmla="val 8000"/>
             </a:avLst>
           </a:prstGeom>
           <a:solidFill>
             <a:srgbClr val="FFFFFF"/>
+          </a:solidFill>
+          <a:ln w="12700">
+            <a:solidFill>
+              <a:srgbClr val="DDE1F2"/>
+            </a:solidFill>
+          </a:ln>
+          <a:effectLst/>
+        </p:spPr>
+        <p:style>
+          <a:lnRef idx="1">
+            <a:schemeClr val="accent1"/>
+          </a:lnRef>
+          <a:fillRef idx="3">
+            <a:schemeClr val="accent1"/>
+          </a:fillRef>
+          <a:effectRef idx="2">
+            <a:schemeClr val="accent1"/>
+          </a:effectRef>
+          <a:fontRef idx="minor">
+            <a:schemeClr val="lt1"/>
+          </a:fontRef>
+        </p:style>
+        <p:txBody>
+          <a:bodyPr rtlCol="0" anchor="ctr"/>
+          <a:lstStyle/>
+          <a:p>
+            <a:pPr algn="ctr"/>
+          </a:p>
+        </p:txBody>
+      </p:sp>
+      <p:pic>
+        <p:nvPicPr>
+          <p:cNvPr id="8" name="Picture 7" descr="play.png"/>
+          <p:cNvPicPr>
+            <a:picLocks noChangeAspect="1"/>
+          </p:cNvPicPr>
+          <p:nvPr/>
+        </p:nvPicPr>
+        <p:blipFill>
+          <a:blip r:embed="rId3"/>
+          <a:stretch>
+            <a:fillRect/>
+          </a:stretch>
+        </p:blipFill>
+        <p:spPr>
+          <a:xfrm>
+            <a:off x="822960" y="1920240"/>
+            <a:ext cx="548640" cy="548640"/>
+          </a:xfrm>
+          <a:prstGeom prst="rect">
+            <a:avLst/>
+          </a:prstGeom>
+        </p:spPr>
+      </p:pic>
+      <p:sp>
+        <p:nvSpPr>
+          <p:cNvPr id="9" name="TextBox 8"/>
+          <p:cNvSpPr txBox="1"/>
+          <p:nvPr/>
+        </p:nvSpPr>
+        <p:spPr>
+          <a:xfrm>
+            <a:off x="1554480" y="1892808"/>
+            <a:ext cx="4206240" cy="457200"/>
+          </a:xfrm>
+          <a:prstGeom prst="rect">
+            <a:avLst/>
+          </a:prstGeom>
+          <a:noFill/>
+        </p:spPr>
+        <p:txBody>
+          <a:bodyPr wrap="square" anchor="t" lIns="0" rIns="0" tIns="0" bIns="0">
+            <a:spAutoFit/>
+          </a:bodyPr>
+          <a:lstStyle/>
+          <a:p>
+            <a:pPr algn="l">
+              <a:lnSpc>
+                <a:spcPct val="115000"/>
+              </a:lnSpc>
+            </a:pPr>
+            <a:r>
+              <a:rPr sz="1450" b="1" i="0">
+                <a:solidFill>
+                  <a:srgbClr val="363FC9"/>
+                </a:solidFill>
+                <a:latin typeface="맑은 고딕"/>
+              </a:rPr>
+              <a:t>실시간 RTSP 라이브 연동 실험</a:t>
+            </a:r>
+          </a:p>
+        </p:txBody>
+      </p:sp>
+      <p:sp>
+        <p:nvSpPr>
+          <p:cNvPr id="10" name="TextBox 9"/>
+          <p:cNvSpPr txBox="1"/>
+          <p:nvPr/>
+        </p:nvSpPr>
+        <p:spPr>
+          <a:xfrm>
+            <a:off x="1554480" y="2441448"/>
+            <a:ext cx="4206240" cy="1188720"/>
+          </a:xfrm>
+          <a:prstGeom prst="rect">
+            <a:avLst/>
+          </a:prstGeom>
+          <a:noFill/>
+        </p:spPr>
+        <p:txBody>
+          <a:bodyPr wrap="square" anchor="t" lIns="0" rIns="0" tIns="0" bIns="0">
+            <a:spAutoFit/>
+          </a:bodyPr>
+          <a:lstStyle/>
+          <a:p>
+            <a:pPr algn="l">
+              <a:lnSpc>
+                <a:spcPct val="140000"/>
+              </a:lnSpc>
+            </a:pPr>
+            <a:r>
+              <a:rPr sz="1100" b="0" i="0">
+                <a:solidFill>
+                  <a:srgbClr val="26283A"/>
+                </a:solidFill>
+                <a:latin typeface="맑은 고딕"/>
+              </a:rPr>
+              <a:t>CCTV·드론이 실제로 송출하는 RTSP 스트림을 더미캠과 동일한 분석 경로로 검증</a:t>
+            </a:r>
+          </a:p>
+        </p:txBody>
+      </p:sp>
+      <p:sp>
+        <p:nvSpPr>
+          <p:cNvPr id="11" name="Oval 10"/>
+          <p:cNvSpPr/>
+          <p:nvPr/>
+        </p:nvSpPr>
+        <p:spPr>
+          <a:xfrm>
+            <a:off x="5440680" y="1691640"/>
+            <a:ext cx="457200" cy="457200"/>
+          </a:xfrm>
+          <a:prstGeom prst="ellipse">
+            <a:avLst/>
+          </a:prstGeom>
+          <a:solidFill>
+            <a:srgbClr val="4A55E8"/>
           </a:solidFill>
           <a:ln>
             <a:noFill/>
@@ -15897,109 +16966,188 @@
           </a:fontRef>
         </p:style>
         <p:txBody>
-          <a:bodyPr rtlCol="0" anchor="ctr"/>
+          <a:bodyPr rtlCol="0" anchor="ctr" lIns="0" rIns="0" tIns="0" bIns="0"/>
           <a:lstStyle/>
           <a:p>
             <a:pPr algn="ctr"/>
-          </a:p>
-        </p:txBody>
-      </p:sp>
-      <p:sp>
-        <p:nvSpPr>
-          <p:cNvPr id="11" name="TextBox 10"/>
-          <p:cNvSpPr txBox="1"/>
-          <p:nvPr/>
-        </p:nvSpPr>
-        <p:spPr>
-          <a:xfrm>
-            <a:off x="6309360" y="1965960"/>
-            <a:ext cx="1737360" cy="502920"/>
-          </a:xfrm>
-          <a:prstGeom prst="rect">
-            <a:avLst/>
-          </a:prstGeom>
-          <a:noFill/>
-        </p:spPr>
-        <p:txBody>
-          <a:bodyPr wrap="square" anchor="t" lIns="0" rIns="0" tIns="0" bIns="0">
-            <a:spAutoFit/>
-          </a:bodyPr>
-          <a:lstStyle/>
-          <a:p>
-            <a:pPr algn="ctr">
-              <a:lnSpc>
-                <a:spcPct val="115000"/>
-              </a:lnSpc>
-            </a:pPr>
-            <a:r>
-              <a:rPr sz="2200" b="1" i="0">
-                <a:solidFill>
-                  <a:srgbClr val="4A55E8"/>
-                </a:solidFill>
-                <a:latin typeface="맑은 고딕"/>
-              </a:rPr>
-              <a:t>36개</a:t>
-            </a:r>
-          </a:p>
-        </p:txBody>
-      </p:sp>
-      <p:sp>
-        <p:nvSpPr>
-          <p:cNvPr id="12" name="TextBox 11"/>
-          <p:cNvSpPr txBox="1"/>
-          <p:nvPr/>
-        </p:nvSpPr>
-        <p:spPr>
-          <a:xfrm>
-            <a:off x="6400800" y="2487168"/>
-            <a:ext cx="1554480" cy="457200"/>
-          </a:xfrm>
-          <a:prstGeom prst="rect">
-            <a:avLst/>
-          </a:prstGeom>
-          <a:noFill/>
-        </p:spPr>
-        <p:txBody>
-          <a:bodyPr wrap="square" anchor="t" lIns="0" rIns="0" tIns="0" bIns="0">
-            <a:spAutoFit/>
-          </a:bodyPr>
-          <a:lstStyle/>
-          <a:p>
-            <a:pPr algn="ctr">
-              <a:lnSpc>
-                <a:spcPct val="120000"/>
-              </a:lnSpc>
-            </a:pPr>
-            <a:r>
-              <a:rPr sz="900" b="0" i="0">
-                <a:solidFill>
-                  <a:srgbClr val="8A8EA3"/>
-                </a:solidFill>
-                <a:latin typeface="맑은 고딕"/>
-              </a:rPr>
-              <a:t>API 엔드포인트(전부 구현)</a:t>
-            </a:r>
-          </a:p>
-        </p:txBody>
-      </p:sp>
-      <p:sp>
-        <p:nvSpPr>
-          <p:cNvPr id="13" name="Rounded Rectangle 12"/>
+            <a:r>
+              <a:rPr sz="1400" b="1">
+                <a:solidFill>
+                  <a:srgbClr val="FFFFFF"/>
+                </a:solidFill>
+                <a:latin typeface="맑은 고딕"/>
+              </a:rPr>
+              <a:t>1</a:t>
+            </a:r>
+          </a:p>
+        </p:txBody>
+      </p:sp>
+      <p:sp>
+        <p:nvSpPr>
+          <p:cNvPr id="12" name="Rounded Rectangle 11"/>
           <p:cNvSpPr/>
           <p:nvPr/>
         </p:nvSpPr>
         <p:spPr>
           <a:xfrm>
-            <a:off x="8165592" y="1828800"/>
-            <a:ext cx="1737360" cy="1188720"/>
+            <a:off x="6172200" y="1600200"/>
+            <a:ext cx="5486400" cy="2240280"/>
           </a:xfrm>
           <a:prstGeom prst="roundRect">
             <a:avLst>
-              <a:gd name="adj" fmla="val 12000"/>
+              <a:gd name="adj" fmla="val 8000"/>
             </a:avLst>
           </a:prstGeom>
           <a:solidFill>
             <a:srgbClr val="FFFFFF"/>
+          </a:solidFill>
+          <a:ln w="12700">
+            <a:solidFill>
+              <a:srgbClr val="DDE1F2"/>
+            </a:solidFill>
+          </a:ln>
+          <a:effectLst/>
+        </p:spPr>
+        <p:style>
+          <a:lnRef idx="1">
+            <a:schemeClr val="accent1"/>
+          </a:lnRef>
+          <a:fillRef idx="3">
+            <a:schemeClr val="accent1"/>
+          </a:fillRef>
+          <a:effectRef idx="2">
+            <a:schemeClr val="accent1"/>
+          </a:effectRef>
+          <a:fontRef idx="minor">
+            <a:schemeClr val="lt1"/>
+          </a:fontRef>
+        </p:style>
+        <p:txBody>
+          <a:bodyPr rtlCol="0" anchor="ctr"/>
+          <a:lstStyle/>
+          <a:p>
+            <a:pPr algn="ctr"/>
+          </a:p>
+        </p:txBody>
+      </p:sp>
+      <p:pic>
+        <p:nvPicPr>
+          <p:cNvPr id="13" name="Picture 12" descr="gear.png"/>
+          <p:cNvPicPr>
+            <a:picLocks noChangeAspect="1"/>
+          </p:cNvPicPr>
+          <p:nvPr/>
+        </p:nvPicPr>
+        <p:blipFill>
+          <a:blip r:embed="rId4"/>
+          <a:stretch>
+            <a:fillRect/>
+          </a:stretch>
+        </p:blipFill>
+        <p:spPr>
+          <a:xfrm>
+            <a:off x="6492240" y="1920240"/>
+            <a:ext cx="548640" cy="548640"/>
+          </a:xfrm>
+          <a:prstGeom prst="rect">
+            <a:avLst/>
+          </a:prstGeom>
+        </p:spPr>
+      </p:pic>
+      <p:sp>
+        <p:nvSpPr>
+          <p:cNvPr id="14" name="TextBox 13"/>
+          <p:cNvSpPr txBox="1"/>
+          <p:nvPr/>
+        </p:nvSpPr>
+        <p:spPr>
+          <a:xfrm>
+            <a:off x="7223760" y="1892808"/>
+            <a:ext cx="4206240" cy="457200"/>
+          </a:xfrm>
+          <a:prstGeom prst="rect">
+            <a:avLst/>
+          </a:prstGeom>
+          <a:noFill/>
+        </p:spPr>
+        <p:txBody>
+          <a:bodyPr wrap="square" anchor="t" lIns="0" rIns="0" tIns="0" bIns="0">
+            <a:spAutoFit/>
+          </a:bodyPr>
+          <a:lstStyle/>
+          <a:p>
+            <a:pPr algn="l">
+              <a:lnSpc>
+                <a:spcPct val="115000"/>
+              </a:lnSpc>
+            </a:pPr>
+            <a:r>
+              <a:rPr sz="1450" b="1" i="0">
+                <a:solidFill>
+                  <a:srgbClr val="363FC9"/>
+                </a:solidFill>
+                <a:latin typeface="맑은 고딕"/>
+              </a:rPr>
+              <a:t>잔여 기능 구현</a:t>
+            </a:r>
+          </a:p>
+        </p:txBody>
+      </p:sp>
+      <p:sp>
+        <p:nvSpPr>
+          <p:cNvPr id="15" name="TextBox 14"/>
+          <p:cNvSpPr txBox="1"/>
+          <p:nvPr/>
+        </p:nvSpPr>
+        <p:spPr>
+          <a:xfrm>
+            <a:off x="7223760" y="2441448"/>
+            <a:ext cx="4206240" cy="1188720"/>
+          </a:xfrm>
+          <a:prstGeom prst="rect">
+            <a:avLst/>
+          </a:prstGeom>
+          <a:noFill/>
+        </p:spPr>
+        <p:txBody>
+          <a:bodyPr wrap="square" anchor="t" lIns="0" rIns="0" tIns="0" bIns="0">
+            <a:spAutoFit/>
+          </a:bodyPr>
+          <a:lstStyle/>
+          <a:p>
+            <a:pPr algn="l">
+              <a:lnSpc>
+                <a:spcPct val="140000"/>
+              </a:lnSpc>
+            </a:pPr>
+            <a:r>
+              <a:rPr sz="1100" b="0" i="0">
+                <a:solidFill>
+                  <a:srgbClr val="26283A"/>
+                </a:solidFill>
+                <a:latin typeface="맑은 고딕"/>
+              </a:rPr>
+              <a:t>구역 간 이동 조회(zone_flows 집계), 비밀번호 재설정, 관리자 간 관리 기능</a:t>
+            </a:r>
+          </a:p>
+        </p:txBody>
+      </p:sp>
+      <p:sp>
+        <p:nvSpPr>
+          <p:cNvPr id="16" name="Oval 15"/>
+          <p:cNvSpPr/>
+          <p:nvPr/>
+        </p:nvSpPr>
+        <p:spPr>
+          <a:xfrm>
+            <a:off x="11109960" y="1691640"/>
+            <a:ext cx="457200" cy="457200"/>
+          </a:xfrm>
+          <a:prstGeom prst="ellipse">
+            <a:avLst/>
+          </a:prstGeom>
+          <a:solidFill>
+            <a:srgbClr val="4A55E8"/>
           </a:solidFill>
           <a:ln>
             <a:noFill/>
@@ -16021,109 +17169,188 @@
           </a:fontRef>
         </p:style>
         <p:txBody>
-          <a:bodyPr rtlCol="0" anchor="ctr"/>
+          <a:bodyPr rtlCol="0" anchor="ctr" lIns="0" rIns="0" tIns="0" bIns="0"/>
           <a:lstStyle/>
           <a:p>
             <a:pPr algn="ctr"/>
-          </a:p>
-        </p:txBody>
-      </p:sp>
-      <p:sp>
-        <p:nvSpPr>
-          <p:cNvPr id="14" name="TextBox 13"/>
-          <p:cNvSpPr txBox="1"/>
-          <p:nvPr/>
-        </p:nvSpPr>
-        <p:spPr>
-          <a:xfrm>
-            <a:off x="8165592" y="1965960"/>
-            <a:ext cx="1737360" cy="502920"/>
-          </a:xfrm>
-          <a:prstGeom prst="rect">
-            <a:avLst/>
-          </a:prstGeom>
-          <a:noFill/>
-        </p:spPr>
-        <p:txBody>
-          <a:bodyPr wrap="square" anchor="t" lIns="0" rIns="0" tIns="0" bIns="0">
-            <a:spAutoFit/>
-          </a:bodyPr>
-          <a:lstStyle/>
-          <a:p>
-            <a:pPr algn="ctr">
-              <a:lnSpc>
-                <a:spcPct val="115000"/>
-              </a:lnSpc>
-            </a:pPr>
-            <a:r>
-              <a:rPr sz="2200" b="1" i="0">
-                <a:solidFill>
-                  <a:srgbClr val="4A55E8"/>
-                </a:solidFill>
-                <a:latin typeface="맑은 고딕"/>
-              </a:rPr>
-              <a:t>12개</a:t>
-            </a:r>
-          </a:p>
-        </p:txBody>
-      </p:sp>
-      <p:sp>
-        <p:nvSpPr>
-          <p:cNvPr id="15" name="TextBox 14"/>
-          <p:cNvSpPr txBox="1"/>
-          <p:nvPr/>
-        </p:nvSpPr>
-        <p:spPr>
-          <a:xfrm>
-            <a:off x="8257032" y="2487168"/>
-            <a:ext cx="1554480" cy="457200"/>
-          </a:xfrm>
-          <a:prstGeom prst="rect">
-            <a:avLst/>
-          </a:prstGeom>
-          <a:noFill/>
-        </p:spPr>
-        <p:txBody>
-          <a:bodyPr wrap="square" anchor="t" lIns="0" rIns="0" tIns="0" bIns="0">
-            <a:spAutoFit/>
-          </a:bodyPr>
-          <a:lstStyle/>
-          <a:p>
-            <a:pPr algn="ctr">
-              <a:lnSpc>
-                <a:spcPct val="120000"/>
-              </a:lnSpc>
-            </a:pPr>
-            <a:r>
-              <a:rPr sz="900" b="0" i="0">
-                <a:solidFill>
-                  <a:srgbClr val="8A8EA3"/>
-                </a:solidFill>
-                <a:latin typeface="맑은 고딕"/>
-              </a:rPr>
-              <a:t>DB 테이블 스키마</a:t>
-            </a:r>
-          </a:p>
-        </p:txBody>
-      </p:sp>
-      <p:sp>
-        <p:nvSpPr>
-          <p:cNvPr id="16" name="Rounded Rectangle 15"/>
+            <a:r>
+              <a:rPr sz="1400" b="1">
+                <a:solidFill>
+                  <a:srgbClr val="FFFFFF"/>
+                </a:solidFill>
+                <a:latin typeface="맑은 고딕"/>
+              </a:rPr>
+              <a:t>2</a:t>
+            </a:r>
+          </a:p>
+        </p:txBody>
+      </p:sp>
+      <p:sp>
+        <p:nvSpPr>
+          <p:cNvPr id="17" name="Rounded Rectangle 16"/>
           <p:cNvSpPr/>
           <p:nvPr/>
         </p:nvSpPr>
         <p:spPr>
           <a:xfrm>
-            <a:off x="10021824" y="1828800"/>
-            <a:ext cx="1737360" cy="1188720"/>
+            <a:off x="502920" y="4023360"/>
+            <a:ext cx="5486400" cy="2240280"/>
           </a:xfrm>
           <a:prstGeom prst="roundRect">
             <a:avLst>
-              <a:gd name="adj" fmla="val 12000"/>
+              <a:gd name="adj" fmla="val 8000"/>
             </a:avLst>
           </a:prstGeom>
           <a:solidFill>
             <a:srgbClr val="FFFFFF"/>
+          </a:solidFill>
+          <a:ln w="12700">
+            <a:solidFill>
+              <a:srgbClr val="DDE1F2"/>
+            </a:solidFill>
+          </a:ln>
+          <a:effectLst/>
+        </p:spPr>
+        <p:style>
+          <a:lnRef idx="1">
+            <a:schemeClr val="accent1"/>
+          </a:lnRef>
+          <a:fillRef idx="3">
+            <a:schemeClr val="accent1"/>
+          </a:fillRef>
+          <a:effectRef idx="2">
+            <a:schemeClr val="accent1"/>
+          </a:effectRef>
+          <a:fontRef idx="minor">
+            <a:schemeClr val="lt1"/>
+          </a:fontRef>
+        </p:style>
+        <p:txBody>
+          <a:bodyPr rtlCol="0" anchor="ctr"/>
+          <a:lstStyle/>
+          <a:p>
+            <a:pPr algn="ctr"/>
+          </a:p>
+        </p:txBody>
+      </p:sp>
+      <p:pic>
+        <p:nvPicPr>
+          <p:cNvPr id="18" name="Picture 17" descr="chart_bar.png"/>
+          <p:cNvPicPr>
+            <a:picLocks noChangeAspect="1"/>
+          </p:cNvPicPr>
+          <p:nvPr/>
+        </p:nvPicPr>
+        <p:blipFill>
+          <a:blip r:embed="rId5"/>
+          <a:stretch>
+            <a:fillRect/>
+          </a:stretch>
+        </p:blipFill>
+        <p:spPr>
+          <a:xfrm>
+            <a:off x="822960" y="4343400"/>
+            <a:ext cx="548640" cy="548640"/>
+          </a:xfrm>
+          <a:prstGeom prst="rect">
+            <a:avLst/>
+          </a:prstGeom>
+        </p:spPr>
+      </p:pic>
+      <p:sp>
+        <p:nvSpPr>
+          <p:cNvPr id="19" name="TextBox 18"/>
+          <p:cNvSpPr txBox="1"/>
+          <p:nvPr/>
+        </p:nvSpPr>
+        <p:spPr>
+          <a:xfrm>
+            <a:off x="1554480" y="4315968"/>
+            <a:ext cx="4206240" cy="457200"/>
+          </a:xfrm>
+          <a:prstGeom prst="rect">
+            <a:avLst/>
+          </a:prstGeom>
+          <a:noFill/>
+        </p:spPr>
+        <p:txBody>
+          <a:bodyPr wrap="square" anchor="t" lIns="0" rIns="0" tIns="0" bIns="0">
+            <a:spAutoFit/>
+          </a:bodyPr>
+          <a:lstStyle/>
+          <a:p>
+            <a:pPr algn="l">
+              <a:lnSpc>
+                <a:spcPct val="115000"/>
+              </a:lnSpc>
+            </a:pPr>
+            <a:r>
+              <a:rPr sz="1450" b="1" i="0">
+                <a:solidFill>
+                  <a:srgbClr val="363FC9"/>
+                </a:solidFill>
+                <a:latin typeface="맑은 고딕"/>
+              </a:rPr>
+              <a:t>AI 모델·예측 고도화</a:t>
+            </a:r>
+          </a:p>
+        </p:txBody>
+      </p:sp>
+      <p:sp>
+        <p:nvSpPr>
+          <p:cNvPr id="20" name="TextBox 19"/>
+          <p:cNvSpPr txBox="1"/>
+          <p:nvPr/>
+        </p:nvSpPr>
+        <p:spPr>
+          <a:xfrm>
+            <a:off x="1554480" y="4864608"/>
+            <a:ext cx="4206240" cy="1188720"/>
+          </a:xfrm>
+          <a:prstGeom prst="rect">
+            <a:avLst/>
+          </a:prstGeom>
+          <a:noFill/>
+        </p:spPr>
+        <p:txBody>
+          <a:bodyPr wrap="square" anchor="t" lIns="0" rIns="0" tIns="0" bIns="0">
+            <a:spAutoFit/>
+          </a:bodyPr>
+          <a:lstStyle/>
+          <a:p>
+            <a:pPr algn="l">
+              <a:lnSpc>
+                <a:spcPct val="140000"/>
+              </a:lnSpc>
+            </a:pPr>
+            <a:r>
+              <a:rPr sz="1100" b="0" i="0">
+                <a:solidFill>
+                  <a:srgbClr val="26283A"/>
+                </a:solidFill>
+                <a:latin typeface="맑은 고딕"/>
+              </a:rPr>
+              <a:t>YOLOv8m/l 비교 실험으로 속도·정확도 트레이드오프 재측정, 멀티존 혼잡 예측</a:t>
+            </a:r>
+          </a:p>
+        </p:txBody>
+      </p:sp>
+      <p:sp>
+        <p:nvSpPr>
+          <p:cNvPr id="21" name="Oval 20"/>
+          <p:cNvSpPr/>
+          <p:nvPr/>
+        </p:nvSpPr>
+        <p:spPr>
+          <a:xfrm>
+            <a:off x="5440680" y="4114800"/>
+            <a:ext cx="457200" cy="457200"/>
+          </a:xfrm>
+          <a:prstGeom prst="ellipse">
+            <a:avLst/>
+          </a:prstGeom>
+          <a:solidFill>
+            <a:srgbClr val="4A55E8"/>
           </a:solidFill>
           <a:ln>
             <a:noFill/>
@@ -16145,6 +17372,63 @@
           </a:fontRef>
         </p:style>
         <p:txBody>
+          <a:bodyPr rtlCol="0" anchor="ctr" lIns="0" rIns="0" tIns="0" bIns="0"/>
+          <a:lstStyle/>
+          <a:p>
+            <a:pPr algn="ctr"/>
+            <a:r>
+              <a:rPr sz="1400" b="1">
+                <a:solidFill>
+                  <a:srgbClr val="FFFFFF"/>
+                </a:solidFill>
+                <a:latin typeface="맑은 고딕"/>
+              </a:rPr>
+              <a:t>3</a:t>
+            </a:r>
+          </a:p>
+        </p:txBody>
+      </p:sp>
+      <p:sp>
+        <p:nvSpPr>
+          <p:cNvPr id="22" name="Rounded Rectangle 21"/>
+          <p:cNvSpPr/>
+          <p:nvPr/>
+        </p:nvSpPr>
+        <p:spPr>
+          <a:xfrm>
+            <a:off x="6172200" y="4023360"/>
+            <a:ext cx="5486400" cy="2240280"/>
+          </a:xfrm>
+          <a:prstGeom prst="roundRect">
+            <a:avLst>
+              <a:gd name="adj" fmla="val 8000"/>
+            </a:avLst>
+          </a:prstGeom>
+          <a:solidFill>
+            <a:srgbClr val="FFFFFF"/>
+          </a:solidFill>
+          <a:ln w="12700">
+            <a:solidFill>
+              <a:srgbClr val="DDE1F2"/>
+            </a:solidFill>
+          </a:ln>
+          <a:effectLst/>
+        </p:spPr>
+        <p:style>
+          <a:lnRef idx="1">
+            <a:schemeClr val="accent1"/>
+          </a:lnRef>
+          <a:fillRef idx="3">
+            <a:schemeClr val="accent1"/>
+          </a:fillRef>
+          <a:effectRef idx="2">
+            <a:schemeClr val="accent1"/>
+          </a:effectRef>
+          <a:fontRef idx="minor">
+            <a:schemeClr val="lt1"/>
+          </a:fontRef>
+        </p:style>
+        <p:txBody>
           <a:bodyPr rtlCol="0" anchor="ctr"/>
           <a:lstStyle/>
           <a:p>
@@ -16152,16 +17436,40 @@
           </a:p>
         </p:txBody>
       </p:sp>
-      <p:sp>
-        <p:nvSpPr>
-          <p:cNvPr id="17" name="TextBox 16"/>
-          <p:cNvSpPr txBox="1"/>
-          <p:nvPr/>
-        </p:nvSpPr>
-        <p:spPr>
-          <a:xfrm>
-            <a:off x="10021824" y="1965960"/>
-            <a:ext cx="1737360" cy="502920"/>
+      <p:pic>
+        <p:nvPicPr>
+          <p:cNvPr id="23" name="Picture 22" descr="bell.png"/>
+          <p:cNvPicPr>
+            <a:picLocks noChangeAspect="1"/>
+          </p:cNvPicPr>
+          <p:nvPr/>
+        </p:nvPicPr>
+        <p:blipFill>
+          <a:blip r:embed="rId6"/>
+          <a:stretch>
+            <a:fillRect/>
+          </a:stretch>
+        </p:blipFill>
+        <p:spPr>
+          <a:xfrm>
+            <a:off x="6492240" y="4343400"/>
+            <a:ext cx="548640" cy="548640"/>
+          </a:xfrm>
+          <a:prstGeom prst="rect">
+            <a:avLst/>
+          </a:prstGeom>
+        </p:spPr>
+      </p:pic>
+      <p:sp>
+        <p:nvSpPr>
+          <p:cNvPr id="24" name="TextBox 23"/>
+          <p:cNvSpPr txBox="1"/>
+          <p:nvPr/>
+        </p:nvSpPr>
+        <p:spPr>
+          <a:xfrm>
+            <a:off x="7223760" y="4315968"/>
+            <a:ext cx="4206240" cy="457200"/>
           </a:xfrm>
           <a:prstGeom prst="rect">
             <a:avLst/>
@@ -16174,33 +17482,33 @@
           </a:bodyPr>
           <a:lstStyle/>
           <a:p>
-            <a:pPr algn="ctr">
+            <a:pPr algn="l">
               <a:lnSpc>
                 <a:spcPct val="115000"/>
               </a:lnSpc>
             </a:pPr>
             <a:r>
-              <a:rPr sz="2200" b="1" i="0">
-                <a:solidFill>
-                  <a:srgbClr val="4A55E8"/>
-                </a:solidFill>
-                <a:latin typeface="맑은 고딕"/>
-              </a:rPr>
-              <a:t>11건</a:t>
-            </a:r>
-          </a:p>
-        </p:txBody>
-      </p:sp>
-      <p:sp>
-        <p:nvSpPr>
-          <p:cNvPr id="18" name="TextBox 17"/>
-          <p:cNvSpPr txBox="1"/>
-          <p:nvPr/>
-        </p:nvSpPr>
-        <p:spPr>
-          <a:xfrm>
-            <a:off x="10113264" y="2487168"/>
-            <a:ext cx="1554480" cy="457200"/>
+              <a:rPr sz="1450" b="1" i="0">
+                <a:solidFill>
+                  <a:srgbClr val="363FC9"/>
+                </a:solidFill>
+                <a:latin typeface="맑은 고딕"/>
+              </a:rPr>
+              <a:t>알림·배포 확장</a:t>
+            </a:r>
+          </a:p>
+        </p:txBody>
+      </p:sp>
+      <p:sp>
+        <p:nvSpPr>
+          <p:cNvPr id="25" name="TextBox 24"/>
+          <p:cNvSpPr txBox="1"/>
+          <p:nvPr/>
+        </p:nvSpPr>
+        <p:spPr>
+          <a:xfrm>
+            <a:off x="7223760" y="4864608"/>
+            <a:ext cx="4206240" cy="1188720"/>
           </a:xfrm>
           <a:prstGeom prst="rect">
             <a:avLst/>
@@ -16213,81 +17521,79 @@
           </a:bodyPr>
           <a:lstStyle/>
           <a:p>
-            <a:pPr algn="ctr">
-              <a:lnSpc>
-                <a:spcPct val="120000"/>
-              </a:lnSpc>
-            </a:pPr>
-            <a:r>
-              <a:rPr sz="900" b="0" i="0">
-                <a:solidFill>
-                  <a:srgbClr val="8A8EA3"/>
-                </a:solidFill>
-                <a:latin typeface="맑은 고딕"/>
-              </a:rPr>
-              <a:t>성능버그 재현·수정</a:t>
-            </a:r>
-          </a:p>
-        </p:txBody>
-      </p:sp>
-      <p:sp>
-        <p:nvSpPr>
-          <p:cNvPr id="19" name="TextBox 18"/>
-          <p:cNvSpPr txBox="1"/>
-          <p:nvPr/>
-        </p:nvSpPr>
-        <p:spPr>
-          <a:xfrm>
-            <a:off x="6309360" y="3246120"/>
-            <a:ext cx="5394960" cy="1554480"/>
-          </a:xfrm>
-          <a:prstGeom prst="rect">
-            <a:avLst/>
-          </a:prstGeom>
-          <a:noFill/>
-        </p:spPr>
-        <p:txBody>
-          <a:bodyPr wrap="square" anchor="t" lIns="0" rIns="0" tIns="0" bIns="0">
-            <a:spAutoFit/>
-          </a:bodyPr>
-          <a:lstStyle/>
-          <a:p>
             <a:pPr algn="l">
               <a:lnSpc>
                 <a:spcPct val="140000"/>
               </a:lnSpc>
             </a:pPr>
             <a:r>
-              <a:rPr sz="1050" b="0" i="0">
+              <a:rPr sz="1100" b="0" i="0">
                 <a:solidFill>
                   <a:srgbClr val="26283A"/>
                 </a:solidFill>
                 <a:latin typeface="맑은 고딕"/>
               </a:rPr>
-              <a:t>기획→DB설계→백엔드(Servlet/JDBC→Spring Boot전환)→분석서버→웹→모바일→통합→성능튜닝→문서화까지 전 과정 단독 수행.</a:t>
-            </a:r>
-          </a:p>
-          <a:p>
-            <a:pPr algn="l">
-              <a:lnSpc>
-                <a:spcPct val="140000"/>
-              </a:lnSpc>
-            </a:pPr>
-            <a:r>
-              <a:rPr sz="1050" b="0" i="0">
-                <a:solidFill>
-                  <a:srgbClr val="26283A"/>
-                </a:solidFill>
-                <a:latin typeface="맑은 고딕"/>
-              </a:rPr>
-              <a:t>"curl로 검증돼도 브라우저로는 다르게 보일 수 있다"는 교훈을 직접 겪고 육안 확인 습관을 체득.</a:t>
-            </a:r>
-          </a:p>
-        </p:txBody>
-      </p:sp>
-      <p:sp>
-        <p:nvSpPr>
-          <p:cNvPr id="20" name="TextBox 19"/>
+              <a:t>이벤트 알림 채널 확장(푸시·문자 연동), 클라우드 환경으로 배포</a:t>
+            </a:r>
+          </a:p>
+        </p:txBody>
+      </p:sp>
+      <p:sp>
+        <p:nvSpPr>
+          <p:cNvPr id="26" name="Oval 25"/>
+          <p:cNvSpPr/>
+          <p:nvPr/>
+        </p:nvSpPr>
+        <p:spPr>
+          <a:xfrm>
+            <a:off x="11109960" y="4114800"/>
+            <a:ext cx="457200" cy="457200"/>
+          </a:xfrm>
+          <a:prstGeom prst="ellipse">
+            <a:avLst/>
+          </a:prstGeom>
+          <a:solidFill>
+            <a:srgbClr val="4A55E8"/>
+          </a:solidFill>
+          <a:ln>
+            <a:noFill/>
+          </a:ln>
+          <a:effectLst/>
+        </p:spPr>
+        <p:style>
+          <a:lnRef idx="1">
+            <a:schemeClr val="accent1"/>
+          </a:lnRef>
+          <a:fillRef idx="3">
+            <a:schemeClr val="accent1"/>
+          </a:fillRef>
+          <a:effectRef idx="2">
+            <a:schemeClr val="accent1"/>
+          </a:effectRef>
+          <a:fontRef idx="minor">
+            <a:schemeClr val="lt1"/>
+          </a:fontRef>
+        </p:style>
+        <p:txBody>
+          <a:bodyPr rtlCol="0" anchor="ctr" lIns="0" rIns="0" tIns="0" bIns="0"/>
+          <a:lstStyle/>
+          <a:p>
+            <a:pPr algn="ctr"/>
+            <a:r>
+              <a:rPr sz="1400" b="1">
+                <a:solidFill>
+                  <a:srgbClr val="FFFFFF"/>
+                </a:solidFill>
+                <a:latin typeface="맑은 고딕"/>
+              </a:rPr>
+              <a:t>4</a:t>
+            </a:r>
+          </a:p>
+        </p:txBody>
+      </p:sp>
+      <p:sp>
+        <p:nvSpPr>
+          <p:cNvPr id="27" name="TextBox 26"/>
           <p:cNvSpPr txBox="1"/>
           <p:nvPr/>
         </p:nvSpPr>
@@ -16326,7 +17632,7 @@
       </p:sp>
       <p:sp>
         <p:nvSpPr>
-          <p:cNvPr id="21" name="TextBox 20"/>
+          <p:cNvPr id="28" name="TextBox 27"/>
           <p:cNvSpPr txBox="1"/>
           <p:nvPr/>
         </p:nvSpPr>
@@ -16585,8 +17891,10 @@
           <a:solidFill>
             <a:srgbClr val="FFFFFF"/>
           </a:solidFill>
-          <a:ln>
-            <a:noFill/>
+          <a:ln w="12700">
+            <a:solidFill>
+              <a:srgbClr val="DDE1F2"/>
+            </a:solidFill>
           </a:ln>
           <a:effectLst/>
         </p:spPr>
@@ -16689,8 +17997,10 @@
           <a:solidFill>
             <a:srgbClr val="FFFFFF"/>
           </a:solidFill>
-          <a:ln>
-            <a:noFill/>
+          <a:ln w="12700">
+            <a:solidFill>
+              <a:srgbClr val="DDE1F2"/>
+            </a:solidFill>
           </a:ln>
           <a:effectLst/>
         </p:spPr>
@@ -16793,8 +18103,10 @@
           <a:solidFill>
             <a:srgbClr val="FFFFFF"/>
           </a:solidFill>
-          <a:ln>
-            <a:noFill/>
+          <a:ln w="12700">
+            <a:solidFill>
+              <a:srgbClr val="DDE1F2"/>
+            </a:solidFill>
           </a:ln>
           <a:effectLst/>
         </p:spPr>
@@ -16897,8 +18209,10 @@
           <a:solidFill>
             <a:srgbClr val="FFFFFF"/>
           </a:solidFill>
-          <a:ln>
-            <a:noFill/>
+          <a:ln w="12700">
+            <a:solidFill>
+              <a:srgbClr val="DDE1F2"/>
+            </a:solidFill>
           </a:ln>
           <a:effectLst/>
         </p:spPr>
@@ -17282,8 +18596,10 @@
           <a:solidFill>
             <a:srgbClr val="FFFFFF"/>
           </a:solidFill>
-          <a:ln>
-            <a:noFill/>
+          <a:ln w="12700">
+            <a:solidFill>
+              <a:srgbClr val="DDE1F2"/>
+            </a:solidFill>
           </a:ln>
           <a:effectLst/>
         </p:spPr>
@@ -17386,8 +18702,10 @@
           <a:solidFill>
             <a:srgbClr val="FFFFFF"/>
           </a:solidFill>
-          <a:ln>
-            <a:noFill/>
+          <a:ln w="12700">
+            <a:solidFill>
+              <a:srgbClr val="DDE1F2"/>
+            </a:solidFill>
           </a:ln>
           <a:effectLst/>
         </p:spPr>
@@ -17490,8 +18808,10 @@
           <a:solidFill>
             <a:srgbClr val="FFFFFF"/>
           </a:solidFill>
-          <a:ln>
-            <a:noFill/>
+          <a:ln w="12700">
+            <a:solidFill>
+              <a:srgbClr val="DDE1F2"/>
+            </a:solidFill>
           </a:ln>
           <a:effectLst/>
         </p:spPr>
@@ -17594,8 +18914,10 @@
           <a:solidFill>
             <a:srgbClr val="FFFFFF"/>
           </a:solidFill>
-          <a:ln>
-            <a:noFill/>
+          <a:ln w="12700">
+            <a:solidFill>
+              <a:srgbClr val="DDE1F2"/>
+            </a:solidFill>
           </a:ln>
           <a:effectLst/>
         </p:spPr>
@@ -18413,8 +19735,10 @@
           <a:solidFill>
             <a:srgbClr val="FFFFFF"/>
           </a:solidFill>
-          <a:ln>
-            <a:noFill/>
+          <a:ln w="12700">
+            <a:solidFill>
+              <a:srgbClr val="DDE1F2"/>
+            </a:solidFill>
           </a:ln>
           <a:effectLst/>
         </p:spPr>
@@ -18561,8 +19885,10 @@
           <a:solidFill>
             <a:srgbClr val="FFFFFF"/>
           </a:solidFill>
-          <a:ln>
-            <a:noFill/>
+          <a:ln w="12700">
+            <a:solidFill>
+              <a:srgbClr val="DDE1F2"/>
+            </a:solidFill>
           </a:ln>
           <a:effectLst/>
         </p:spPr>
@@ -18709,8 +20035,10 @@
           <a:solidFill>
             <a:srgbClr val="FFFFFF"/>
           </a:solidFill>
-          <a:ln>
-            <a:noFill/>
+          <a:ln w="12700">
+            <a:solidFill>
+              <a:srgbClr val="DDE1F2"/>
+            </a:solidFill>
           </a:ln>
           <a:effectLst/>
         </p:spPr>
@@ -18857,8 +20185,10 @@
           <a:solidFill>
             <a:srgbClr val="FFFFFF"/>
           </a:solidFill>
-          <a:ln>
-            <a:noFill/>
+          <a:ln w="12700">
+            <a:solidFill>
+              <a:srgbClr val="DDE1F2"/>
+            </a:solidFill>
           </a:ln>
           <a:effectLst/>
         </p:spPr>
@@ -19005,8 +20335,10 @@
           <a:solidFill>
             <a:srgbClr val="FFFFFF"/>
           </a:solidFill>
-          <a:ln>
-            <a:noFill/>
+          <a:ln w="12700">
+            <a:solidFill>
+              <a:srgbClr val="DDE1F2"/>
+            </a:solidFill>
           </a:ln>
           <a:effectLst/>
         </p:spPr>
@@ -19515,8 +20847,10 @@
           <a:solidFill>
             <a:srgbClr val="FFFFFF"/>
           </a:solidFill>
-          <a:ln>
-            <a:noFill/>
+          <a:ln w="12700">
+            <a:solidFill>
+              <a:srgbClr val="DDE1F2"/>
+            </a:solidFill>
           </a:ln>
           <a:effectLst/>
         </p:spPr>
@@ -19778,8 +21112,10 @@
           <a:solidFill>
             <a:srgbClr val="FFFFFF"/>
           </a:solidFill>
-          <a:ln>
-            <a:noFill/>
+          <a:ln w="12700">
+            <a:solidFill>
+              <a:srgbClr val="DDE1F2"/>
+            </a:solidFill>
           </a:ln>
           <a:effectLst/>
         </p:spPr>
@@ -20041,8 +21377,10 @@
           <a:solidFill>
             <a:srgbClr val="FFFFFF"/>
           </a:solidFill>
-          <a:ln>
-            <a:noFill/>
+          <a:ln w="12700">
+            <a:solidFill>
+              <a:srgbClr val="DDE1F2"/>
+            </a:solidFill>
           </a:ln>
           <a:effectLst/>
         </p:spPr>
@@ -20881,18 +22219,20 @@
         <p:spPr>
           <a:xfrm>
             <a:off x="502920" y="1508760"/>
-            <a:ext cx="3657600" cy="3017520"/>
+            <a:ext cx="3657600" cy="3657600"/>
           </a:xfrm>
           <a:prstGeom prst="roundRect">
             <a:avLst>
-              <a:gd name="adj" fmla="val 7000"/>
+              <a:gd name="adj" fmla="val 6000"/>
             </a:avLst>
           </a:prstGeom>
           <a:solidFill>
             <a:srgbClr val="FFFFFF"/>
           </a:solidFill>
-          <a:ln>
-            <a:noFill/>
+          <a:ln w="12700">
+            <a:solidFill>
+              <a:srgbClr val="DDE1F2"/>
+            </a:solidFill>
           </a:ln>
           <a:effectLst/>
         </p:spPr>
@@ -20934,8 +22274,8 @@
         </p:blipFill>
         <p:spPr>
           <a:xfrm>
-            <a:off x="777240" y="1737360"/>
-            <a:ext cx="457200" cy="457200"/>
+            <a:off x="795528" y="1783080"/>
+            <a:ext cx="530352" cy="530352"/>
           </a:xfrm>
           <a:prstGeom prst="rect">
             <a:avLst/>
@@ -20950,8 +22290,8 @@
         </p:nvSpPr>
         <p:spPr>
           <a:xfrm>
-            <a:off x="1371600" y="1783080"/>
-            <a:ext cx="2651760" cy="594360"/>
+            <a:off x="1490472" y="1783080"/>
+            <a:ext cx="2514600" cy="594360"/>
           </a:xfrm>
           <a:prstGeom prst="rect">
             <a:avLst/>
@@ -20970,7 +22310,7 @@
               </a:lnSpc>
             </a:pPr>
             <a:r>
-              <a:rPr sz="1350" b="1" i="0">
+              <a:rPr sz="1400" b="1" i="0">
                 <a:solidFill>
                   <a:srgbClr val="26283A"/>
                 </a:solidFill>
@@ -20983,210 +22323,22 @@
       </p:sp>
       <p:sp>
         <p:nvSpPr>
-          <p:cNvPr id="10" name="TextBox 9"/>
-          <p:cNvSpPr txBox="1"/>
-          <p:nvPr/>
-        </p:nvSpPr>
-        <p:spPr>
-          <a:xfrm>
-            <a:off x="777240" y="2514600"/>
-            <a:ext cx="822960" cy="274320"/>
-          </a:xfrm>
-          <a:prstGeom prst="rect">
-            <a:avLst/>
-          </a:prstGeom>
-          <a:noFill/>
-        </p:spPr>
-        <p:txBody>
-          <a:bodyPr wrap="square" anchor="t" lIns="0" rIns="0" tIns="0" bIns="0">
-            <a:spAutoFit/>
-          </a:bodyPr>
-          <a:lstStyle/>
-          <a:p>
-            <a:pPr algn="l">
-              <a:lnSpc>
-                <a:spcPct val="115000"/>
-              </a:lnSpc>
-            </a:pPr>
-            <a:r>
-              <a:rPr sz="1050" b="1" i="0">
-                <a:solidFill>
-                  <a:srgbClr val="363FC9"/>
-                </a:solidFill>
-                <a:latin typeface="맑은 고딕"/>
-              </a:rPr>
-              <a:t>특징</a:t>
-            </a:r>
-          </a:p>
-        </p:txBody>
-      </p:sp>
-      <p:sp>
-        <p:nvSpPr>
-          <p:cNvPr id="11" name="TextBox 10"/>
-          <p:cNvSpPr txBox="1"/>
-          <p:nvPr/>
-        </p:nvSpPr>
-        <p:spPr>
-          <a:xfrm>
-            <a:off x="777240" y="2788920"/>
-            <a:ext cx="3108960" cy="685800"/>
-          </a:xfrm>
-          <a:prstGeom prst="rect">
-            <a:avLst/>
-          </a:prstGeom>
-          <a:noFill/>
-        </p:spPr>
-        <p:txBody>
-          <a:bodyPr wrap="square" anchor="t" lIns="0" rIns="0" tIns="0" bIns="0">
-            <a:spAutoFit/>
-          </a:bodyPr>
-          <a:lstStyle/>
-          <a:p>
-            <a:pPr algn="l">
-              <a:lnSpc>
-                <a:spcPct val="130000"/>
-              </a:lnSpc>
-            </a:pPr>
-            <a:r>
-              <a:rPr sz="1100" b="0" i="0">
-                <a:solidFill>
-                  <a:srgbClr val="26283A"/>
-                </a:solidFill>
-                <a:latin typeface="맑은 고딕"/>
-              </a:rPr>
-              <a:t>다채널 영상 송출, 사람이</a:t>
-            </a:r>
-          </a:p>
-          <a:p>
-            <a:pPr algn="l">
-              <a:lnSpc>
-                <a:spcPct val="130000"/>
-              </a:lnSpc>
-            </a:pPr>
-            <a:r>
-              <a:rPr sz="1100" b="0" i="0">
-                <a:solidFill>
-                  <a:srgbClr val="26283A"/>
-                </a:solidFill>
-                <a:latin typeface="맑은 고딕"/>
-              </a:rPr>
-              <a:t>직접 상시 감시</a:t>
-            </a:r>
-          </a:p>
-        </p:txBody>
-      </p:sp>
-      <p:sp>
-        <p:nvSpPr>
-          <p:cNvPr id="12" name="TextBox 11"/>
-          <p:cNvSpPr txBox="1"/>
-          <p:nvPr/>
-        </p:nvSpPr>
-        <p:spPr>
-          <a:xfrm>
-            <a:off x="777240" y="3566160"/>
-            <a:ext cx="822960" cy="274320"/>
-          </a:xfrm>
-          <a:prstGeom prst="rect">
-            <a:avLst/>
-          </a:prstGeom>
-          <a:noFill/>
-        </p:spPr>
-        <p:txBody>
-          <a:bodyPr wrap="square" anchor="t" lIns="0" rIns="0" tIns="0" bIns="0">
-            <a:spAutoFit/>
-          </a:bodyPr>
-          <a:lstStyle/>
-          <a:p>
-            <a:pPr algn="l">
-              <a:lnSpc>
-                <a:spcPct val="115000"/>
-              </a:lnSpc>
-            </a:pPr>
-            <a:r>
-              <a:rPr sz="1050" b="1" i="0">
-                <a:solidFill>
-                  <a:srgbClr val="8A8EA3"/>
-                </a:solidFill>
-                <a:latin typeface="맑은 고딕"/>
-              </a:rPr>
-              <a:t>한계</a:t>
-            </a:r>
-          </a:p>
-        </p:txBody>
-      </p:sp>
-      <p:sp>
-        <p:nvSpPr>
-          <p:cNvPr id="13" name="TextBox 12"/>
-          <p:cNvSpPr txBox="1"/>
-          <p:nvPr/>
-        </p:nvSpPr>
-        <p:spPr>
-          <a:xfrm>
-            <a:off x="777240" y="3840480"/>
-            <a:ext cx="3108960" cy="640080"/>
-          </a:xfrm>
-          <a:prstGeom prst="rect">
-            <a:avLst/>
-          </a:prstGeom>
-          <a:noFill/>
-        </p:spPr>
-        <p:txBody>
-          <a:bodyPr wrap="square" anchor="t" lIns="0" rIns="0" tIns="0" bIns="0">
-            <a:spAutoFit/>
-          </a:bodyPr>
-          <a:lstStyle/>
-          <a:p>
-            <a:pPr algn="l">
-              <a:lnSpc>
-                <a:spcPct val="130000"/>
-              </a:lnSpc>
-            </a:pPr>
-            <a:r>
-              <a:rPr sz="1100" b="0" i="0">
-                <a:solidFill>
-                  <a:srgbClr val="8A8EA3"/>
-                </a:solidFill>
-                <a:latin typeface="맑은 고딕"/>
-              </a:rPr>
-              <a:t>인력 투입 필요</a:t>
-            </a:r>
-          </a:p>
-          <a:p>
-            <a:pPr algn="l">
-              <a:lnSpc>
-                <a:spcPct val="130000"/>
-              </a:lnSpc>
-            </a:pPr>
-            <a:r>
-              <a:rPr sz="1100" b="0" i="0">
-                <a:solidFill>
-                  <a:srgbClr val="8A8EA3"/>
-                </a:solidFill>
-                <a:latin typeface="맑은 고딕"/>
-              </a:rPr>
-              <a:t>자동 경고 없음</a:t>
-            </a:r>
-          </a:p>
-        </p:txBody>
-      </p:sp>
-      <p:sp>
-        <p:nvSpPr>
-          <p:cNvPr id="14" name="Rounded Rectangle 13"/>
+          <p:cNvPr id="10" name="Rounded Rectangle 9"/>
           <p:cNvSpPr/>
           <p:nvPr/>
         </p:nvSpPr>
         <p:spPr>
           <a:xfrm>
-            <a:off x="4297680" y="1508760"/>
-            <a:ext cx="3657600" cy="3017520"/>
+            <a:off x="1490472" y="2377440"/>
+            <a:ext cx="1408176" cy="310896"/>
           </a:xfrm>
           <a:prstGeom prst="roundRect">
             <a:avLst>
-              <a:gd name="adj" fmla="val 7000"/>
+              <a:gd name="adj" fmla="val 50000"/>
             </a:avLst>
           </a:prstGeom>
           <a:solidFill>
-            <a:srgbClr val="FFFFFF"/>
+            <a:srgbClr val="F0F1F8"/>
           </a:solidFill>
           <a:ln>
             <a:noFill/>
@@ -21215,9 +22367,324 @@
           </a:p>
         </p:txBody>
       </p:sp>
+      <p:sp>
+        <p:nvSpPr>
+          <p:cNvPr id="11" name="TextBox 10"/>
+          <p:cNvSpPr txBox="1"/>
+          <p:nvPr/>
+        </p:nvSpPr>
+        <p:spPr>
+          <a:xfrm>
+            <a:off x="1490472" y="2377440"/>
+            <a:ext cx="1408176" cy="310896"/>
+          </a:xfrm>
+          <a:prstGeom prst="rect">
+            <a:avLst/>
+          </a:prstGeom>
+          <a:noFill/>
+        </p:spPr>
+        <p:txBody>
+          <a:bodyPr wrap="none" anchor="ctr" lIns="50800" rIns="50800" tIns="0" bIns="0">
+            <a:spAutoFit/>
+          </a:bodyPr>
+          <a:lstStyle/>
+          <a:p>
+            <a:pPr algn="ctr"/>
+            <a:r>
+              <a:rPr sz="950" b="1">
+                <a:solidFill>
+                  <a:srgbClr val="8A8EA3"/>
+                </a:solidFill>
+                <a:latin typeface="맑은 고딕"/>
+              </a:rPr>
+              <a:t>폐쇄형 상시감시</a:t>
+            </a:r>
+          </a:p>
+        </p:txBody>
+      </p:sp>
+      <p:sp>
+        <p:nvSpPr>
+          <p:cNvPr id="12" name="Rectangle 11"/>
+          <p:cNvSpPr/>
+          <p:nvPr/>
+        </p:nvSpPr>
+        <p:spPr>
+          <a:xfrm>
+            <a:off x="795528" y="2926080"/>
+            <a:ext cx="3072384" cy="16510"/>
+          </a:xfrm>
+          <a:prstGeom prst="rect">
+            <a:avLst/>
+          </a:prstGeom>
+          <a:solidFill>
+            <a:srgbClr val="ECEEF6"/>
+          </a:solidFill>
+          <a:ln>
+            <a:noFill/>
+          </a:ln>
+          <a:effectLst/>
+        </p:spPr>
+        <p:style>
+          <a:lnRef idx="1">
+            <a:schemeClr val="accent1"/>
+          </a:lnRef>
+          <a:fillRef idx="3">
+            <a:schemeClr val="accent1"/>
+          </a:fillRef>
+          <a:effectRef idx="2">
+            <a:schemeClr val="accent1"/>
+          </a:effectRef>
+          <a:fontRef idx="minor">
+            <a:schemeClr val="lt1"/>
+          </a:fontRef>
+        </p:style>
+        <p:txBody>
+          <a:bodyPr rtlCol="0" anchor="ctr"/>
+          <a:lstStyle/>
+          <a:p>
+            <a:pPr algn="ctr"/>
+          </a:p>
+        </p:txBody>
+      </p:sp>
+      <p:sp>
+        <p:nvSpPr>
+          <p:cNvPr id="13" name="TextBox 12"/>
+          <p:cNvSpPr txBox="1"/>
+          <p:nvPr/>
+        </p:nvSpPr>
+        <p:spPr>
+          <a:xfrm>
+            <a:off x="795528" y="3108960"/>
+            <a:ext cx="822960" cy="274320"/>
+          </a:xfrm>
+          <a:prstGeom prst="rect">
+            <a:avLst/>
+          </a:prstGeom>
+          <a:noFill/>
+        </p:spPr>
+        <p:txBody>
+          <a:bodyPr wrap="square" anchor="t" lIns="0" rIns="0" tIns="0" bIns="0">
+            <a:spAutoFit/>
+          </a:bodyPr>
+          <a:lstStyle/>
+          <a:p>
+            <a:pPr algn="l">
+              <a:lnSpc>
+                <a:spcPct val="115000"/>
+              </a:lnSpc>
+            </a:pPr>
+            <a:r>
+              <a:rPr sz="1050" b="1" i="0">
+                <a:solidFill>
+                  <a:srgbClr val="363FC9"/>
+                </a:solidFill>
+                <a:latin typeface="맑은 고딕"/>
+              </a:rPr>
+              <a:t>특징</a:t>
+            </a:r>
+          </a:p>
+        </p:txBody>
+      </p:sp>
+      <p:sp>
+        <p:nvSpPr>
+          <p:cNvPr id="14" name="TextBox 13"/>
+          <p:cNvSpPr txBox="1"/>
+          <p:nvPr/>
+        </p:nvSpPr>
+        <p:spPr>
+          <a:xfrm>
+            <a:off x="795528" y="3401568"/>
+            <a:ext cx="3108960" cy="822960"/>
+          </a:xfrm>
+          <a:prstGeom prst="rect">
+            <a:avLst/>
+          </a:prstGeom>
+          <a:noFill/>
+        </p:spPr>
+        <p:txBody>
+          <a:bodyPr wrap="square" anchor="t" lIns="0" rIns="0" tIns="0" bIns="0">
+            <a:spAutoFit/>
+          </a:bodyPr>
+          <a:lstStyle/>
+          <a:p>
+            <a:pPr algn="l">
+              <a:lnSpc>
+                <a:spcPct val="140000"/>
+              </a:lnSpc>
+            </a:pPr>
+            <a:r>
+              <a:rPr sz="1150" b="0" i="0">
+                <a:solidFill>
+                  <a:srgbClr val="26283A"/>
+                </a:solidFill>
+                <a:latin typeface="맑은 고딕"/>
+              </a:rPr>
+              <a:t>다채널 영상 송출, 사람이</a:t>
+            </a:r>
+          </a:p>
+          <a:p>
+            <a:pPr algn="l">
+              <a:lnSpc>
+                <a:spcPct val="140000"/>
+              </a:lnSpc>
+            </a:pPr>
+            <a:r>
+              <a:rPr sz="1150" b="0" i="0">
+                <a:solidFill>
+                  <a:srgbClr val="26283A"/>
+                </a:solidFill>
+                <a:latin typeface="맑은 고딕"/>
+              </a:rPr>
+              <a:t>직접 상시 감시해야 함</a:t>
+            </a:r>
+          </a:p>
+        </p:txBody>
+      </p:sp>
+      <p:sp>
+        <p:nvSpPr>
+          <p:cNvPr id="15" name="TextBox 14"/>
+          <p:cNvSpPr txBox="1"/>
+          <p:nvPr/>
+        </p:nvSpPr>
+        <p:spPr>
+          <a:xfrm>
+            <a:off x="795528" y="4370832"/>
+            <a:ext cx="822960" cy="274320"/>
+          </a:xfrm>
+          <a:prstGeom prst="rect">
+            <a:avLst/>
+          </a:prstGeom>
+          <a:noFill/>
+        </p:spPr>
+        <p:txBody>
+          <a:bodyPr wrap="square" anchor="t" lIns="0" rIns="0" tIns="0" bIns="0">
+            <a:spAutoFit/>
+          </a:bodyPr>
+          <a:lstStyle/>
+          <a:p>
+            <a:pPr algn="l">
+              <a:lnSpc>
+                <a:spcPct val="115000"/>
+              </a:lnSpc>
+            </a:pPr>
+            <a:r>
+              <a:rPr sz="1050" b="1" i="0">
+                <a:solidFill>
+                  <a:srgbClr val="8A8EA3"/>
+                </a:solidFill>
+                <a:latin typeface="맑은 고딕"/>
+              </a:rPr>
+              <a:t>한계</a:t>
+            </a:r>
+          </a:p>
+        </p:txBody>
+      </p:sp>
+      <p:sp>
+        <p:nvSpPr>
+          <p:cNvPr id="16" name="TextBox 15"/>
+          <p:cNvSpPr txBox="1"/>
+          <p:nvPr/>
+        </p:nvSpPr>
+        <p:spPr>
+          <a:xfrm>
+            <a:off x="795528" y="4663440"/>
+            <a:ext cx="3108960" cy="822960"/>
+          </a:xfrm>
+          <a:prstGeom prst="rect">
+            <a:avLst/>
+          </a:prstGeom>
+          <a:noFill/>
+        </p:spPr>
+        <p:txBody>
+          <a:bodyPr wrap="square" anchor="t" lIns="0" rIns="0" tIns="0" bIns="0">
+            <a:spAutoFit/>
+          </a:bodyPr>
+          <a:lstStyle/>
+          <a:p>
+            <a:pPr algn="l">
+              <a:lnSpc>
+                <a:spcPct val="140000"/>
+              </a:lnSpc>
+            </a:pPr>
+            <a:r>
+              <a:rPr sz="1150" b="0" i="0">
+                <a:solidFill>
+                  <a:srgbClr val="8A8EA3"/>
+                </a:solidFill>
+                <a:latin typeface="맑은 고딕"/>
+              </a:rPr>
+              <a:t>인력 투입 필요</a:t>
+            </a:r>
+          </a:p>
+          <a:p>
+            <a:pPr algn="l">
+              <a:lnSpc>
+                <a:spcPct val="140000"/>
+              </a:lnSpc>
+            </a:pPr>
+            <a:r>
+              <a:rPr sz="1150" b="0" i="0">
+                <a:solidFill>
+                  <a:srgbClr val="8A8EA3"/>
+                </a:solidFill>
+                <a:latin typeface="맑은 고딕"/>
+              </a:rPr>
+              <a:t>자동 경고 체계 없음</a:t>
+            </a:r>
+          </a:p>
+        </p:txBody>
+      </p:sp>
+      <p:sp>
+        <p:nvSpPr>
+          <p:cNvPr id="17" name="Rounded Rectangle 16"/>
+          <p:cNvSpPr/>
+          <p:nvPr/>
+        </p:nvSpPr>
+        <p:spPr>
+          <a:xfrm>
+            <a:off x="4297680" y="1508760"/>
+            <a:ext cx="3657600" cy="3657600"/>
+          </a:xfrm>
+          <a:prstGeom prst="roundRect">
+            <a:avLst>
+              <a:gd name="adj" fmla="val 6000"/>
+            </a:avLst>
+          </a:prstGeom>
+          <a:solidFill>
+            <a:srgbClr val="FFFFFF"/>
+          </a:solidFill>
+          <a:ln w="12700">
+            <a:solidFill>
+              <a:srgbClr val="DDE1F2"/>
+            </a:solidFill>
+          </a:ln>
+          <a:effectLst/>
+        </p:spPr>
+        <p:style>
+          <a:lnRef idx="1">
+            <a:schemeClr val="accent1"/>
+          </a:lnRef>
+          <a:fillRef idx="3">
+            <a:schemeClr val="accent1"/>
+          </a:fillRef>
+          <a:effectRef idx="2">
+            <a:schemeClr val="accent1"/>
+          </a:effectRef>
+          <a:fontRef idx="minor">
+            <a:schemeClr val="lt1"/>
+          </a:fontRef>
+        </p:style>
+        <p:txBody>
+          <a:bodyPr rtlCol="0" anchor="ctr"/>
+          <a:lstStyle/>
+          <a:p>
+            <a:pPr algn="ctr"/>
+          </a:p>
+        </p:txBody>
+      </p:sp>
       <p:pic>
         <p:nvPicPr>
-          <p:cNvPr id="15" name="Picture 14" descr="database.png"/>
+          <p:cNvPr id="18" name="Picture 17" descr="database.png"/>
           <p:cNvPicPr>
             <a:picLocks noChangeAspect="1"/>
           </p:cNvPicPr>
@@ -21231,8 +22698,8 @@
         </p:blipFill>
         <p:spPr>
           <a:xfrm>
-            <a:off x="4572000" y="1737360"/>
-            <a:ext cx="457200" cy="457200"/>
+            <a:off x="4590288" y="1783080"/>
+            <a:ext cx="530352" cy="530352"/>
           </a:xfrm>
           <a:prstGeom prst="rect">
             <a:avLst/>
@@ -21241,14 +22708,14 @@
       </p:pic>
       <p:sp>
         <p:nvSpPr>
-          <p:cNvPr id="16" name="TextBox 15"/>
-          <p:cNvSpPr txBox="1"/>
-          <p:nvPr/>
-        </p:nvSpPr>
-        <p:spPr>
-          <a:xfrm>
-            <a:off x="5166360" y="1783080"/>
-            <a:ext cx="2651760" cy="594360"/>
+          <p:cNvPr id="19" name="TextBox 18"/>
+          <p:cNvSpPr txBox="1"/>
+          <p:nvPr/>
+        </p:nvSpPr>
+        <p:spPr>
+          <a:xfrm>
+            <a:off x="5285232" y="1783080"/>
+            <a:ext cx="2514600" cy="594360"/>
           </a:xfrm>
           <a:prstGeom prst="rect">
             <a:avLst/>
@@ -21267,7 +22734,7 @@
               </a:lnSpc>
             </a:pPr>
             <a:r>
-              <a:rPr sz="1350" b="1" i="0">
+              <a:rPr sz="1400" b="1" i="0">
                 <a:solidFill>
                   <a:srgbClr val="26283A"/>
                 </a:solidFill>
@@ -21280,210 +22747,22 @@
       </p:sp>
       <p:sp>
         <p:nvSpPr>
-          <p:cNvPr id="17" name="TextBox 16"/>
-          <p:cNvSpPr txBox="1"/>
-          <p:nvPr/>
-        </p:nvSpPr>
-        <p:spPr>
-          <a:xfrm>
-            <a:off x="4572000" y="2514600"/>
-            <a:ext cx="822960" cy="274320"/>
-          </a:xfrm>
-          <a:prstGeom prst="rect">
-            <a:avLst/>
-          </a:prstGeom>
-          <a:noFill/>
-        </p:spPr>
-        <p:txBody>
-          <a:bodyPr wrap="square" anchor="t" lIns="0" rIns="0" tIns="0" bIns="0">
-            <a:spAutoFit/>
-          </a:bodyPr>
-          <a:lstStyle/>
-          <a:p>
-            <a:pPr algn="l">
-              <a:lnSpc>
-                <a:spcPct val="115000"/>
-              </a:lnSpc>
-            </a:pPr>
-            <a:r>
-              <a:rPr sz="1050" b="1" i="0">
-                <a:solidFill>
-                  <a:srgbClr val="363FC9"/>
-                </a:solidFill>
-                <a:latin typeface="맑은 고딕"/>
-              </a:rPr>
-              <a:t>특징</a:t>
-            </a:r>
-          </a:p>
-        </p:txBody>
-      </p:sp>
-      <p:sp>
-        <p:nvSpPr>
-          <p:cNvPr id="18" name="TextBox 17"/>
-          <p:cNvSpPr txBox="1"/>
-          <p:nvPr/>
-        </p:nvSpPr>
-        <p:spPr>
-          <a:xfrm>
-            <a:off x="4572000" y="2788920"/>
-            <a:ext cx="3108960" cy="685800"/>
-          </a:xfrm>
-          <a:prstGeom prst="rect">
-            <a:avLst/>
-          </a:prstGeom>
-          <a:noFill/>
-        </p:spPr>
-        <p:txBody>
-          <a:bodyPr wrap="square" anchor="t" lIns="0" rIns="0" tIns="0" bIns="0">
-            <a:spAutoFit/>
-          </a:bodyPr>
-          <a:lstStyle/>
-          <a:p>
-            <a:pPr algn="l">
-              <a:lnSpc>
-                <a:spcPct val="130000"/>
-              </a:lnSpc>
-            </a:pPr>
-            <a:r>
-              <a:rPr sz="1100" b="0" i="0">
-                <a:solidFill>
-                  <a:srgbClr val="26283A"/>
-                </a:solidFill>
-                <a:latin typeface="맑은 고딕"/>
-              </a:rPr>
-              <a:t>Shinobi·ZoneMinder 등</a:t>
-            </a:r>
-          </a:p>
-          <a:p>
-            <a:pPr algn="l">
-              <a:lnSpc>
-                <a:spcPct val="130000"/>
-              </a:lnSpc>
-            </a:pPr>
-            <a:r>
-              <a:rPr sz="1100" b="0" i="0">
-                <a:solidFill>
-                  <a:srgbClr val="26283A"/>
-                </a:solidFill>
-                <a:latin typeface="맑은 고딕"/>
-              </a:rPr>
-              <a:t>녹화·모션감지 특화</a:t>
-            </a:r>
-          </a:p>
-        </p:txBody>
-      </p:sp>
-      <p:sp>
-        <p:nvSpPr>
-          <p:cNvPr id="19" name="TextBox 18"/>
-          <p:cNvSpPr txBox="1"/>
-          <p:nvPr/>
-        </p:nvSpPr>
-        <p:spPr>
-          <a:xfrm>
-            <a:off x="4572000" y="3566160"/>
-            <a:ext cx="822960" cy="274320"/>
-          </a:xfrm>
-          <a:prstGeom prst="rect">
-            <a:avLst/>
-          </a:prstGeom>
-          <a:noFill/>
-        </p:spPr>
-        <p:txBody>
-          <a:bodyPr wrap="square" anchor="t" lIns="0" rIns="0" tIns="0" bIns="0">
-            <a:spAutoFit/>
-          </a:bodyPr>
-          <a:lstStyle/>
-          <a:p>
-            <a:pPr algn="l">
-              <a:lnSpc>
-                <a:spcPct val="115000"/>
-              </a:lnSpc>
-            </a:pPr>
-            <a:r>
-              <a:rPr sz="1050" b="1" i="0">
-                <a:solidFill>
-                  <a:srgbClr val="F28A3C"/>
-                </a:solidFill>
-                <a:latin typeface="맑은 고딕"/>
-              </a:rPr>
-              <a:t>한계</a:t>
-            </a:r>
-          </a:p>
-        </p:txBody>
-      </p:sp>
-      <p:sp>
-        <p:nvSpPr>
-          <p:cNvPr id="20" name="TextBox 19"/>
-          <p:cNvSpPr txBox="1"/>
-          <p:nvPr/>
-        </p:nvSpPr>
-        <p:spPr>
-          <a:xfrm>
-            <a:off x="4572000" y="3840480"/>
-            <a:ext cx="3108960" cy="640080"/>
-          </a:xfrm>
-          <a:prstGeom prst="rect">
-            <a:avLst/>
-          </a:prstGeom>
-          <a:noFill/>
-        </p:spPr>
-        <p:txBody>
-          <a:bodyPr wrap="square" anchor="t" lIns="0" rIns="0" tIns="0" bIns="0">
-            <a:spAutoFit/>
-          </a:bodyPr>
-          <a:lstStyle/>
-          <a:p>
-            <a:pPr algn="l">
-              <a:lnSpc>
-                <a:spcPct val="130000"/>
-              </a:lnSpc>
-            </a:pPr>
-            <a:r>
-              <a:rPr sz="1100" b="0" i="0">
-                <a:solidFill>
-                  <a:srgbClr val="F28A3C"/>
-                </a:solidFill>
-                <a:latin typeface="맑은 고딕"/>
-              </a:rPr>
-              <a:t>AI 인원·밀집도</a:t>
-            </a:r>
-          </a:p>
-          <a:p>
-            <a:pPr algn="l">
-              <a:lnSpc>
-                <a:spcPct val="130000"/>
-              </a:lnSpc>
-            </a:pPr>
-            <a:r>
-              <a:rPr sz="1100" b="0" i="0">
-                <a:solidFill>
-                  <a:srgbClr val="F28A3C"/>
-                </a:solidFill>
-                <a:latin typeface="맑은 고딕"/>
-              </a:rPr>
-              <a:t>분석 기능 없음</a:t>
-            </a:r>
-          </a:p>
-        </p:txBody>
-      </p:sp>
-      <p:sp>
-        <p:nvSpPr>
-          <p:cNvPr id="21" name="Rounded Rectangle 20"/>
+          <p:cNvPr id="20" name="Rounded Rectangle 19"/>
           <p:cNvSpPr/>
           <p:nvPr/>
         </p:nvSpPr>
         <p:spPr>
           <a:xfrm>
-            <a:off x="8092440" y="1508760"/>
-            <a:ext cx="3657600" cy="3017520"/>
+            <a:off x="5285232" y="2377440"/>
+            <a:ext cx="1289304" cy="310896"/>
           </a:xfrm>
           <a:prstGeom prst="roundRect">
             <a:avLst>
-              <a:gd name="adj" fmla="val 7000"/>
+              <a:gd name="adj" fmla="val 50000"/>
             </a:avLst>
           </a:prstGeom>
           <a:solidFill>
-            <a:srgbClr val="FFFFFF"/>
+            <a:srgbClr val="F0F1F8"/>
           </a:solidFill>
           <a:ln>
             <a:noFill/>
@@ -21512,9 +22791,324 @@
           </a:p>
         </p:txBody>
       </p:sp>
+      <p:sp>
+        <p:nvSpPr>
+          <p:cNvPr id="21" name="TextBox 20"/>
+          <p:cNvSpPr txBox="1"/>
+          <p:nvPr/>
+        </p:nvSpPr>
+        <p:spPr>
+          <a:xfrm>
+            <a:off x="5285232" y="2377440"/>
+            <a:ext cx="1289304" cy="310896"/>
+          </a:xfrm>
+          <a:prstGeom prst="rect">
+            <a:avLst/>
+          </a:prstGeom>
+          <a:noFill/>
+        </p:spPr>
+        <p:txBody>
+          <a:bodyPr wrap="none" anchor="ctr" lIns="50800" rIns="50800" tIns="0" bIns="0">
+            <a:spAutoFit/>
+          </a:bodyPr>
+          <a:lstStyle/>
+          <a:p>
+            <a:pPr algn="ctr"/>
+            <a:r>
+              <a:rPr sz="950" b="1">
+                <a:solidFill>
+                  <a:srgbClr val="8A8EA3"/>
+                </a:solidFill>
+                <a:latin typeface="맑은 고딕"/>
+              </a:rPr>
+              <a:t>녹화·모션감지</a:t>
+            </a:r>
+          </a:p>
+        </p:txBody>
+      </p:sp>
+      <p:sp>
+        <p:nvSpPr>
+          <p:cNvPr id="22" name="Rectangle 21"/>
+          <p:cNvSpPr/>
+          <p:nvPr/>
+        </p:nvSpPr>
+        <p:spPr>
+          <a:xfrm>
+            <a:off x="4590288" y="2926080"/>
+            <a:ext cx="3072384" cy="16510"/>
+          </a:xfrm>
+          <a:prstGeom prst="rect">
+            <a:avLst/>
+          </a:prstGeom>
+          <a:solidFill>
+            <a:srgbClr val="ECEEF6"/>
+          </a:solidFill>
+          <a:ln>
+            <a:noFill/>
+          </a:ln>
+          <a:effectLst/>
+        </p:spPr>
+        <p:style>
+          <a:lnRef idx="1">
+            <a:schemeClr val="accent1"/>
+          </a:lnRef>
+          <a:fillRef idx="3">
+            <a:schemeClr val="accent1"/>
+          </a:fillRef>
+          <a:effectRef idx="2">
+            <a:schemeClr val="accent1"/>
+          </a:effectRef>
+          <a:fontRef idx="minor">
+            <a:schemeClr val="lt1"/>
+          </a:fontRef>
+        </p:style>
+        <p:txBody>
+          <a:bodyPr rtlCol="0" anchor="ctr"/>
+          <a:lstStyle/>
+          <a:p>
+            <a:pPr algn="ctr"/>
+          </a:p>
+        </p:txBody>
+      </p:sp>
+      <p:sp>
+        <p:nvSpPr>
+          <p:cNvPr id="23" name="TextBox 22"/>
+          <p:cNvSpPr txBox="1"/>
+          <p:nvPr/>
+        </p:nvSpPr>
+        <p:spPr>
+          <a:xfrm>
+            <a:off x="4590288" y="3108960"/>
+            <a:ext cx="822960" cy="274320"/>
+          </a:xfrm>
+          <a:prstGeom prst="rect">
+            <a:avLst/>
+          </a:prstGeom>
+          <a:noFill/>
+        </p:spPr>
+        <p:txBody>
+          <a:bodyPr wrap="square" anchor="t" lIns="0" rIns="0" tIns="0" bIns="0">
+            <a:spAutoFit/>
+          </a:bodyPr>
+          <a:lstStyle/>
+          <a:p>
+            <a:pPr algn="l">
+              <a:lnSpc>
+                <a:spcPct val="115000"/>
+              </a:lnSpc>
+            </a:pPr>
+            <a:r>
+              <a:rPr sz="1050" b="1" i="0">
+                <a:solidFill>
+                  <a:srgbClr val="363FC9"/>
+                </a:solidFill>
+                <a:latin typeface="맑은 고딕"/>
+              </a:rPr>
+              <a:t>특징</a:t>
+            </a:r>
+          </a:p>
+        </p:txBody>
+      </p:sp>
+      <p:sp>
+        <p:nvSpPr>
+          <p:cNvPr id="24" name="TextBox 23"/>
+          <p:cNvSpPr txBox="1"/>
+          <p:nvPr/>
+        </p:nvSpPr>
+        <p:spPr>
+          <a:xfrm>
+            <a:off x="4590288" y="3401568"/>
+            <a:ext cx="3108960" cy="822960"/>
+          </a:xfrm>
+          <a:prstGeom prst="rect">
+            <a:avLst/>
+          </a:prstGeom>
+          <a:noFill/>
+        </p:spPr>
+        <p:txBody>
+          <a:bodyPr wrap="square" anchor="t" lIns="0" rIns="0" tIns="0" bIns="0">
+            <a:spAutoFit/>
+          </a:bodyPr>
+          <a:lstStyle/>
+          <a:p>
+            <a:pPr algn="l">
+              <a:lnSpc>
+                <a:spcPct val="140000"/>
+              </a:lnSpc>
+            </a:pPr>
+            <a:r>
+              <a:rPr sz="1150" b="0" i="0">
+                <a:solidFill>
+                  <a:srgbClr val="26283A"/>
+                </a:solidFill>
+                <a:latin typeface="맑은 고딕"/>
+              </a:rPr>
+              <a:t>Shinobi·ZoneMinder 등</a:t>
+            </a:r>
+          </a:p>
+          <a:p>
+            <a:pPr algn="l">
+              <a:lnSpc>
+                <a:spcPct val="140000"/>
+              </a:lnSpc>
+            </a:pPr>
+            <a:r>
+              <a:rPr sz="1150" b="0" i="0">
+                <a:solidFill>
+                  <a:srgbClr val="26283A"/>
+                </a:solidFill>
+                <a:latin typeface="맑은 고딕"/>
+              </a:rPr>
+              <a:t>녹화·모션감지에 특화</a:t>
+            </a:r>
+          </a:p>
+        </p:txBody>
+      </p:sp>
+      <p:sp>
+        <p:nvSpPr>
+          <p:cNvPr id="25" name="TextBox 24"/>
+          <p:cNvSpPr txBox="1"/>
+          <p:nvPr/>
+        </p:nvSpPr>
+        <p:spPr>
+          <a:xfrm>
+            <a:off x="4590288" y="4370832"/>
+            <a:ext cx="822960" cy="274320"/>
+          </a:xfrm>
+          <a:prstGeom prst="rect">
+            <a:avLst/>
+          </a:prstGeom>
+          <a:noFill/>
+        </p:spPr>
+        <p:txBody>
+          <a:bodyPr wrap="square" anchor="t" lIns="0" rIns="0" tIns="0" bIns="0">
+            <a:spAutoFit/>
+          </a:bodyPr>
+          <a:lstStyle/>
+          <a:p>
+            <a:pPr algn="l">
+              <a:lnSpc>
+                <a:spcPct val="115000"/>
+              </a:lnSpc>
+            </a:pPr>
+            <a:r>
+              <a:rPr sz="1050" b="1" i="0">
+                <a:solidFill>
+                  <a:srgbClr val="F28A3C"/>
+                </a:solidFill>
+                <a:latin typeface="맑은 고딕"/>
+              </a:rPr>
+              <a:t>한계</a:t>
+            </a:r>
+          </a:p>
+        </p:txBody>
+      </p:sp>
+      <p:sp>
+        <p:nvSpPr>
+          <p:cNvPr id="26" name="TextBox 25"/>
+          <p:cNvSpPr txBox="1"/>
+          <p:nvPr/>
+        </p:nvSpPr>
+        <p:spPr>
+          <a:xfrm>
+            <a:off x="4590288" y="4663440"/>
+            <a:ext cx="3108960" cy="822960"/>
+          </a:xfrm>
+          <a:prstGeom prst="rect">
+            <a:avLst/>
+          </a:prstGeom>
+          <a:noFill/>
+        </p:spPr>
+        <p:txBody>
+          <a:bodyPr wrap="square" anchor="t" lIns="0" rIns="0" tIns="0" bIns="0">
+            <a:spAutoFit/>
+          </a:bodyPr>
+          <a:lstStyle/>
+          <a:p>
+            <a:pPr algn="l">
+              <a:lnSpc>
+                <a:spcPct val="140000"/>
+              </a:lnSpc>
+            </a:pPr>
+            <a:r>
+              <a:rPr sz="1150" b="0" i="0">
+                <a:solidFill>
+                  <a:srgbClr val="F28A3C"/>
+                </a:solidFill>
+                <a:latin typeface="맑은 고딕"/>
+              </a:rPr>
+              <a:t>AI 기반 인원·밀집도</a:t>
+            </a:r>
+          </a:p>
+          <a:p>
+            <a:pPr algn="l">
+              <a:lnSpc>
+                <a:spcPct val="140000"/>
+              </a:lnSpc>
+            </a:pPr>
+            <a:r>
+              <a:rPr sz="1150" b="0" i="0">
+                <a:solidFill>
+                  <a:srgbClr val="F28A3C"/>
+                </a:solidFill>
+                <a:latin typeface="맑은 고딕"/>
+              </a:rPr>
+              <a:t>분석 기능 자체가 없음</a:t>
+            </a:r>
+          </a:p>
+        </p:txBody>
+      </p:sp>
+      <p:sp>
+        <p:nvSpPr>
+          <p:cNvPr id="27" name="Rounded Rectangle 26"/>
+          <p:cNvSpPr/>
+          <p:nvPr/>
+        </p:nvSpPr>
+        <p:spPr>
+          <a:xfrm>
+            <a:off x="8092440" y="1508760"/>
+            <a:ext cx="3657600" cy="3657600"/>
+          </a:xfrm>
+          <a:prstGeom prst="roundRect">
+            <a:avLst>
+              <a:gd name="adj" fmla="val 6000"/>
+            </a:avLst>
+          </a:prstGeom>
+          <a:solidFill>
+            <a:srgbClr val="FFFFFF"/>
+          </a:solidFill>
+          <a:ln w="12700">
+            <a:solidFill>
+              <a:srgbClr val="DDE1F2"/>
+            </a:solidFill>
+          </a:ln>
+          <a:effectLst/>
+        </p:spPr>
+        <p:style>
+          <a:lnRef idx="1">
+            <a:schemeClr val="accent1"/>
+          </a:lnRef>
+          <a:fillRef idx="3">
+            <a:schemeClr val="accent1"/>
+          </a:fillRef>
+          <a:effectRef idx="2">
+            <a:schemeClr val="accent1"/>
+          </a:effectRef>
+          <a:fontRef idx="minor">
+            <a:schemeClr val="lt1"/>
+          </a:fontRef>
+        </p:style>
+        <p:txBody>
+          <a:bodyPr rtlCol="0" anchor="ctr"/>
+          <a:lstStyle/>
+          <a:p>
+            <a:pPr algn="ctr"/>
+          </a:p>
+        </p:txBody>
+      </p:sp>
       <p:pic>
         <p:nvPicPr>
-          <p:cNvPr id="22" name="Picture 21" descr="gear.png"/>
+          <p:cNvPr id="28" name="Picture 27" descr="gear.png"/>
           <p:cNvPicPr>
             <a:picLocks noChangeAspect="1"/>
           </p:cNvPicPr>
@@ -21528,7 +23122,431 @@
         </p:blipFill>
         <p:spPr>
           <a:xfrm>
-            <a:off x="8366760" y="1737360"/>
+            <a:off x="8385048" y="1783080"/>
+            <a:ext cx="530352" cy="530352"/>
+          </a:xfrm>
+          <a:prstGeom prst="rect">
+            <a:avLst/>
+          </a:prstGeom>
+        </p:spPr>
+      </p:pic>
+      <p:sp>
+        <p:nvSpPr>
+          <p:cNvPr id="29" name="TextBox 28"/>
+          <p:cNvSpPr txBox="1"/>
+          <p:nvPr/>
+        </p:nvSpPr>
+        <p:spPr>
+          <a:xfrm>
+            <a:off x="9079992" y="1783080"/>
+            <a:ext cx="2514600" cy="594360"/>
+          </a:xfrm>
+          <a:prstGeom prst="rect">
+            <a:avLst/>
+          </a:prstGeom>
+          <a:noFill/>
+        </p:spPr>
+        <p:txBody>
+          <a:bodyPr wrap="square" anchor="t" lIns="0" rIns="0" tIns="0" bIns="0">
+            <a:spAutoFit/>
+          </a:bodyPr>
+          <a:lstStyle/>
+          <a:p>
+            <a:pPr algn="l">
+              <a:lnSpc>
+                <a:spcPct val="115000"/>
+              </a:lnSpc>
+            </a:pPr>
+            <a:r>
+              <a:rPr sz="1400" b="1" i="0">
+                <a:solidFill>
+                  <a:srgbClr val="26283A"/>
+                </a:solidFill>
+                <a:latin typeface="맑은 고딕"/>
+              </a:rPr>
+              <a:t>상용 AI 인원계수 솔루션</a:t>
+            </a:r>
+          </a:p>
+        </p:txBody>
+      </p:sp>
+      <p:sp>
+        <p:nvSpPr>
+          <p:cNvPr id="30" name="Rounded Rectangle 29"/>
+          <p:cNvSpPr/>
+          <p:nvPr/>
+        </p:nvSpPr>
+        <p:spPr>
+          <a:xfrm>
+            <a:off x="9079992" y="2377440"/>
+            <a:ext cx="1645920" cy="310896"/>
+          </a:xfrm>
+          <a:prstGeom prst="roundRect">
+            <a:avLst>
+              <a:gd name="adj" fmla="val 50000"/>
+            </a:avLst>
+          </a:prstGeom>
+          <a:solidFill>
+            <a:srgbClr val="F0F1F8"/>
+          </a:solidFill>
+          <a:ln>
+            <a:noFill/>
+          </a:ln>
+          <a:effectLst/>
+        </p:spPr>
+        <p:style>
+          <a:lnRef idx="1">
+            <a:schemeClr val="accent1"/>
+          </a:lnRef>
+          <a:fillRef idx="3">
+            <a:schemeClr val="accent1"/>
+          </a:fillRef>
+          <a:effectRef idx="2">
+            <a:schemeClr val="accent1"/>
+          </a:effectRef>
+          <a:fontRef idx="minor">
+            <a:schemeClr val="lt1"/>
+          </a:fontRef>
+        </p:style>
+        <p:txBody>
+          <a:bodyPr rtlCol="0" anchor="ctr"/>
+          <a:lstStyle/>
+          <a:p>
+            <a:pPr algn="ctr"/>
+          </a:p>
+        </p:txBody>
+      </p:sp>
+      <p:sp>
+        <p:nvSpPr>
+          <p:cNvPr id="31" name="TextBox 30"/>
+          <p:cNvSpPr txBox="1"/>
+          <p:nvPr/>
+        </p:nvSpPr>
+        <p:spPr>
+          <a:xfrm>
+            <a:off x="9079992" y="2377440"/>
+            <a:ext cx="1645920" cy="310896"/>
+          </a:xfrm>
+          <a:prstGeom prst="rect">
+            <a:avLst/>
+          </a:prstGeom>
+          <a:noFill/>
+        </p:spPr>
+        <p:txBody>
+          <a:bodyPr wrap="none" anchor="ctr" lIns="50800" rIns="50800" tIns="0" bIns="0">
+            <a:spAutoFit/>
+          </a:bodyPr>
+          <a:lstStyle/>
+          <a:p>
+            <a:pPr algn="ctr"/>
+            <a:r>
+              <a:rPr sz="950" b="1">
+                <a:solidFill>
+                  <a:srgbClr val="8A8EA3"/>
+                </a:solidFill>
+                <a:latin typeface="맑은 고딕"/>
+              </a:rPr>
+              <a:t>폐쇄형 고가 패키지</a:t>
+            </a:r>
+          </a:p>
+        </p:txBody>
+      </p:sp>
+      <p:sp>
+        <p:nvSpPr>
+          <p:cNvPr id="32" name="Rectangle 31"/>
+          <p:cNvSpPr/>
+          <p:nvPr/>
+        </p:nvSpPr>
+        <p:spPr>
+          <a:xfrm>
+            <a:off x="8385048" y="2926080"/>
+            <a:ext cx="3072384" cy="16510"/>
+          </a:xfrm>
+          <a:prstGeom prst="rect">
+            <a:avLst/>
+          </a:prstGeom>
+          <a:solidFill>
+            <a:srgbClr val="ECEEF6"/>
+          </a:solidFill>
+          <a:ln>
+            <a:noFill/>
+          </a:ln>
+          <a:effectLst/>
+        </p:spPr>
+        <p:style>
+          <a:lnRef idx="1">
+            <a:schemeClr val="accent1"/>
+          </a:lnRef>
+          <a:fillRef idx="3">
+            <a:schemeClr val="accent1"/>
+          </a:fillRef>
+          <a:effectRef idx="2">
+            <a:schemeClr val="accent1"/>
+          </a:effectRef>
+          <a:fontRef idx="minor">
+            <a:schemeClr val="lt1"/>
+          </a:fontRef>
+        </p:style>
+        <p:txBody>
+          <a:bodyPr rtlCol="0" anchor="ctr"/>
+          <a:lstStyle/>
+          <a:p>
+            <a:pPr algn="ctr"/>
+          </a:p>
+        </p:txBody>
+      </p:sp>
+      <p:sp>
+        <p:nvSpPr>
+          <p:cNvPr id="33" name="TextBox 32"/>
+          <p:cNvSpPr txBox="1"/>
+          <p:nvPr/>
+        </p:nvSpPr>
+        <p:spPr>
+          <a:xfrm>
+            <a:off x="8385048" y="3108960"/>
+            <a:ext cx="822960" cy="274320"/>
+          </a:xfrm>
+          <a:prstGeom prst="rect">
+            <a:avLst/>
+          </a:prstGeom>
+          <a:noFill/>
+        </p:spPr>
+        <p:txBody>
+          <a:bodyPr wrap="square" anchor="t" lIns="0" rIns="0" tIns="0" bIns="0">
+            <a:spAutoFit/>
+          </a:bodyPr>
+          <a:lstStyle/>
+          <a:p>
+            <a:pPr algn="l">
+              <a:lnSpc>
+                <a:spcPct val="115000"/>
+              </a:lnSpc>
+            </a:pPr>
+            <a:r>
+              <a:rPr sz="1050" b="1" i="0">
+                <a:solidFill>
+                  <a:srgbClr val="363FC9"/>
+                </a:solidFill>
+                <a:latin typeface="맑은 고딕"/>
+              </a:rPr>
+              <a:t>특징</a:t>
+            </a:r>
+          </a:p>
+        </p:txBody>
+      </p:sp>
+      <p:sp>
+        <p:nvSpPr>
+          <p:cNvPr id="34" name="TextBox 33"/>
+          <p:cNvSpPr txBox="1"/>
+          <p:nvPr/>
+        </p:nvSpPr>
+        <p:spPr>
+          <a:xfrm>
+            <a:off x="8385048" y="3401568"/>
+            <a:ext cx="3108960" cy="822960"/>
+          </a:xfrm>
+          <a:prstGeom prst="rect">
+            <a:avLst/>
+          </a:prstGeom>
+          <a:noFill/>
+        </p:spPr>
+        <p:txBody>
+          <a:bodyPr wrap="square" anchor="t" lIns="0" rIns="0" tIns="0" bIns="0">
+            <a:spAutoFit/>
+          </a:bodyPr>
+          <a:lstStyle/>
+          <a:p>
+            <a:pPr algn="l">
+              <a:lnSpc>
+                <a:spcPct val="140000"/>
+              </a:lnSpc>
+            </a:pPr>
+            <a:r>
+              <a:rPr sz="1150" b="0" i="0">
+                <a:solidFill>
+                  <a:srgbClr val="26283A"/>
+                </a:solidFill>
+                <a:latin typeface="맑은 고딕"/>
+              </a:rPr>
+              <a:t>고정밀 카운팅,</a:t>
+            </a:r>
+          </a:p>
+          <a:p>
+            <a:pPr algn="l">
+              <a:lnSpc>
+                <a:spcPct val="140000"/>
+              </a:lnSpc>
+            </a:pPr>
+            <a:r>
+              <a:rPr sz="1150" b="0" i="0">
+                <a:solidFill>
+                  <a:srgbClr val="26283A"/>
+                </a:solidFill>
+                <a:latin typeface="맑은 고딕"/>
+              </a:rPr>
+              <a:t>통합 관제 플랫폼 제공</a:t>
+            </a:r>
+          </a:p>
+        </p:txBody>
+      </p:sp>
+      <p:sp>
+        <p:nvSpPr>
+          <p:cNvPr id="35" name="TextBox 34"/>
+          <p:cNvSpPr txBox="1"/>
+          <p:nvPr/>
+        </p:nvSpPr>
+        <p:spPr>
+          <a:xfrm>
+            <a:off x="8385048" y="4370832"/>
+            <a:ext cx="822960" cy="274320"/>
+          </a:xfrm>
+          <a:prstGeom prst="rect">
+            <a:avLst/>
+          </a:prstGeom>
+          <a:noFill/>
+        </p:spPr>
+        <p:txBody>
+          <a:bodyPr wrap="square" anchor="t" lIns="0" rIns="0" tIns="0" bIns="0">
+            <a:spAutoFit/>
+          </a:bodyPr>
+          <a:lstStyle/>
+          <a:p>
+            <a:pPr algn="l">
+              <a:lnSpc>
+                <a:spcPct val="115000"/>
+              </a:lnSpc>
+            </a:pPr>
+            <a:r>
+              <a:rPr sz="1050" b="1" i="0">
+                <a:solidFill>
+                  <a:srgbClr val="4A55E8"/>
+                </a:solidFill>
+                <a:latin typeface="맑은 고딕"/>
+              </a:rPr>
+              <a:t>한계</a:t>
+            </a:r>
+          </a:p>
+        </p:txBody>
+      </p:sp>
+      <p:sp>
+        <p:nvSpPr>
+          <p:cNvPr id="36" name="TextBox 35"/>
+          <p:cNvSpPr txBox="1"/>
+          <p:nvPr/>
+        </p:nvSpPr>
+        <p:spPr>
+          <a:xfrm>
+            <a:off x="8385048" y="4663440"/>
+            <a:ext cx="3108960" cy="822960"/>
+          </a:xfrm>
+          <a:prstGeom prst="rect">
+            <a:avLst/>
+          </a:prstGeom>
+          <a:noFill/>
+        </p:spPr>
+        <p:txBody>
+          <a:bodyPr wrap="square" anchor="t" lIns="0" rIns="0" tIns="0" bIns="0">
+            <a:spAutoFit/>
+          </a:bodyPr>
+          <a:lstStyle/>
+          <a:p>
+            <a:pPr algn="l">
+              <a:lnSpc>
+                <a:spcPct val="140000"/>
+              </a:lnSpc>
+            </a:pPr>
+            <a:r>
+              <a:rPr sz="1150" b="0" i="0">
+                <a:solidFill>
+                  <a:srgbClr val="4A55E8"/>
+                </a:solidFill>
+                <a:latin typeface="맑은 고딕"/>
+              </a:rPr>
+              <a:t>폐쇄형 고가 패키지라</a:t>
+            </a:r>
+          </a:p>
+          <a:p>
+            <a:pPr algn="l">
+              <a:lnSpc>
+                <a:spcPct val="140000"/>
+              </a:lnSpc>
+            </a:pPr>
+            <a:r>
+              <a:rPr sz="1150" b="0" i="0">
+                <a:solidFill>
+                  <a:srgbClr val="4A55E8"/>
+                </a:solidFill>
+                <a:latin typeface="맑은 고딕"/>
+              </a:rPr>
+              <a:t>커스터마이징이 어려움</a:t>
+            </a:r>
+          </a:p>
+        </p:txBody>
+      </p:sp>
+      <p:sp>
+        <p:nvSpPr>
+          <p:cNvPr id="37" name="Rounded Rectangle 36"/>
+          <p:cNvSpPr/>
+          <p:nvPr/>
+        </p:nvSpPr>
+        <p:spPr>
+          <a:xfrm>
+            <a:off x="502920" y="5440680"/>
+            <a:ext cx="11201400" cy="822960"/>
+          </a:xfrm>
+          <a:prstGeom prst="roundRect">
+            <a:avLst>
+              <a:gd name="adj" fmla="val 16000"/>
+            </a:avLst>
+          </a:prstGeom>
+          <a:solidFill>
+            <a:srgbClr val="EAECFC"/>
+          </a:solidFill>
+          <a:ln w="12700">
+            <a:solidFill>
+              <a:srgbClr val="DDE1F2"/>
+            </a:solidFill>
+          </a:ln>
+          <a:effectLst/>
+        </p:spPr>
+        <p:style>
+          <a:lnRef idx="1">
+            <a:schemeClr val="accent1"/>
+          </a:lnRef>
+          <a:fillRef idx="3">
+            <a:schemeClr val="accent1"/>
+          </a:fillRef>
+          <a:effectRef idx="2">
+            <a:schemeClr val="accent1"/>
+          </a:effectRef>
+          <a:fontRef idx="minor">
+            <a:schemeClr val="lt1"/>
+          </a:fontRef>
+        </p:style>
+        <p:txBody>
+          <a:bodyPr rtlCol="0" anchor="ctr"/>
+          <a:lstStyle/>
+          <a:p>
+            <a:pPr algn="ctr"/>
+          </a:p>
+        </p:txBody>
+      </p:sp>
+      <p:pic>
+        <p:nvPicPr>
+          <p:cNvPr id="38" name="Picture 37" descr="check_circle.png"/>
+          <p:cNvPicPr>
+            <a:picLocks noChangeAspect="1"/>
+          </p:cNvPicPr>
+          <p:nvPr/>
+        </p:nvPicPr>
+        <p:blipFill>
+          <a:blip r:embed="rId6"/>
+          <a:stretch>
+            <a:fillRect/>
+          </a:stretch>
+        </p:blipFill>
+        <p:spPr>
+          <a:xfrm>
+            <a:off x="777240" y="5623560"/>
             <a:ext cx="457200" cy="457200"/>
           </a:xfrm>
           <a:prstGeom prst="rect">
@@ -21538,22 +23556,22 @@
       </p:pic>
       <p:sp>
         <p:nvSpPr>
-          <p:cNvPr id="23" name="TextBox 22"/>
-          <p:cNvSpPr txBox="1"/>
-          <p:nvPr/>
-        </p:nvSpPr>
-        <p:spPr>
-          <a:xfrm>
-            <a:off x="8961120" y="1783080"/>
-            <a:ext cx="2651760" cy="594360"/>
-          </a:xfrm>
-          <a:prstGeom prst="rect">
-            <a:avLst/>
-          </a:prstGeom>
-          <a:noFill/>
-        </p:spPr>
-        <p:txBody>
-          <a:bodyPr wrap="square" anchor="t" lIns="0" rIns="0" tIns="0" bIns="0">
+          <p:cNvPr id="39" name="TextBox 38"/>
+          <p:cNvSpPr txBox="1"/>
+          <p:nvPr/>
+        </p:nvSpPr>
+        <p:spPr>
+          <a:xfrm>
+            <a:off x="1417320" y="5623560"/>
+            <a:ext cx="10058400" cy="457200"/>
+          </a:xfrm>
+          <a:prstGeom prst="rect">
+            <a:avLst/>
+          </a:prstGeom>
+          <a:noFill/>
+        </p:spPr>
+        <p:txBody>
+          <a:bodyPr wrap="square" anchor="ctr" lIns="0" rIns="0" tIns="0" bIns="0">
             <a:spAutoFit/>
           </a:bodyPr>
           <a:lstStyle/>
@@ -21564,247 +23582,20 @@
               </a:lnSpc>
             </a:pPr>
             <a:r>
-              <a:rPr sz="1350" b="1" i="0">
-                <a:solidFill>
-                  <a:srgbClr val="26283A"/>
-                </a:solidFill>
-                <a:latin typeface="맑은 고딕"/>
-              </a:rPr>
-              <a:t>상용 AI 인원계수 솔루션</a:t>
-            </a:r>
-          </a:p>
-        </p:txBody>
-      </p:sp>
-      <p:sp>
-        <p:nvSpPr>
-          <p:cNvPr id="24" name="TextBox 23"/>
-          <p:cNvSpPr txBox="1"/>
-          <p:nvPr/>
-        </p:nvSpPr>
-        <p:spPr>
-          <a:xfrm>
-            <a:off x="8366760" y="2514600"/>
-            <a:ext cx="822960" cy="274320"/>
-          </a:xfrm>
-          <a:prstGeom prst="rect">
-            <a:avLst/>
-          </a:prstGeom>
-          <a:noFill/>
-        </p:spPr>
-        <p:txBody>
-          <a:bodyPr wrap="square" anchor="t" lIns="0" rIns="0" tIns="0" bIns="0">
-            <a:spAutoFit/>
-          </a:bodyPr>
-          <a:lstStyle/>
-          <a:p>
-            <a:pPr algn="l">
-              <a:lnSpc>
-                <a:spcPct val="115000"/>
-              </a:lnSpc>
-            </a:pPr>
-            <a:r>
-              <a:rPr sz="1050" b="1" i="0">
+              <a:rPr sz="1450" b="1" i="0">
                 <a:solidFill>
                   <a:srgbClr val="363FC9"/>
                 </a:solidFill>
                 <a:latin typeface="맑은 고딕"/>
               </a:rPr>
-              <a:t>특징</a:t>
-            </a:r>
-          </a:p>
-        </p:txBody>
-      </p:sp>
-      <p:sp>
-        <p:nvSpPr>
-          <p:cNvPr id="25" name="TextBox 24"/>
-          <p:cNvSpPr txBox="1"/>
-          <p:nvPr/>
-        </p:nvSpPr>
-        <p:spPr>
-          <a:xfrm>
-            <a:off x="8366760" y="2788920"/>
-            <a:ext cx="3108960" cy="685800"/>
-          </a:xfrm>
-          <a:prstGeom prst="rect">
-            <a:avLst/>
-          </a:prstGeom>
-          <a:noFill/>
-        </p:spPr>
-        <p:txBody>
-          <a:bodyPr wrap="square" anchor="t" lIns="0" rIns="0" tIns="0" bIns="0">
-            <a:spAutoFit/>
-          </a:bodyPr>
-          <a:lstStyle/>
-          <a:p>
-            <a:pPr algn="l">
-              <a:lnSpc>
-                <a:spcPct val="130000"/>
-              </a:lnSpc>
-            </a:pPr>
-            <a:r>
-              <a:rPr sz="1100" b="0" i="0">
-                <a:solidFill>
-                  <a:srgbClr val="26283A"/>
-                </a:solidFill>
-                <a:latin typeface="맑은 고딕"/>
-              </a:rPr>
-              <a:t>고정밀 카운팅,</a:t>
-            </a:r>
-          </a:p>
-          <a:p>
-            <a:pPr algn="l">
-              <a:lnSpc>
-                <a:spcPct val="130000"/>
-              </a:lnSpc>
-            </a:pPr>
-            <a:r>
-              <a:rPr sz="1100" b="0" i="0">
-                <a:solidFill>
-                  <a:srgbClr val="26283A"/>
-                </a:solidFill>
-                <a:latin typeface="맑은 고딕"/>
-              </a:rPr>
-              <a:t>통합 관제 플랫폼</a:t>
-            </a:r>
-          </a:p>
-        </p:txBody>
-      </p:sp>
-      <p:sp>
-        <p:nvSpPr>
-          <p:cNvPr id="26" name="TextBox 25"/>
-          <p:cNvSpPr txBox="1"/>
-          <p:nvPr/>
-        </p:nvSpPr>
-        <p:spPr>
-          <a:xfrm>
-            <a:off x="8366760" y="3566160"/>
-            <a:ext cx="822960" cy="274320"/>
-          </a:xfrm>
-          <a:prstGeom prst="rect">
-            <a:avLst/>
-          </a:prstGeom>
-          <a:noFill/>
-        </p:spPr>
-        <p:txBody>
-          <a:bodyPr wrap="square" anchor="t" lIns="0" rIns="0" tIns="0" bIns="0">
-            <a:spAutoFit/>
-          </a:bodyPr>
-          <a:lstStyle/>
-          <a:p>
-            <a:pPr algn="l">
-              <a:lnSpc>
-                <a:spcPct val="115000"/>
-              </a:lnSpc>
-            </a:pPr>
-            <a:r>
-              <a:rPr sz="1050" b="1" i="0">
-                <a:solidFill>
-                  <a:srgbClr val="4A55E8"/>
-                </a:solidFill>
-                <a:latin typeface="맑은 고딕"/>
-              </a:rPr>
-              <a:t>한계</a:t>
-            </a:r>
-          </a:p>
-        </p:txBody>
-      </p:sp>
-      <p:sp>
-        <p:nvSpPr>
-          <p:cNvPr id="27" name="TextBox 26"/>
-          <p:cNvSpPr txBox="1"/>
-          <p:nvPr/>
-        </p:nvSpPr>
-        <p:spPr>
-          <a:xfrm>
-            <a:off x="8366760" y="3840480"/>
-            <a:ext cx="3108960" cy="640080"/>
-          </a:xfrm>
-          <a:prstGeom prst="rect">
-            <a:avLst/>
-          </a:prstGeom>
-          <a:noFill/>
-        </p:spPr>
-        <p:txBody>
-          <a:bodyPr wrap="square" anchor="t" lIns="0" rIns="0" tIns="0" bIns="0">
-            <a:spAutoFit/>
-          </a:bodyPr>
-          <a:lstStyle/>
-          <a:p>
-            <a:pPr algn="l">
-              <a:lnSpc>
-                <a:spcPct val="130000"/>
-              </a:lnSpc>
-            </a:pPr>
-            <a:r>
-              <a:rPr sz="1100" b="0" i="0">
-                <a:solidFill>
-                  <a:srgbClr val="4A55E8"/>
-                </a:solidFill>
-                <a:latin typeface="맑은 고딕"/>
-              </a:rPr>
-              <a:t>폐쇄형 고가 패키지</a:t>
-            </a:r>
-          </a:p>
-          <a:p>
-            <a:pPr algn="l">
-              <a:lnSpc>
-                <a:spcPct val="130000"/>
-              </a:lnSpc>
-            </a:pPr>
-            <a:r>
-              <a:rPr sz="1100" b="0" i="0">
-                <a:solidFill>
-                  <a:srgbClr val="4A55E8"/>
-                </a:solidFill>
-                <a:latin typeface="맑은 고딕"/>
-              </a:rPr>
-              <a:t>커스터마이징 어려움</a:t>
-            </a:r>
-          </a:p>
-        </p:txBody>
-      </p:sp>
-      <p:sp>
-        <p:nvSpPr>
-          <p:cNvPr id="28" name="TextBox 27"/>
-          <p:cNvSpPr txBox="1"/>
-          <p:nvPr/>
-        </p:nvSpPr>
-        <p:spPr>
-          <a:xfrm>
-            <a:off x="502920" y="4846320"/>
-            <a:ext cx="10972800" cy="320040"/>
-          </a:xfrm>
-          <a:prstGeom prst="rect">
-            <a:avLst/>
-          </a:prstGeom>
-          <a:noFill/>
-        </p:spPr>
-        <p:txBody>
-          <a:bodyPr wrap="square" anchor="t" lIns="0" rIns="0" tIns="0" bIns="0">
-            <a:spAutoFit/>
-          </a:bodyPr>
-          <a:lstStyle/>
-          <a:p>
-            <a:pPr algn="l">
-              <a:lnSpc>
-                <a:spcPct val="115000"/>
-              </a:lnSpc>
-            </a:pPr>
-            <a:r>
-              <a:rPr sz="1350" b="1" i="0">
-                <a:solidFill>
-                  <a:srgbClr val="363FC9"/>
-                </a:solidFill>
-                <a:latin typeface="맑은 고딕"/>
-              </a:rPr>
-              <a:t>→ 본 프로젝트는 오픈소스 기반 자체 구현으로 두 접근의 장점을 결합</a:t>
-            </a:r>
-          </a:p>
-        </p:txBody>
-      </p:sp>
-      <p:sp>
-        <p:nvSpPr>
-          <p:cNvPr id="29" name="TextBox 28"/>
+              <a:t>본 프로젝트는 오픈소스 기반 자체 구현으로 두 접근의 장점을 결합</a:t>
+            </a:r>
+          </a:p>
+        </p:txBody>
+      </p:sp>
+      <p:sp>
+        <p:nvSpPr>
+          <p:cNvPr id="40" name="TextBox 39"/>
           <p:cNvSpPr txBox="1"/>
           <p:nvPr/>
         </p:nvSpPr>
@@ -21843,7 +23634,7 @@
       </p:sp>
       <p:sp>
         <p:nvSpPr>
-          <p:cNvPr id="30" name="TextBox 29"/>
+          <p:cNvPr id="41" name="TextBox 40"/>
           <p:cNvSpPr txBox="1"/>
           <p:nvPr/>
         </p:nvSpPr>
@@ -22091,19 +23882,21 @@
         </p:nvSpPr>
         <p:spPr>
           <a:xfrm>
-            <a:off x="502920" y="1645920"/>
-            <a:ext cx="2121408" cy="2651760"/>
+            <a:off x="502920" y="1600200"/>
+            <a:ext cx="2606040" cy="4160520"/>
           </a:xfrm>
           <a:prstGeom prst="roundRect">
             <a:avLst>
-              <a:gd name="adj" fmla="val 10000"/>
+              <a:gd name="adj" fmla="val 7000"/>
             </a:avLst>
           </a:prstGeom>
           <a:solidFill>
             <a:srgbClr val="FFFFFF"/>
           </a:solidFill>
-          <a:ln>
-            <a:noFill/>
+          <a:ln w="12700">
+            <a:solidFill>
+              <a:srgbClr val="DDE1F2"/>
+            </a:solidFill>
           </a:ln>
           <a:effectLst/>
         </p:spPr>
@@ -22145,8 +23938,8 @@
         </p:blipFill>
         <p:spPr>
           <a:xfrm>
-            <a:off x="1202985" y="1901952"/>
-            <a:ext cx="721278" cy="721278"/>
+            <a:off x="1568196" y="1828800"/>
+            <a:ext cx="475488" cy="475488"/>
           </a:xfrm>
           <a:prstGeom prst="rect">
             <a:avLst/>
@@ -22161,8 +23954,8 @@
         </p:nvSpPr>
         <p:spPr>
           <a:xfrm>
-            <a:off x="594360" y="2732958"/>
-            <a:ext cx="1938528" cy="457200"/>
+            <a:off x="612648" y="2395728"/>
+            <a:ext cx="2386584" cy="384048"/>
           </a:xfrm>
           <a:prstGeom prst="rect">
             <a:avLst/>
@@ -22181,7 +23974,7 @@
               </a:lnSpc>
             </a:pPr>
             <a:r>
-              <a:rPr sz="1250" b="1" i="0">
+              <a:rPr sz="1300" b="1" i="0">
                 <a:solidFill>
                   <a:srgbClr val="26283A"/>
                 </a:solidFill>
@@ -22200,8 +23993,8 @@
         </p:nvSpPr>
         <p:spPr>
           <a:xfrm>
-            <a:off x="594360" y="3153582"/>
-            <a:ext cx="1938528" cy="457200"/>
+            <a:off x="612648" y="2798064"/>
+            <a:ext cx="2386584" cy="548640"/>
           </a:xfrm>
           <a:prstGeom prst="rect">
             <a:avLst/>
@@ -22220,13 +24013,13 @@
               </a:lnSpc>
             </a:pPr>
             <a:r>
-              <a:rPr sz="1100" b="0" i="0">
+              <a:rPr sz="1000" b="0" i="0">
                 <a:solidFill>
                   <a:srgbClr val="8A8EA3"/>
                 </a:solidFill>
                 <a:latin typeface="맑은 고딕"/>
               </a:rPr>
-              <a:t>YOLOv8s+ByteTrack 직접 구현</a:t>
+              <a:t>YOLOv8s+ByteTrack</a:t>
             </a:r>
           </a:p>
           <a:p>
@@ -22236,35 +24029,33 @@
               </a:lnSpc>
             </a:pPr>
             <a:r>
-              <a:rPr sz="1100" b="0" i="0">
+              <a:rPr sz="1000" b="0" i="0">
                 <a:solidFill>
                   <a:srgbClr val="8A8EA3"/>
                 </a:solidFill>
                 <a:latin typeface="맑은 고딕"/>
               </a:rPr>
-              <a:t>상용 패키지 불필요</a:t>
-            </a:r>
-          </a:p>
-        </p:txBody>
-      </p:sp>
-      <p:sp>
-        <p:nvSpPr>
-          <p:cNvPr id="11" name="Rounded Rectangle 10"/>
+              <a:t>직접 구현</a:t>
+            </a:r>
+          </a:p>
+        </p:txBody>
+      </p:sp>
+      <p:sp>
+        <p:nvSpPr>
+          <p:cNvPr id="11" name="Rectangle 10"/>
           <p:cNvSpPr/>
           <p:nvPr/>
         </p:nvSpPr>
         <p:spPr>
           <a:xfrm>
-            <a:off x="2756916" y="1645920"/>
-            <a:ext cx="2121408" cy="2651760"/>
-          </a:xfrm>
-          <a:prstGeom prst="roundRect">
-            <a:avLst>
-              <a:gd name="adj" fmla="val 10000"/>
-            </a:avLst>
+            <a:off x="704088" y="3456432"/>
+            <a:ext cx="2203704" cy="16510"/>
+          </a:xfrm>
+          <a:prstGeom prst="rect">
+            <a:avLst/>
           </a:prstGeom>
           <a:solidFill>
-            <a:srgbClr val="FFFFFF"/>
+            <a:srgbClr val="ECEEF6"/>
           </a:solidFill>
           <a:ln>
             <a:noFill/>
@@ -22293,9 +24084,137 @@
           </a:p>
         </p:txBody>
       </p:sp>
+      <p:sp>
+        <p:nvSpPr>
+          <p:cNvPr id="12" name="TextBox 11"/>
+          <p:cNvSpPr txBox="1"/>
+          <p:nvPr/>
+        </p:nvSpPr>
+        <p:spPr>
+          <a:xfrm>
+            <a:off x="722376" y="3703320"/>
+            <a:ext cx="2203704" cy="1920240"/>
+          </a:xfrm>
+          <a:prstGeom prst="rect">
+            <a:avLst/>
+          </a:prstGeom>
+          <a:noFill/>
+        </p:spPr>
+        <p:txBody>
+          <a:bodyPr wrap="square" anchor="t" lIns="0" rIns="0">
+            <a:spAutoFit/>
+          </a:bodyPr>
+          <a:lstStyle/>
+          <a:p>
+            <a:pPr marL="0" indent="0">
+              <a:lnSpc>
+                <a:spcPct val="130000"/>
+              </a:lnSpc>
+              <a:spcAft>
+                <a:spcPts val="2000"/>
+              </a:spcAft>
+            </a:pPr>
+            <a:r>
+              <a:rPr sz="980" b="1">
+                <a:solidFill>
+                  <a:srgbClr val="26283A"/>
+                </a:solidFill>
+                <a:latin typeface="맑은 고딕"/>
+              </a:rPr>
+              <a:t>●  추론해상도 1280으로 튜닝</a:t>
+            </a:r>
+          </a:p>
+          <a:p>
+            <a:pPr marL="0" indent="0">
+              <a:lnSpc>
+                <a:spcPct val="130000"/>
+              </a:lnSpc>
+              <a:spcAft>
+                <a:spcPts val="2000"/>
+              </a:spcAft>
+            </a:pPr>
+            <a:r>
+              <a:rPr sz="980" b="1">
+                <a:solidFill>
+                  <a:srgbClr val="26283A"/>
+                </a:solidFill>
+                <a:latin typeface="맑은 고딕"/>
+              </a:rPr>
+              <a:t>●  탐지 인원 67~86명 수준 확보</a:t>
+            </a:r>
+          </a:p>
+          <a:p>
+            <a:pPr marL="0" indent="0">
+              <a:lnSpc>
+                <a:spcPct val="130000"/>
+              </a:lnSpc>
+              <a:spcAft>
+                <a:spcPts val="2000"/>
+              </a:spcAft>
+            </a:pPr>
+            <a:r>
+              <a:rPr sz="980" b="1">
+                <a:solidFill>
+                  <a:srgbClr val="26283A"/>
+                </a:solidFill>
+                <a:latin typeface="맑은 고딕"/>
+              </a:rPr>
+              <a:t>●  상용 영상분석 패키지 불필요</a:t>
+            </a:r>
+          </a:p>
+        </p:txBody>
+      </p:sp>
+      <p:sp>
+        <p:nvSpPr>
+          <p:cNvPr id="13" name="Rounded Rectangle 12"/>
+          <p:cNvSpPr/>
+          <p:nvPr/>
+        </p:nvSpPr>
+        <p:spPr>
+          <a:xfrm>
+            <a:off x="3310128" y="1600200"/>
+            <a:ext cx="2606040" cy="4160520"/>
+          </a:xfrm>
+          <a:prstGeom prst="roundRect">
+            <a:avLst>
+              <a:gd name="adj" fmla="val 7000"/>
+            </a:avLst>
+          </a:prstGeom>
+          <a:solidFill>
+            <a:srgbClr val="FFFFFF"/>
+          </a:solidFill>
+          <a:ln w="12700">
+            <a:solidFill>
+              <a:srgbClr val="DDE1F2"/>
+            </a:solidFill>
+          </a:ln>
+          <a:effectLst/>
+        </p:spPr>
+        <p:style>
+          <a:lnRef idx="1">
+            <a:schemeClr val="accent1"/>
+          </a:lnRef>
+          <a:fillRef idx="3">
+            <a:schemeClr val="accent1"/>
+          </a:fillRef>
+          <a:effectRef idx="2">
+            <a:schemeClr val="accent1"/>
+          </a:effectRef>
+          <a:fontRef idx="minor">
+            <a:schemeClr val="lt1"/>
+          </a:fontRef>
+        </p:style>
+        <p:txBody>
+          <a:bodyPr rtlCol="0" anchor="ctr"/>
+          <a:lstStyle/>
+          <a:p>
+            <a:pPr algn="ctr"/>
+          </a:p>
+        </p:txBody>
+      </p:sp>
       <p:pic>
         <p:nvPicPr>
-          <p:cNvPr id="12" name="Picture 11" descr="bell.png"/>
+          <p:cNvPr id="14" name="Picture 13" descr="bell.png"/>
           <p:cNvPicPr>
             <a:picLocks noChangeAspect="1"/>
           </p:cNvPicPr>
@@ -22309,8 +24228,8 @@
         </p:blipFill>
         <p:spPr>
           <a:xfrm>
-            <a:off x="3456981" y="1901952"/>
-            <a:ext cx="721278" cy="721278"/>
+            <a:off x="4375404" y="1828800"/>
+            <a:ext cx="475488" cy="475488"/>
           </a:xfrm>
           <a:prstGeom prst="rect">
             <a:avLst/>
@@ -22319,14 +24238,14 @@
       </p:pic>
       <p:sp>
         <p:nvSpPr>
-          <p:cNvPr id="13" name="TextBox 12"/>
-          <p:cNvSpPr txBox="1"/>
-          <p:nvPr/>
-        </p:nvSpPr>
-        <p:spPr>
-          <a:xfrm>
-            <a:off x="2848356" y="2732958"/>
-            <a:ext cx="1938528" cy="457200"/>
+          <p:cNvPr id="15" name="TextBox 14"/>
+          <p:cNvSpPr txBox="1"/>
+          <p:nvPr/>
+        </p:nvSpPr>
+        <p:spPr>
+          <a:xfrm>
+            <a:off x="3419856" y="2395728"/>
+            <a:ext cx="2386584" cy="384048"/>
           </a:xfrm>
           <a:prstGeom prst="rect">
             <a:avLst/>
@@ -22345,7 +24264,7 @@
               </a:lnSpc>
             </a:pPr>
             <a:r>
-              <a:rPr sz="1250" b="1" i="0">
+              <a:rPr sz="1300" b="1" i="0">
                 <a:solidFill>
                   <a:srgbClr val="26283A"/>
                 </a:solidFill>
@@ -22358,14 +24277,14 @@
       </p:sp>
       <p:sp>
         <p:nvSpPr>
-          <p:cNvPr id="14" name="TextBox 13"/>
-          <p:cNvSpPr txBox="1"/>
-          <p:nvPr/>
-        </p:nvSpPr>
-        <p:spPr>
-          <a:xfrm>
-            <a:off x="2848356" y="3153582"/>
-            <a:ext cx="1938528" cy="457200"/>
+          <p:cNvPr id="16" name="TextBox 15"/>
+          <p:cNvSpPr txBox="1"/>
+          <p:nvPr/>
+        </p:nvSpPr>
+        <p:spPr>
+          <a:xfrm>
+            <a:off x="3419856" y="2798064"/>
+            <a:ext cx="2386584" cy="548640"/>
           </a:xfrm>
           <a:prstGeom prst="rect">
             <a:avLst/>
@@ -22384,13 +24303,13 @@
               </a:lnSpc>
             </a:pPr>
             <a:r>
-              <a:rPr sz="1100" b="0" i="0">
+              <a:rPr sz="1000" b="0" i="0">
                 <a:solidFill>
                   <a:srgbClr val="8A8EA3"/>
                 </a:solidFill>
                 <a:latin typeface="맑은 고딕"/>
               </a:rPr>
-              <a:t>임계치 기반 혼잡단계 자동 판정</a:t>
+              <a:t>임계치 기반</a:t>
             </a:r>
           </a:p>
           <a:p>
@@ -22400,35 +24319,33 @@
               </a:lnSpc>
             </a:pPr>
             <a:r>
-              <a:rPr sz="1100" b="0" i="0">
+              <a:rPr sz="1000" b="0" i="0">
                 <a:solidFill>
                   <a:srgbClr val="8A8EA3"/>
                 </a:solidFill>
                 <a:latin typeface="맑은 고딕"/>
               </a:rPr>
-              <a:t>중복 생성 방지 로직 포함</a:t>
-            </a:r>
-          </a:p>
-        </p:txBody>
-      </p:sp>
-      <p:sp>
-        <p:nvSpPr>
-          <p:cNvPr id="15" name="Rounded Rectangle 14"/>
+              <a:t>혼잡단계 자동 판정</a:t>
+            </a:r>
+          </a:p>
+        </p:txBody>
+      </p:sp>
+      <p:sp>
+        <p:nvSpPr>
+          <p:cNvPr id="17" name="Rectangle 16"/>
           <p:cNvSpPr/>
           <p:nvPr/>
         </p:nvSpPr>
         <p:spPr>
           <a:xfrm>
-            <a:off x="5010912" y="1645920"/>
-            <a:ext cx="2121408" cy="2651760"/>
-          </a:xfrm>
-          <a:prstGeom prst="roundRect">
-            <a:avLst>
-              <a:gd name="adj" fmla="val 10000"/>
-            </a:avLst>
+            <a:off x="3511296" y="3456432"/>
+            <a:ext cx="2203704" cy="16510"/>
+          </a:xfrm>
+          <a:prstGeom prst="rect">
+            <a:avLst/>
           </a:prstGeom>
           <a:solidFill>
-            <a:srgbClr val="FFFFFF"/>
+            <a:srgbClr val="ECEEF6"/>
           </a:solidFill>
           <a:ln>
             <a:noFill/>
@@ -22457,9 +24374,137 @@
           </a:p>
         </p:txBody>
       </p:sp>
+      <p:sp>
+        <p:nvSpPr>
+          <p:cNvPr id="18" name="TextBox 17"/>
+          <p:cNvSpPr txBox="1"/>
+          <p:nvPr/>
+        </p:nvSpPr>
+        <p:spPr>
+          <a:xfrm>
+            <a:off x="3529584" y="3703320"/>
+            <a:ext cx="2203704" cy="1920240"/>
+          </a:xfrm>
+          <a:prstGeom prst="rect">
+            <a:avLst/>
+          </a:prstGeom>
+          <a:noFill/>
+        </p:spPr>
+        <p:txBody>
+          <a:bodyPr wrap="square" anchor="t" lIns="0" rIns="0">
+            <a:spAutoFit/>
+          </a:bodyPr>
+          <a:lstStyle/>
+          <a:p>
+            <a:pPr marL="0" indent="0">
+              <a:lnSpc>
+                <a:spcPct val="130000"/>
+              </a:lnSpc>
+              <a:spcAft>
+                <a:spcPts val="2000"/>
+              </a:spcAft>
+            </a:pPr>
+            <a:r>
+              <a:rPr sz="980" b="1">
+                <a:solidFill>
+                  <a:srgbClr val="26283A"/>
+                </a:solidFill>
+                <a:latin typeface="맑은 고딕"/>
+              </a:rPr>
+              <a:t>●  구역별 1·2단계 임계치 직접 설정</a:t>
+            </a:r>
+          </a:p>
+          <a:p>
+            <a:pPr marL="0" indent="0">
+              <a:lnSpc>
+                <a:spcPct val="130000"/>
+              </a:lnSpc>
+              <a:spcAft>
+                <a:spcPts val="2000"/>
+              </a:spcAft>
+            </a:pPr>
+            <a:r>
+              <a:rPr sz="980" b="1">
+                <a:solidFill>
+                  <a:srgbClr val="26283A"/>
+                </a:solidFill>
+                <a:latin typeface="맑은 고딕"/>
+              </a:rPr>
+              <a:t>●  미처리 이벤트 있으면 중복 생성 안 함</a:t>
+            </a:r>
+          </a:p>
+          <a:p>
+            <a:pPr marL="0" indent="0">
+              <a:lnSpc>
+                <a:spcPct val="130000"/>
+              </a:lnSpc>
+              <a:spcAft>
+                <a:spcPts val="2000"/>
+              </a:spcAft>
+            </a:pPr>
+            <a:r>
+              <a:rPr sz="980" b="1">
+                <a:solidFill>
+                  <a:srgbClr val="26283A"/>
+                </a:solidFill>
+                <a:latin typeface="맑은 고딕"/>
+              </a:rPr>
+              <a:t>●  RESOLVED 후 재초과 시에만 재생성</a:t>
+            </a:r>
+          </a:p>
+        </p:txBody>
+      </p:sp>
+      <p:sp>
+        <p:nvSpPr>
+          <p:cNvPr id="19" name="Rounded Rectangle 18"/>
+          <p:cNvSpPr/>
+          <p:nvPr/>
+        </p:nvSpPr>
+        <p:spPr>
+          <a:xfrm>
+            <a:off x="6117336" y="1600200"/>
+            <a:ext cx="2606040" cy="4160520"/>
+          </a:xfrm>
+          <a:prstGeom prst="roundRect">
+            <a:avLst>
+              <a:gd name="adj" fmla="val 7000"/>
+            </a:avLst>
+          </a:prstGeom>
+          <a:solidFill>
+            <a:srgbClr val="FFFFFF"/>
+          </a:solidFill>
+          <a:ln w="12700">
+            <a:solidFill>
+              <a:srgbClr val="DDE1F2"/>
+            </a:solidFill>
+          </a:ln>
+          <a:effectLst/>
+        </p:spPr>
+        <p:style>
+          <a:lnRef idx="1">
+            <a:schemeClr val="accent1"/>
+          </a:lnRef>
+          <a:fillRef idx="3">
+            <a:schemeClr val="accent1"/>
+          </a:fillRef>
+          <a:effectRef idx="2">
+            <a:schemeClr val="accent1"/>
+          </a:effectRef>
+          <a:fontRef idx="minor">
+            <a:schemeClr val="lt1"/>
+          </a:fontRef>
+        </p:style>
+        <p:txBody>
+          <a:bodyPr rtlCol="0" anchor="ctr"/>
+          <a:lstStyle/>
+          <a:p>
+            <a:pPr algn="ctr"/>
+          </a:p>
+        </p:txBody>
+      </p:sp>
       <p:pic>
         <p:nvPicPr>
-          <p:cNvPr id="16" name="Picture 15" descr="browser.png"/>
+          <p:cNvPr id="20" name="Picture 19" descr="browser.png"/>
           <p:cNvPicPr>
             <a:picLocks noChangeAspect="1"/>
           </p:cNvPicPr>
@@ -22473,8 +24518,8 @@
         </p:blipFill>
         <p:spPr>
           <a:xfrm>
-            <a:off x="5710977" y="1901952"/>
-            <a:ext cx="721278" cy="721278"/>
+            <a:off x="7182612" y="1828800"/>
+            <a:ext cx="475488" cy="475488"/>
           </a:xfrm>
           <a:prstGeom prst="rect">
             <a:avLst/>
@@ -22483,14 +24528,14 @@
       </p:pic>
       <p:sp>
         <p:nvSpPr>
-          <p:cNvPr id="17" name="TextBox 16"/>
-          <p:cNvSpPr txBox="1"/>
-          <p:nvPr/>
-        </p:nvSpPr>
-        <p:spPr>
-          <a:xfrm>
-            <a:off x="5102352" y="2732958"/>
-            <a:ext cx="1938528" cy="457200"/>
+          <p:cNvPr id="21" name="TextBox 20"/>
+          <p:cNvSpPr txBox="1"/>
+          <p:nvPr/>
+        </p:nvSpPr>
+        <p:spPr>
+          <a:xfrm>
+            <a:off x="6227064" y="2395728"/>
+            <a:ext cx="2386584" cy="384048"/>
           </a:xfrm>
           <a:prstGeom prst="rect">
             <a:avLst/>
@@ -22509,7 +24554,7 @@
               </a:lnSpc>
             </a:pPr>
             <a:r>
-              <a:rPr sz="1250" b="1" i="0">
+              <a:rPr sz="1300" b="1" i="0">
                 <a:solidFill>
                   <a:srgbClr val="26283A"/>
                 </a:solidFill>
@@ -22522,14 +24567,14 @@
       </p:sp>
       <p:sp>
         <p:nvSpPr>
-          <p:cNvPr id="18" name="TextBox 17"/>
-          <p:cNvSpPr txBox="1"/>
-          <p:nvPr/>
-        </p:nvSpPr>
-        <p:spPr>
-          <a:xfrm>
-            <a:off x="5102352" y="3153582"/>
-            <a:ext cx="1938528" cy="457200"/>
+          <p:cNvPr id="22" name="TextBox 21"/>
+          <p:cNvSpPr txBox="1"/>
+          <p:nvPr/>
+        </p:nvSpPr>
+        <p:spPr>
+          <a:xfrm>
+            <a:off x="6227064" y="2798064"/>
+            <a:ext cx="2386584" cy="548640"/>
           </a:xfrm>
           <a:prstGeom prst="rect">
             <a:avLst/>
@@ -22548,13 +24593,13 @@
               </a:lnSpc>
             </a:pPr>
             <a:r>
-              <a:rPr sz="1100" b="0" i="0">
+              <a:rPr sz="1000" b="0" i="0">
                 <a:solidFill>
                   <a:srgbClr val="8A8EA3"/>
                 </a:solidFill>
                 <a:latin typeface="맑은 고딕"/>
               </a:rPr>
-              <a:t>같은 백엔드로 PC 관제 ·</a:t>
+              <a:t>같은 백엔드로</a:t>
             </a:r>
           </a:p>
           <a:p>
@@ -22564,35 +24609,33 @@
               </a:lnSpc>
             </a:pPr>
             <a:r>
-              <a:rPr sz="1100" b="0" i="0">
+              <a:rPr sz="1000" b="0" i="0">
                 <a:solidFill>
                   <a:srgbClr val="8A8EA3"/>
                 </a:solidFill>
                 <a:latin typeface="맑은 고딕"/>
               </a:rPr>
-              <a:t>현장 모바일 동시 제공</a:t>
-            </a:r>
-          </a:p>
-        </p:txBody>
-      </p:sp>
-      <p:sp>
-        <p:nvSpPr>
-          <p:cNvPr id="19" name="Rounded Rectangle 18"/>
+              <a:t>PC·모바일 동시 제공</a:t>
+            </a:r>
+          </a:p>
+        </p:txBody>
+      </p:sp>
+      <p:sp>
+        <p:nvSpPr>
+          <p:cNvPr id="23" name="Rectangle 22"/>
           <p:cNvSpPr/>
           <p:nvPr/>
         </p:nvSpPr>
         <p:spPr>
           <a:xfrm>
-            <a:off x="7264908" y="1645920"/>
-            <a:ext cx="2121408" cy="2651760"/>
-          </a:xfrm>
-          <a:prstGeom prst="roundRect">
-            <a:avLst>
-              <a:gd name="adj" fmla="val 10000"/>
-            </a:avLst>
+            <a:off x="6318504" y="3456432"/>
+            <a:ext cx="2203704" cy="16510"/>
+          </a:xfrm>
+          <a:prstGeom prst="rect">
+            <a:avLst/>
           </a:prstGeom>
           <a:solidFill>
-            <a:srgbClr val="FFFFFF"/>
+            <a:srgbClr val="ECEEF6"/>
           </a:solidFill>
           <a:ln>
             <a:noFill/>
@@ -22621,9 +24664,137 @@
           </a:p>
         </p:txBody>
       </p:sp>
+      <p:sp>
+        <p:nvSpPr>
+          <p:cNvPr id="24" name="TextBox 23"/>
+          <p:cNvSpPr txBox="1"/>
+          <p:nvPr/>
+        </p:nvSpPr>
+        <p:spPr>
+          <a:xfrm>
+            <a:off x="6336792" y="3703320"/>
+            <a:ext cx="2203704" cy="1920240"/>
+          </a:xfrm>
+          <a:prstGeom prst="rect">
+            <a:avLst/>
+          </a:prstGeom>
+          <a:noFill/>
+        </p:spPr>
+        <p:txBody>
+          <a:bodyPr wrap="square" anchor="t" lIns="0" rIns="0">
+            <a:spAutoFit/>
+          </a:bodyPr>
+          <a:lstStyle/>
+          <a:p>
+            <a:pPr marL="0" indent="0">
+              <a:lnSpc>
+                <a:spcPct val="130000"/>
+              </a:lnSpc>
+              <a:spcAft>
+                <a:spcPts val="2000"/>
+              </a:spcAft>
+            </a:pPr>
+            <a:r>
+              <a:rPr sz="980" b="1">
+                <a:solidFill>
+                  <a:srgbClr val="26283A"/>
+                </a:solidFill>
+                <a:latin typeface="맑은 고딕"/>
+              </a:rPr>
+              <a:t>●  API 36개를 두 클라이언트가 공유</a:t>
+            </a:r>
+          </a:p>
+          <a:p>
+            <a:pPr marL="0" indent="0">
+              <a:lnSpc>
+                <a:spcPct val="130000"/>
+              </a:lnSpc>
+              <a:spcAft>
+                <a:spcPts val="2000"/>
+              </a:spcAft>
+            </a:pPr>
+            <a:r>
+              <a:rPr sz="980" b="1">
+                <a:solidFill>
+                  <a:srgbClr val="26283A"/>
+                </a:solidFill>
+                <a:latin typeface="맑은 고딕"/>
+              </a:rPr>
+              <a:t>●  세션 기반 인증 공통 적용</a:t>
+            </a:r>
+          </a:p>
+          <a:p>
+            <a:pPr marL="0" indent="0">
+              <a:lnSpc>
+                <a:spcPct val="130000"/>
+              </a:lnSpc>
+              <a:spcAft>
+                <a:spcPts val="2000"/>
+              </a:spcAft>
+            </a:pPr>
+            <a:r>
+              <a:rPr sz="980" b="1">
+                <a:solidFill>
+                  <a:srgbClr val="26283A"/>
+                </a:solidFill>
+                <a:latin typeface="맑은 고딕"/>
+              </a:rPr>
+              <a:t>●  SSE 실시간 갱신도 웹에서 동일 제공</a:t>
+            </a:r>
+          </a:p>
+        </p:txBody>
+      </p:sp>
+      <p:sp>
+        <p:nvSpPr>
+          <p:cNvPr id="25" name="Rounded Rectangle 24"/>
+          <p:cNvSpPr/>
+          <p:nvPr/>
+        </p:nvSpPr>
+        <p:spPr>
+          <a:xfrm>
+            <a:off x="8924544" y="1600200"/>
+            <a:ext cx="2606040" cy="4160520"/>
+          </a:xfrm>
+          <a:prstGeom prst="roundRect">
+            <a:avLst>
+              <a:gd name="adj" fmla="val 7000"/>
+            </a:avLst>
+          </a:prstGeom>
+          <a:solidFill>
+            <a:srgbClr val="FFFFFF"/>
+          </a:solidFill>
+          <a:ln w="12700">
+            <a:solidFill>
+              <a:srgbClr val="DDE1F2"/>
+            </a:solidFill>
+          </a:ln>
+          <a:effectLst/>
+        </p:spPr>
+        <p:style>
+          <a:lnRef idx="1">
+            <a:schemeClr val="accent1"/>
+          </a:lnRef>
+          <a:fillRef idx="3">
+            <a:schemeClr val="accent1"/>
+          </a:fillRef>
+          <a:effectRef idx="2">
+            <a:schemeClr val="accent1"/>
+          </a:effectRef>
+          <a:fontRef idx="minor">
+            <a:schemeClr val="lt1"/>
+          </a:fontRef>
+        </p:style>
+        <p:txBody>
+          <a:bodyPr rtlCol="0" anchor="ctr"/>
+          <a:lstStyle/>
+          <a:p>
+            <a:pPr algn="ctr"/>
+          </a:p>
+        </p:txBody>
+      </p:sp>
       <p:pic>
         <p:nvPicPr>
-          <p:cNvPr id="20" name="Picture 19" descr="play.png"/>
+          <p:cNvPr id="26" name="Picture 25" descr="play.png"/>
           <p:cNvPicPr>
             <a:picLocks noChangeAspect="1"/>
           </p:cNvPicPr>
@@ -22637,8 +24808,8 @@
         </p:blipFill>
         <p:spPr>
           <a:xfrm>
-            <a:off x="7964973" y="1901952"/>
-            <a:ext cx="721278" cy="721278"/>
+            <a:off x="9989820" y="1828800"/>
+            <a:ext cx="475488" cy="475488"/>
           </a:xfrm>
           <a:prstGeom prst="rect">
             <a:avLst/>
@@ -22647,14 +24818,14 @@
       </p:pic>
       <p:sp>
         <p:nvSpPr>
-          <p:cNvPr id="21" name="TextBox 20"/>
-          <p:cNvSpPr txBox="1"/>
-          <p:nvPr/>
-        </p:nvSpPr>
-        <p:spPr>
-          <a:xfrm>
-            <a:off x="7356348" y="2732958"/>
-            <a:ext cx="1938528" cy="457200"/>
+          <p:cNvPr id="27" name="TextBox 26"/>
+          <p:cNvSpPr txBox="1"/>
+          <p:nvPr/>
+        </p:nvSpPr>
+        <p:spPr>
+          <a:xfrm>
+            <a:off x="9034272" y="2395728"/>
+            <a:ext cx="2386584" cy="384048"/>
           </a:xfrm>
           <a:prstGeom prst="rect">
             <a:avLst/>
@@ -22673,7 +24844,7 @@
               </a:lnSpc>
             </a:pPr>
             <a:r>
-              <a:rPr sz="1250" b="1" i="0">
+              <a:rPr sz="1300" b="1" i="0">
                 <a:solidFill>
                   <a:srgbClr val="26283A"/>
                 </a:solidFill>
@@ -22686,14 +24857,14 @@
       </p:sp>
       <p:sp>
         <p:nvSpPr>
-          <p:cNvPr id="22" name="TextBox 21"/>
-          <p:cNvSpPr txBox="1"/>
-          <p:nvPr/>
-        </p:nvSpPr>
-        <p:spPr>
-          <a:xfrm>
-            <a:off x="7356348" y="3153582"/>
-            <a:ext cx="1938528" cy="457200"/>
+          <p:cNvPr id="28" name="TextBox 27"/>
+          <p:cNvSpPr txBox="1"/>
+          <p:nvPr/>
+        </p:nvSpPr>
+        <p:spPr>
+          <a:xfrm>
+            <a:off x="9034272" y="2798064"/>
+            <a:ext cx="2386584" cy="548640"/>
           </a:xfrm>
           <a:prstGeom prst="rect">
             <a:avLst/>
@@ -22712,7 +24883,7 @@
               </a:lnSpc>
             </a:pPr>
             <a:r>
-              <a:rPr sz="1100" b="0" i="0">
+              <a:rPr sz="1000" b="0" i="0">
                 <a:solidFill>
                   <a:srgbClr val="8A8EA3"/>
                 </a:solidFill>
@@ -22728,20 +24899,144 @@
               </a:lnSpc>
             </a:pPr>
             <a:r>
-              <a:rPr sz="1100" b="0" i="0">
+              <a:rPr sz="1000" b="0" i="0">
                 <a:solidFill>
                   <a:srgbClr val="8A8EA3"/>
                 </a:solidFill>
                 <a:latin typeface="맑은 고딕"/>
               </a:rPr>
-              <a:t>실시간처럼 동작 검증 가능</a:t>
-            </a:r>
-          </a:p>
-        </p:txBody>
-      </p:sp>
-      <p:sp>
-        <p:nvSpPr>
-          <p:cNvPr id="23" name="TextBox 22"/>
+              <a:t>실시간처럼 동작 검증</a:t>
+            </a:r>
+          </a:p>
+        </p:txBody>
+      </p:sp>
+      <p:sp>
+        <p:nvSpPr>
+          <p:cNvPr id="29" name="Rectangle 28"/>
+          <p:cNvSpPr/>
+          <p:nvPr/>
+        </p:nvSpPr>
+        <p:spPr>
+          <a:xfrm>
+            <a:off x="9125712" y="3456432"/>
+            <a:ext cx="2203704" cy="16510"/>
+          </a:xfrm>
+          <a:prstGeom prst="rect">
+            <a:avLst/>
+          </a:prstGeom>
+          <a:solidFill>
+            <a:srgbClr val="ECEEF6"/>
+          </a:solidFill>
+          <a:ln>
+            <a:noFill/>
+          </a:ln>
+          <a:effectLst/>
+        </p:spPr>
+        <p:style>
+          <a:lnRef idx="1">
+            <a:schemeClr val="accent1"/>
+          </a:lnRef>
+          <a:fillRef idx="3">
+            <a:schemeClr val="accent1"/>
+          </a:fillRef>
+          <a:effectRef idx="2">
+            <a:schemeClr val="accent1"/>
+          </a:effectRef>
+          <a:fontRef idx="minor">
+            <a:schemeClr val="lt1"/>
+          </a:fontRef>
+        </p:style>
+        <p:txBody>
+          <a:bodyPr rtlCol="0" anchor="ctr"/>
+          <a:lstStyle/>
+          <a:p>
+            <a:pPr algn="ctr"/>
+          </a:p>
+        </p:txBody>
+      </p:sp>
+      <p:sp>
+        <p:nvSpPr>
+          <p:cNvPr id="30" name="TextBox 29"/>
+          <p:cNvSpPr txBox="1"/>
+          <p:nvPr/>
+        </p:nvSpPr>
+        <p:spPr>
+          <a:xfrm>
+            <a:off x="9144000" y="3703320"/>
+            <a:ext cx="2203704" cy="1920240"/>
+          </a:xfrm>
+          <a:prstGeom prst="rect">
+            <a:avLst/>
+          </a:prstGeom>
+          <a:noFill/>
+        </p:spPr>
+        <p:txBody>
+          <a:bodyPr wrap="square" anchor="t" lIns="0" rIns="0">
+            <a:spAutoFit/>
+          </a:bodyPr>
+          <a:lstStyle/>
+          <a:p>
+            <a:pPr marL="0" indent="0">
+              <a:lnSpc>
+                <a:spcPct val="130000"/>
+              </a:lnSpc>
+              <a:spcAft>
+                <a:spcPts val="2000"/>
+              </a:spcAft>
+            </a:pPr>
+            <a:r>
+              <a:rPr sz="980" b="1">
+                <a:solidFill>
+                  <a:srgbClr val="26283A"/>
+                </a:solidFill>
+                <a:latin typeface="맑은 고딕"/>
+              </a:rPr>
+              <a:t>●  cameras.source_type=LIVE/DUMMY 설계</a:t>
+            </a:r>
+          </a:p>
+          <a:p>
+            <a:pPr marL="0" indent="0">
+              <a:lnSpc>
+                <a:spcPct val="130000"/>
+              </a:lnSpc>
+              <a:spcAft>
+                <a:spcPts val="2000"/>
+              </a:spcAft>
+            </a:pPr>
+            <a:r>
+              <a:rPr sz="980" b="1">
+                <a:solidFill>
+                  <a:srgbClr val="26283A"/>
+                </a:solidFill>
+                <a:latin typeface="맑은 고딕"/>
+              </a:rPr>
+              <a:t>●  분석 경로는 입력 소스와 무관하게 동일</a:t>
+            </a:r>
+          </a:p>
+          <a:p>
+            <a:pPr marL="0" indent="0">
+              <a:lnSpc>
+                <a:spcPct val="130000"/>
+              </a:lnSpc>
+              <a:spcAft>
+                <a:spcPts val="2000"/>
+              </a:spcAft>
+            </a:pPr>
+            <a:r>
+              <a:rPr sz="980" b="1">
+                <a:solidFill>
+                  <a:srgbClr val="26283A"/>
+                </a:solidFill>
+                <a:latin typeface="맑은 고딕"/>
+              </a:rPr>
+              <a:t>●  네트워크·기체 장애 없이 반복 시연 가능</a:t>
+            </a:r>
+          </a:p>
+        </p:txBody>
+      </p:sp>
+      <p:sp>
+        <p:nvSpPr>
+          <p:cNvPr id="31" name="TextBox 30"/>
           <p:cNvSpPr txBox="1"/>
           <p:nvPr/>
         </p:nvSpPr>
@@ -22780,7 +25075,7 @@
       </p:sp>
       <p:sp>
         <p:nvSpPr>
-          <p:cNvPr id="24" name="TextBox 23"/>
+          <p:cNvPr id="32" name="TextBox 31"/>
           <p:cNvSpPr txBox="1"/>
           <p:nvPr/>
         </p:nvSpPr>
@@ -23039,8 +25334,10 @@
           <a:solidFill>
             <a:srgbClr val="FFFFFF"/>
           </a:solidFill>
-          <a:ln>
-            <a:noFill/>
+          <a:ln w="12700">
+            <a:solidFill>
+              <a:srgbClr val="DDE1F2"/>
+            </a:solidFill>
           </a:ln>
           <a:effectLst/>
         </p:spPr>
@@ -23279,8 +25576,10 @@
           <a:solidFill>
             <a:srgbClr val="FFFFFF"/>
           </a:solidFill>
-          <a:ln>
-            <a:noFill/>
+          <a:ln w="12700">
+            <a:solidFill>
+              <a:srgbClr val="DDE1F2"/>
+            </a:solidFill>
           </a:ln>
           <a:effectLst/>
         </p:spPr>
@@ -23519,8 +25818,10 @@
           <a:solidFill>
             <a:srgbClr val="FFFFFF"/>
           </a:solidFill>
-          <a:ln>
-            <a:noFill/>
+          <a:ln w="12700">
+            <a:solidFill>
+              <a:srgbClr val="DDE1F2"/>
+            </a:solidFill>
           </a:ln>
           <a:effectLst/>
         </p:spPr>
@@ -23759,8 +26060,10 @@
           <a:solidFill>
             <a:srgbClr val="FFFFFF"/>
           </a:solidFill>
-          <a:ln>
-            <a:noFill/>
+          <a:ln w="12700">
+            <a:solidFill>
+              <a:srgbClr val="DDE1F2"/>
+            </a:solidFill>
           </a:ln>
           <a:effectLst/>
         </p:spPr>
@@ -25129,8 +27432,10 @@
           <a:solidFill>
             <a:srgbClr val="FFFFFF"/>
           </a:solidFill>
-          <a:ln>
-            <a:noFill/>
+          <a:ln w="12700">
+            <a:solidFill>
+              <a:srgbClr val="DDE1F2"/>
+            </a:solidFill>
           </a:ln>
           <a:effectLst/>
         </p:spPr>
@@ -25158,7 +27463,7 @@
       </p:sp>
       <p:pic>
         <p:nvPicPr>
-          <p:cNvPr id="8" name="Picture 7" descr="openjdk.png"/>
+          <p:cNvPr id="8" name="Picture 7" descr="java_cup.png"/>
           <p:cNvPicPr>
             <a:picLocks noChangeAspect="1"/>
           </p:cNvPicPr>
@@ -25214,7 +27519,7 @@
                 </a:solidFill>
                 <a:latin typeface="맑은 고딕"/>
               </a:rPr>
-              <a:t>Java 17</a:t>
+              <a:t>Java</a:t>
             </a:r>
           </a:p>
         </p:txBody>
@@ -25238,8 +27543,10 @@
           <a:solidFill>
             <a:srgbClr val="FFFFFF"/>
           </a:solidFill>
-          <a:ln>
-            <a:noFill/>
+          <a:ln w="12700">
+            <a:solidFill>
+              <a:srgbClr val="DDE1F2"/>
+            </a:solidFill>
           </a:ln>
           <a:effectLst/>
         </p:spPr>
@@ -25347,8 +27654,10 @@
           <a:solidFill>
             <a:srgbClr val="FFFFFF"/>
           </a:solidFill>
-          <a:ln>
-            <a:noFill/>
+          <a:ln w="12700">
+            <a:solidFill>
+              <a:srgbClr val="DDE1F2"/>
+            </a:solidFill>
           </a:ln>
           <a:effectLst/>
         </p:spPr>
@@ -25456,8 +27765,10 @@
           <a:solidFill>
             <a:srgbClr val="FFFFFF"/>
           </a:solidFill>
-          <a:ln>
-            <a:noFill/>
+          <a:ln w="12700">
+            <a:solidFill>
+              <a:srgbClr val="DDE1F2"/>
+            </a:solidFill>
           </a:ln>
           <a:effectLst/>
         </p:spPr>
@@ -25565,8 +27876,10 @@
           <a:solidFill>
             <a:srgbClr val="FFFFFF"/>
           </a:solidFill>
-          <a:ln>
-            <a:noFill/>
+          <a:ln w="12700">
+            <a:solidFill>
+              <a:srgbClr val="DDE1F2"/>
+            </a:solidFill>
           </a:ln>
           <a:effectLst/>
         </p:spPr>
@@ -25650,7 +27963,7 @@
                 </a:solidFill>
                 <a:latin typeface="맑은 고딕"/>
               </a:rPr>
-              <a:t>Spring Boot 3.3</a:t>
+              <a:t>Spring Boot</a:t>
             </a:r>
           </a:p>
         </p:txBody>
@@ -25674,8 +27987,10 @@
           <a:solidFill>
             <a:srgbClr val="FFFFFF"/>
           </a:solidFill>
-          <a:ln>
-            <a:noFill/>
+          <a:ln w="12700">
+            <a:solidFill>
+              <a:srgbClr val="DDE1F2"/>
+            </a:solidFill>
           </a:ln>
           <a:effectLst/>
         </p:spPr>
@@ -25783,8 +28098,10 @@
           <a:solidFill>
             <a:srgbClr val="FFFFFF"/>
           </a:solidFill>
-          <a:ln>
-            <a:noFill/>
+          <a:ln w="12700">
+            <a:solidFill>
+              <a:srgbClr val="DDE1F2"/>
+            </a:solidFill>
           </a:ln>
           <a:effectLst/>
         </p:spPr>
@@ -25892,8 +28209,10 @@
           <a:solidFill>
             <a:srgbClr val="FFFFFF"/>
           </a:solidFill>
-          <a:ln>
-            <a:noFill/>
+          <a:ln w="12700">
+            <a:solidFill>
+              <a:srgbClr val="DDE1F2"/>
+            </a:solidFill>
           </a:ln>
           <a:effectLst/>
         </p:spPr>
@@ -26001,8 +28320,10 @@
           <a:solidFill>
             <a:srgbClr val="FFFFFF"/>
           </a:solidFill>
-          <a:ln>
-            <a:noFill/>
+          <a:ln w="12700">
+            <a:solidFill>
+              <a:srgbClr val="DDE1F2"/>
+            </a:solidFill>
           </a:ln>
           <a:effectLst/>
         </p:spPr>
@@ -26110,8 +28431,10 @@
           <a:solidFill>
             <a:srgbClr val="FFFFFF"/>
           </a:solidFill>
-          <a:ln>
-            <a:noFill/>
+          <a:ln w="12700">
+            <a:solidFill>
+              <a:srgbClr val="DDE1F2"/>
+            </a:solidFill>
           </a:ln>
           <a:effectLst/>
         </p:spPr>
@@ -26219,8 +28542,10 @@
           <a:solidFill>
             <a:srgbClr val="FFFFFF"/>
           </a:solidFill>
-          <a:ln>
-            <a:noFill/>
+          <a:ln w="12700">
+            <a:solidFill>
+              <a:srgbClr val="DDE1F2"/>
+            </a:solidFill>
           </a:ln>
           <a:effectLst/>
         </p:spPr>
@@ -26328,8 +28653,10 @@
           <a:solidFill>
             <a:srgbClr val="FFFFFF"/>
           </a:solidFill>
-          <a:ln>
-            <a:noFill/>
+          <a:ln w="12700">
+            <a:solidFill>
+              <a:srgbClr val="DDE1F2"/>
+            </a:solidFill>
           </a:ln>
           <a:effectLst/>
         </p:spPr>
@@ -27011,18 +29338,20 @@
         <p:spPr>
           <a:xfrm>
             <a:off x="502920" y="1645920"/>
-            <a:ext cx="3657600" cy="2377440"/>
+            <a:ext cx="3657600" cy="3931920"/>
           </a:xfrm>
           <a:prstGeom prst="roundRect">
             <a:avLst>
-              <a:gd name="adj" fmla="val 10000"/>
+              <a:gd name="adj" fmla="val 8000"/>
             </a:avLst>
           </a:prstGeom>
           <a:solidFill>
             <a:srgbClr val="FFFFFF"/>
           </a:solidFill>
-          <a:ln>
-            <a:noFill/>
+          <a:ln w="12700">
+            <a:solidFill>
+              <a:srgbClr val="DDE1F2"/>
+            </a:solidFill>
           </a:ln>
           <a:effectLst/>
         </p:spPr>
@@ -27064,8 +29393,8 @@
         </p:blipFill>
         <p:spPr>
           <a:xfrm>
-            <a:off x="1709928" y="1901952"/>
-            <a:ext cx="1243584" cy="1243584"/>
+            <a:off x="2048256" y="1874519"/>
+            <a:ext cx="566928" cy="566928"/>
           </a:xfrm>
           <a:prstGeom prst="rect">
             <a:avLst/>
@@ -27080,8 +29409,8 @@
         </p:nvSpPr>
         <p:spPr>
           <a:xfrm>
-            <a:off x="594360" y="3255264"/>
-            <a:ext cx="3474720" cy="457200"/>
+            <a:off x="640080" y="2578608"/>
+            <a:ext cx="3383280" cy="365760"/>
           </a:xfrm>
           <a:prstGeom prst="rect">
             <a:avLst/>
@@ -27119,8 +29448,8 @@
         </p:nvSpPr>
         <p:spPr>
           <a:xfrm>
-            <a:off x="594360" y="3675888"/>
-            <a:ext cx="3474720" cy="457200"/>
+            <a:off x="640080" y="2999232"/>
+            <a:ext cx="3383280" cy="594360"/>
           </a:xfrm>
           <a:prstGeom prst="rect">
             <a:avLst/>
@@ -27135,7 +29464,7 @@
           <a:p>
             <a:pPr algn="ctr">
               <a:lnSpc>
-                <a:spcPct val="125000"/>
+                <a:spcPct val="130000"/>
               </a:lnSpc>
             </a:pPr>
             <a:r>
@@ -27151,7 +29480,7 @@
           <a:p>
             <a:pPr algn="ctr">
               <a:lnSpc>
-                <a:spcPct val="125000"/>
+                <a:spcPct val="130000"/>
               </a:lnSpc>
             </a:pPr>
             <a:r>
@@ -27168,22 +29497,20 @@
       </p:sp>
       <p:sp>
         <p:nvSpPr>
-          <p:cNvPr id="11" name="Rounded Rectangle 10"/>
+          <p:cNvPr id="11" name="Rectangle 10"/>
           <p:cNvSpPr/>
           <p:nvPr/>
         </p:nvSpPr>
         <p:spPr>
           <a:xfrm>
-            <a:off x="4297680" y="1645920"/>
-            <a:ext cx="3657600" cy="2377440"/>
-          </a:xfrm>
-          <a:prstGeom prst="roundRect">
-            <a:avLst>
-              <a:gd name="adj" fmla="val 10000"/>
-            </a:avLst>
+            <a:off x="795528" y="3657600"/>
+            <a:ext cx="3072384" cy="16510"/>
+          </a:xfrm>
+          <a:prstGeom prst="rect">
+            <a:avLst/>
           </a:prstGeom>
           <a:solidFill>
-            <a:srgbClr val="FFFFFF"/>
+            <a:srgbClr val="ECEEF6"/>
           </a:solidFill>
           <a:ln>
             <a:noFill/>
@@ -27212,9 +29539,137 @@
           </a:p>
         </p:txBody>
       </p:sp>
+      <p:sp>
+        <p:nvSpPr>
+          <p:cNvPr id="12" name="TextBox 11"/>
+          <p:cNvSpPr txBox="1"/>
+          <p:nvPr/>
+        </p:nvSpPr>
+        <p:spPr>
+          <a:xfrm>
+            <a:off x="832104" y="3886200"/>
+            <a:ext cx="3017520" cy="1554480"/>
+          </a:xfrm>
+          <a:prstGeom prst="rect">
+            <a:avLst/>
+          </a:prstGeom>
+          <a:noFill/>
+        </p:spPr>
+        <p:txBody>
+          <a:bodyPr wrap="square" anchor="t" lIns="0" rIns="0">
+            <a:spAutoFit/>
+          </a:bodyPr>
+          <a:lstStyle/>
+          <a:p>
+            <a:pPr marL="0" indent="0">
+              <a:lnSpc>
+                <a:spcPct val="130000"/>
+              </a:lnSpc>
+              <a:spcAft>
+                <a:spcPts val="1800"/>
+              </a:spcAft>
+            </a:pPr>
+            <a:r>
+              <a:rPr sz="1060" b="1">
+                <a:solidFill>
+                  <a:srgbClr val="26283A"/>
+                </a:solidFill>
+                <a:latin typeface="맑은 고딕"/>
+              </a:rPr>
+              <a:t>●  행사 기간만 임시 카메라·구역 등록</a:t>
+            </a:r>
+          </a:p>
+          <a:p>
+            <a:pPr marL="0" indent="0">
+              <a:lnSpc>
+                <a:spcPct val="130000"/>
+              </a:lnSpc>
+              <a:spcAft>
+                <a:spcPts val="1800"/>
+              </a:spcAft>
+            </a:pPr>
+            <a:r>
+              <a:rPr sz="1060" b="1">
+                <a:solidFill>
+                  <a:srgbClr val="26283A"/>
+                </a:solidFill>
+                <a:latin typeface="맑은 고딕"/>
+              </a:rPr>
+              <a:t>●  혼잡 임계치 초과 시 자동 경보</a:t>
+            </a:r>
+          </a:p>
+          <a:p>
+            <a:pPr marL="0" indent="0">
+              <a:lnSpc>
+                <a:spcPct val="130000"/>
+              </a:lnSpc>
+              <a:spcAft>
+                <a:spcPts val="1800"/>
+              </a:spcAft>
+            </a:pPr>
+            <a:r>
+              <a:rPr sz="1060" b="1">
+                <a:solidFill>
+                  <a:srgbClr val="26283A"/>
+                </a:solidFill>
+                <a:latin typeface="맑은 고딕"/>
+              </a:rPr>
+              <a:t>●  행사 종료 후 구역·캠 비활성화</a:t>
+            </a:r>
+          </a:p>
+        </p:txBody>
+      </p:sp>
+      <p:sp>
+        <p:nvSpPr>
+          <p:cNvPr id="13" name="Rounded Rectangle 12"/>
+          <p:cNvSpPr/>
+          <p:nvPr/>
+        </p:nvSpPr>
+        <p:spPr>
+          <a:xfrm>
+            <a:off x="4251960" y="1645920"/>
+            <a:ext cx="3657600" cy="3931920"/>
+          </a:xfrm>
+          <a:prstGeom prst="roundRect">
+            <a:avLst>
+              <a:gd name="adj" fmla="val 8000"/>
+            </a:avLst>
+          </a:prstGeom>
+          <a:solidFill>
+            <a:srgbClr val="FFFFFF"/>
+          </a:solidFill>
+          <a:ln w="12700">
+            <a:solidFill>
+              <a:srgbClr val="DDE1F2"/>
+            </a:solidFill>
+          </a:ln>
+          <a:effectLst/>
+        </p:spPr>
+        <p:style>
+          <a:lnRef idx="1">
+            <a:schemeClr val="accent1"/>
+          </a:lnRef>
+          <a:fillRef idx="3">
+            <a:schemeClr val="accent1"/>
+          </a:fillRef>
+          <a:effectRef idx="2">
+            <a:schemeClr val="accent1"/>
+          </a:effectRef>
+          <a:fontRef idx="minor">
+            <a:schemeClr val="lt1"/>
+          </a:fontRef>
+        </p:style>
+        <p:txBody>
+          <a:bodyPr rtlCol="0" anchor="ctr"/>
+          <a:lstStyle/>
+          <a:p>
+            <a:pPr algn="ctr"/>
+          </a:p>
+        </p:txBody>
+      </p:sp>
       <p:pic>
         <p:nvPicPr>
-          <p:cNvPr id="12" name="Picture 11" descr="browser.png"/>
+          <p:cNvPr id="14" name="Picture 13" descr="browser.png"/>
           <p:cNvPicPr>
             <a:picLocks noChangeAspect="1"/>
           </p:cNvPicPr>
@@ -27228,8 +29683,8 @@
         </p:blipFill>
         <p:spPr>
           <a:xfrm>
-            <a:off x="5504688" y="1901952"/>
-            <a:ext cx="1243584" cy="1243584"/>
+            <a:off x="5797296" y="1874519"/>
+            <a:ext cx="566928" cy="566928"/>
           </a:xfrm>
           <a:prstGeom prst="rect">
             <a:avLst/>
@@ -27238,14 +29693,14 @@
       </p:pic>
       <p:sp>
         <p:nvSpPr>
-          <p:cNvPr id="13" name="TextBox 12"/>
-          <p:cNvSpPr txBox="1"/>
-          <p:nvPr/>
-        </p:nvSpPr>
-        <p:spPr>
-          <a:xfrm>
-            <a:off x="4389120" y="3255264"/>
-            <a:ext cx="3474720" cy="457200"/>
+          <p:cNvPr id="15" name="TextBox 14"/>
+          <p:cNvSpPr txBox="1"/>
+          <p:nvPr/>
+        </p:nvSpPr>
+        <p:spPr>
+          <a:xfrm>
+            <a:off x="4389120" y="2578608"/>
+            <a:ext cx="3383280" cy="365760"/>
           </a:xfrm>
           <a:prstGeom prst="rect">
             <a:avLst/>
@@ -27277,14 +29732,14 @@
       </p:sp>
       <p:sp>
         <p:nvSpPr>
-          <p:cNvPr id="14" name="TextBox 13"/>
-          <p:cNvSpPr txBox="1"/>
-          <p:nvPr/>
-        </p:nvSpPr>
-        <p:spPr>
-          <a:xfrm>
-            <a:off x="4389120" y="3675888"/>
-            <a:ext cx="3474720" cy="457200"/>
+          <p:cNvPr id="16" name="TextBox 15"/>
+          <p:cNvSpPr txBox="1"/>
+          <p:nvPr/>
+        </p:nvSpPr>
+        <p:spPr>
+          <a:xfrm>
+            <a:off x="4389120" y="2999232"/>
+            <a:ext cx="3383280" cy="594360"/>
           </a:xfrm>
           <a:prstGeom prst="rect">
             <a:avLst/>
@@ -27299,7 +29754,7 @@
           <a:p>
             <a:pPr algn="ctr">
               <a:lnSpc>
-                <a:spcPct val="125000"/>
+                <a:spcPct val="130000"/>
               </a:lnSpc>
             </a:pPr>
             <a:r>
@@ -27315,7 +29770,7 @@
           <a:p>
             <a:pPr algn="ctr">
               <a:lnSpc>
-                <a:spcPct val="125000"/>
+                <a:spcPct val="130000"/>
               </a:lnSpc>
             </a:pPr>
             <a:r>
@@ -27332,22 +29787,20 @@
       </p:sp>
       <p:sp>
         <p:nvSpPr>
-          <p:cNvPr id="15" name="Rounded Rectangle 14"/>
+          <p:cNvPr id="17" name="Rectangle 16"/>
           <p:cNvSpPr/>
           <p:nvPr/>
         </p:nvSpPr>
         <p:spPr>
           <a:xfrm>
-            <a:off x="8092440" y="1645920"/>
-            <a:ext cx="3657600" cy="2377440"/>
-          </a:xfrm>
-          <a:prstGeom prst="roundRect">
-            <a:avLst>
-              <a:gd name="adj" fmla="val 10000"/>
-            </a:avLst>
+            <a:off x="4544568" y="3657600"/>
+            <a:ext cx="3072384" cy="16510"/>
+          </a:xfrm>
+          <a:prstGeom prst="rect">
+            <a:avLst/>
           </a:prstGeom>
           <a:solidFill>
-            <a:srgbClr val="FFFFFF"/>
+            <a:srgbClr val="ECEEF6"/>
           </a:solidFill>
           <a:ln>
             <a:noFill/>
@@ -27376,9 +29829,137 @@
           </a:p>
         </p:txBody>
       </p:sp>
+      <p:sp>
+        <p:nvSpPr>
+          <p:cNvPr id="18" name="TextBox 17"/>
+          <p:cNvSpPr txBox="1"/>
+          <p:nvPr/>
+        </p:nvSpPr>
+        <p:spPr>
+          <a:xfrm>
+            <a:off x="4581144" y="3886200"/>
+            <a:ext cx="3017520" cy="1554480"/>
+          </a:xfrm>
+          <a:prstGeom prst="rect">
+            <a:avLst/>
+          </a:prstGeom>
+          <a:noFill/>
+        </p:spPr>
+        <p:txBody>
+          <a:bodyPr wrap="square" anchor="t" lIns="0" rIns="0">
+            <a:spAutoFit/>
+          </a:bodyPr>
+          <a:lstStyle/>
+          <a:p>
+            <a:pPr marL="0" indent="0">
+              <a:lnSpc>
+                <a:spcPct val="130000"/>
+              </a:lnSpc>
+              <a:spcAft>
+                <a:spcPts val="1800"/>
+              </a:spcAft>
+            </a:pPr>
+            <a:r>
+              <a:rPr sz="1060" b="1">
+                <a:solidFill>
+                  <a:srgbClr val="26283A"/>
+                </a:solidFill>
+                <a:latin typeface="맑은 고딕"/>
+              </a:rPr>
+              <a:t>●  구역별 실시간 인원 추이 확인</a:t>
+            </a:r>
+          </a:p>
+          <a:p>
+            <a:pPr marL="0" indent="0">
+              <a:lnSpc>
+                <a:spcPct val="130000"/>
+              </a:lnSpc>
+              <a:spcAft>
+                <a:spcPts val="1800"/>
+              </a:spcAft>
+            </a:pPr>
+            <a:r>
+              <a:rPr sz="1060" b="1">
+                <a:solidFill>
+                  <a:srgbClr val="26283A"/>
+                </a:solidFill>
+                <a:latin typeface="맑은 고딕"/>
+              </a:rPr>
+              <a:t>●  피크 시간대 TOP3 자동 집계</a:t>
+            </a:r>
+          </a:p>
+          <a:p>
+            <a:pPr marL="0" indent="0">
+              <a:lnSpc>
+                <a:spcPct val="130000"/>
+              </a:lnSpc>
+              <a:spcAft>
+                <a:spcPts val="1800"/>
+              </a:spcAft>
+            </a:pPr>
+            <a:r>
+              <a:rPr sz="1060" b="1">
+                <a:solidFill>
+                  <a:srgbClr val="26283A"/>
+                </a:solidFill>
+                <a:latin typeface="맑은 고딕"/>
+              </a:rPr>
+              <a:t>●  매장·구역 단위로 세분화해 관제</a:t>
+            </a:r>
+          </a:p>
+        </p:txBody>
+      </p:sp>
+      <p:sp>
+        <p:nvSpPr>
+          <p:cNvPr id="19" name="Rounded Rectangle 18"/>
+          <p:cNvSpPr/>
+          <p:nvPr/>
+        </p:nvSpPr>
+        <p:spPr>
+          <a:xfrm>
+            <a:off x="8001000" y="1645920"/>
+            <a:ext cx="3657600" cy="3931920"/>
+          </a:xfrm>
+          <a:prstGeom prst="roundRect">
+            <a:avLst>
+              <a:gd name="adj" fmla="val 8000"/>
+            </a:avLst>
+          </a:prstGeom>
+          <a:solidFill>
+            <a:srgbClr val="FFFFFF"/>
+          </a:solidFill>
+          <a:ln w="12700">
+            <a:solidFill>
+              <a:srgbClr val="DDE1F2"/>
+            </a:solidFill>
+          </a:ln>
+          <a:effectLst/>
+        </p:spPr>
+        <p:style>
+          <a:lnRef idx="1">
+            <a:schemeClr val="accent1"/>
+          </a:lnRef>
+          <a:fillRef idx="3">
+            <a:schemeClr val="accent1"/>
+          </a:fillRef>
+          <a:effectRef idx="2">
+            <a:schemeClr val="accent1"/>
+          </a:effectRef>
+          <a:fontRef idx="minor">
+            <a:schemeClr val="lt1"/>
+          </a:fontRef>
+        </p:style>
+        <p:txBody>
+          <a:bodyPr rtlCol="0" anchor="ctr"/>
+          <a:lstStyle/>
+          <a:p>
+            <a:pPr algn="ctr"/>
+          </a:p>
+        </p:txBody>
+      </p:sp>
       <p:pic>
         <p:nvPicPr>
-          <p:cNvPr id="16" name="Picture 15" descr="bulb.png"/>
+          <p:cNvPr id="20" name="Picture 19" descr="bulb.png"/>
           <p:cNvPicPr>
             <a:picLocks noChangeAspect="1"/>
           </p:cNvPicPr>
@@ -27392,8 +29973,8 @@
         </p:blipFill>
         <p:spPr>
           <a:xfrm>
-            <a:off x="9299448" y="1901952"/>
-            <a:ext cx="1243584" cy="1243584"/>
+            <a:off x="9546336" y="1874519"/>
+            <a:ext cx="566928" cy="566928"/>
           </a:xfrm>
           <a:prstGeom prst="rect">
             <a:avLst/>
@@ -27402,14 +29983,14 @@
       </p:pic>
       <p:sp>
         <p:nvSpPr>
-          <p:cNvPr id="17" name="TextBox 16"/>
-          <p:cNvSpPr txBox="1"/>
-          <p:nvPr/>
-        </p:nvSpPr>
-        <p:spPr>
-          <a:xfrm>
-            <a:off x="8183880" y="3255264"/>
-            <a:ext cx="3474720" cy="457200"/>
+          <p:cNvPr id="21" name="TextBox 20"/>
+          <p:cNvSpPr txBox="1"/>
+          <p:nvPr/>
+        </p:nvSpPr>
+        <p:spPr>
+          <a:xfrm>
+            <a:off x="8138160" y="2578608"/>
+            <a:ext cx="3383280" cy="365760"/>
           </a:xfrm>
           <a:prstGeom prst="rect">
             <a:avLst/>
@@ -27441,14 +30022,14 @@
       </p:sp>
       <p:sp>
         <p:nvSpPr>
-          <p:cNvPr id="18" name="TextBox 17"/>
-          <p:cNvSpPr txBox="1"/>
-          <p:nvPr/>
-        </p:nvSpPr>
-        <p:spPr>
-          <a:xfrm>
-            <a:off x="8183880" y="3675888"/>
-            <a:ext cx="3474720" cy="457200"/>
+          <p:cNvPr id="22" name="TextBox 21"/>
+          <p:cNvSpPr txBox="1"/>
+          <p:nvPr/>
+        </p:nvSpPr>
+        <p:spPr>
+          <a:xfrm>
+            <a:off x="8138160" y="2999232"/>
+            <a:ext cx="3383280" cy="594360"/>
           </a:xfrm>
           <a:prstGeom prst="rect">
             <a:avLst/>
@@ -27463,7 +30044,7 @@
           <a:p>
             <a:pPr algn="ctr">
               <a:lnSpc>
-                <a:spcPct val="125000"/>
+                <a:spcPct val="130000"/>
               </a:lnSpc>
             </a:pPr>
             <a:r>
@@ -27479,7 +30060,7 @@
           <a:p>
             <a:pPr algn="ctr">
               <a:lnSpc>
-                <a:spcPct val="125000"/>
+                <a:spcPct val="130000"/>
               </a:lnSpc>
             </a:pPr>
             <a:r>
@@ -27496,7 +30077,131 @@
       </p:sp>
       <p:sp>
         <p:nvSpPr>
-          <p:cNvPr id="19" name="TextBox 18"/>
+          <p:cNvPr id="23" name="Rectangle 22"/>
+          <p:cNvSpPr/>
+          <p:nvPr/>
+        </p:nvSpPr>
+        <p:spPr>
+          <a:xfrm>
+            <a:off x="8293608" y="3657600"/>
+            <a:ext cx="3072384" cy="16510"/>
+          </a:xfrm>
+          <a:prstGeom prst="rect">
+            <a:avLst/>
+          </a:prstGeom>
+          <a:solidFill>
+            <a:srgbClr val="ECEEF6"/>
+          </a:solidFill>
+          <a:ln>
+            <a:noFill/>
+          </a:ln>
+          <a:effectLst/>
+        </p:spPr>
+        <p:style>
+          <a:lnRef idx="1">
+            <a:schemeClr val="accent1"/>
+          </a:lnRef>
+          <a:fillRef idx="3">
+            <a:schemeClr val="accent1"/>
+          </a:fillRef>
+          <a:effectRef idx="2">
+            <a:schemeClr val="accent1"/>
+          </a:effectRef>
+          <a:fontRef idx="minor">
+            <a:schemeClr val="lt1"/>
+          </a:fontRef>
+        </p:style>
+        <p:txBody>
+          <a:bodyPr rtlCol="0" anchor="ctr"/>
+          <a:lstStyle/>
+          <a:p>
+            <a:pPr algn="ctr"/>
+          </a:p>
+        </p:txBody>
+      </p:sp>
+      <p:sp>
+        <p:nvSpPr>
+          <p:cNvPr id="24" name="TextBox 23"/>
+          <p:cNvSpPr txBox="1"/>
+          <p:nvPr/>
+        </p:nvSpPr>
+        <p:spPr>
+          <a:xfrm>
+            <a:off x="8330184" y="3886200"/>
+            <a:ext cx="3017520" cy="1554480"/>
+          </a:xfrm>
+          <a:prstGeom prst="rect">
+            <a:avLst/>
+          </a:prstGeom>
+          <a:noFill/>
+        </p:spPr>
+        <p:txBody>
+          <a:bodyPr wrap="square" anchor="t" lIns="0" rIns="0">
+            <a:spAutoFit/>
+          </a:bodyPr>
+          <a:lstStyle/>
+          <a:p>
+            <a:pPr marL="0" indent="0">
+              <a:lnSpc>
+                <a:spcPct val="130000"/>
+              </a:lnSpc>
+              <a:spcAft>
+                <a:spcPts val="1800"/>
+              </a:spcAft>
+            </a:pPr>
+            <a:r>
+              <a:rPr sz="1060" b="1">
+                <a:solidFill>
+                  <a:srgbClr val="26283A"/>
+                </a:solidFill>
+                <a:latin typeface="맑은 고딕"/>
+              </a:rPr>
+              <a:t>●  상용 라이선스 비용 없이 구축</a:t>
+            </a:r>
+          </a:p>
+          <a:p>
+            <a:pPr marL="0" indent="0">
+              <a:lnSpc>
+                <a:spcPct val="130000"/>
+              </a:lnSpc>
+              <a:spcAft>
+                <a:spcPts val="1800"/>
+              </a:spcAft>
+            </a:pPr>
+            <a:r>
+              <a:rPr sz="1060" b="1">
+                <a:solidFill>
+                  <a:srgbClr val="26283A"/>
+                </a:solidFill>
+                <a:latin typeface="맑은 고딕"/>
+              </a:rPr>
+              <a:t>●  MySQL+Spring Boot로 자체 호스팅</a:t>
+            </a:r>
+          </a:p>
+          <a:p>
+            <a:pPr marL="0" indent="0">
+              <a:lnSpc>
+                <a:spcPct val="130000"/>
+              </a:lnSpc>
+              <a:spcAft>
+                <a:spcPts val="1800"/>
+              </a:spcAft>
+            </a:pPr>
+            <a:r>
+              <a:rPr sz="1060" b="1">
+                <a:solidFill>
+                  <a:srgbClr val="26283A"/>
+                </a:solidFill>
+                <a:latin typeface="맑은 고딕"/>
+              </a:rPr>
+              <a:t>●  필요한 기능을 직접 확장 가능</a:t>
+            </a:r>
+          </a:p>
+        </p:txBody>
+      </p:sp>
+      <p:sp>
+        <p:nvSpPr>
+          <p:cNvPr id="25" name="TextBox 24"/>
           <p:cNvSpPr txBox="1"/>
           <p:nvPr/>
         </p:nvSpPr>
@@ -27535,7 +30240,7 @@
       </p:sp>
       <p:sp>
         <p:nvSpPr>
-          <p:cNvPr id="20" name="TextBox 19"/>
+          <p:cNvPr id="26" name="TextBox 25"/>
           <p:cNvSpPr txBox="1"/>
           <p:nvPr/>
         </p:nvSpPr>

--- a/docs/deliverables/발표자료.pptx
+++ b/docs/deliverables/발표자료.pptx
@@ -12986,7 +12986,7 @@
         <p:spPr>
           <a:xfrm>
             <a:off x="502920" y="1417320"/>
-            <a:ext cx="3657600" cy="292608"/>
+            <a:ext cx="7315200" cy="292608"/>
           </a:xfrm>
           <a:prstGeom prst="rect">
             <a:avLst/>
@@ -13005,13 +13005,13 @@
               </a:lnSpc>
             </a:pPr>
             <a:r>
-              <a:rPr sz="1300" b="1" i="0">
+              <a:rPr sz="1400" b="1" i="0">
                 <a:solidFill>
                   <a:srgbClr val="1FA96B"/>
                 </a:solidFill>
                 <a:latin typeface="맑은 고딕"/>
               </a:rPr>
-              <a:t>✓ 완료 (10)</a:t>
+              <a:t>✓ 설계된 기능 전부 구현 완료 (13)</a:t>
             </a:r>
           </a:p>
         </p:txBody>
@@ -13024,8 +13024,8 @@
         </p:nvSpPr>
         <p:spPr>
           <a:xfrm>
-            <a:off x="502920" y="1755648"/>
-            <a:ext cx="2299716" cy="365760"/>
+            <a:off x="502920" y="1874519"/>
+            <a:ext cx="2299716" cy="420624"/>
           </a:xfrm>
           <a:prstGeom prst="roundRect">
             <a:avLst>
@@ -13070,8 +13070,8 @@
         </p:nvSpPr>
         <p:spPr>
           <a:xfrm>
-            <a:off x="502920" y="1755648"/>
-            <a:ext cx="2299716" cy="365760"/>
+            <a:off x="502920" y="1874519"/>
+            <a:ext cx="2299716" cy="420624"/>
           </a:xfrm>
           <a:prstGeom prst="rect">
             <a:avLst/>
@@ -13086,7 +13086,7 @@
           <a:p>
             <a:pPr algn="ctr"/>
             <a:r>
-              <a:rPr sz="1050" b="1">
+              <a:rPr sz="1150" b="1">
                 <a:solidFill>
                   <a:srgbClr val="1FA96B"/>
                 </a:solidFill>
@@ -13105,8 +13105,8 @@
         </p:nvSpPr>
         <p:spPr>
           <a:xfrm>
-            <a:off x="2912364" y="1755648"/>
-            <a:ext cx="2299716" cy="365760"/>
+            <a:off x="2930652" y="1874519"/>
+            <a:ext cx="2299716" cy="420624"/>
           </a:xfrm>
           <a:prstGeom prst="roundRect">
             <a:avLst>
@@ -13151,8 +13151,8 @@
         </p:nvSpPr>
         <p:spPr>
           <a:xfrm>
-            <a:off x="2912364" y="1755648"/>
-            <a:ext cx="2299716" cy="365760"/>
+            <a:off x="2930652" y="1874519"/>
+            <a:ext cx="2299716" cy="420624"/>
           </a:xfrm>
           <a:prstGeom prst="rect">
             <a:avLst/>
@@ -13167,7 +13167,7 @@
           <a:p>
             <a:pPr algn="ctr"/>
             <a:r>
-              <a:rPr sz="1050" b="1">
+              <a:rPr sz="1150" b="1">
                 <a:solidFill>
                   <a:srgbClr val="1FA96B"/>
                 </a:solidFill>
@@ -13186,8 +13186,8 @@
         </p:nvSpPr>
         <p:spPr>
           <a:xfrm>
-            <a:off x="5321808" y="1755648"/>
-            <a:ext cx="2724912" cy="365760"/>
+            <a:off x="5358384" y="1874519"/>
+            <a:ext cx="2724912" cy="420624"/>
           </a:xfrm>
           <a:prstGeom prst="roundRect">
             <a:avLst>
@@ -13232,8 +13232,8 @@
         </p:nvSpPr>
         <p:spPr>
           <a:xfrm>
-            <a:off x="5321808" y="1755648"/>
-            <a:ext cx="2724912" cy="365760"/>
+            <a:off x="5358384" y="1874519"/>
+            <a:ext cx="2724912" cy="420624"/>
           </a:xfrm>
           <a:prstGeom prst="rect">
             <a:avLst/>
@@ -13248,7 +13248,7 @@
           <a:p>
             <a:pPr algn="ctr"/>
             <a:r>
-              <a:rPr sz="1050" b="1">
+              <a:rPr sz="1150" b="1">
                 <a:solidFill>
                   <a:srgbClr val="1FA96B"/>
                 </a:solidFill>
@@ -13267,8 +13267,8 @@
         </p:nvSpPr>
         <p:spPr>
           <a:xfrm>
-            <a:off x="8156448" y="1755648"/>
-            <a:ext cx="2583180" cy="365760"/>
+            <a:off x="8211312" y="1874519"/>
+            <a:ext cx="2583180" cy="420624"/>
           </a:xfrm>
           <a:prstGeom prst="roundRect">
             <a:avLst>
@@ -13313,8 +13313,8 @@
         </p:nvSpPr>
         <p:spPr>
           <a:xfrm>
-            <a:off x="8156448" y="1755648"/>
-            <a:ext cx="2583180" cy="365760"/>
+            <a:off x="8211312" y="1874519"/>
+            <a:ext cx="2583180" cy="420624"/>
           </a:xfrm>
           <a:prstGeom prst="rect">
             <a:avLst/>
@@ -13329,7 +13329,7 @@
           <a:p>
             <a:pPr algn="ctr"/>
             <a:r>
-              <a:rPr sz="1050" b="1">
+              <a:rPr sz="1150" b="1">
                 <a:solidFill>
                   <a:srgbClr val="1FA96B"/>
                 </a:solidFill>
@@ -13348,8 +13348,8 @@
         </p:nvSpPr>
         <p:spPr>
           <a:xfrm>
-            <a:off x="502920" y="2194560"/>
-            <a:ext cx="2016252" cy="365760"/>
+            <a:off x="502920" y="2377439"/>
+            <a:ext cx="2016252" cy="420624"/>
           </a:xfrm>
           <a:prstGeom prst="roundRect">
             <a:avLst>
@@ -13394,8 +13394,8 @@
         </p:nvSpPr>
         <p:spPr>
           <a:xfrm>
-            <a:off x="502920" y="2194560"/>
-            <a:ext cx="2016252" cy="365760"/>
+            <a:off x="502920" y="2377439"/>
+            <a:ext cx="2016252" cy="420624"/>
           </a:xfrm>
           <a:prstGeom prst="rect">
             <a:avLst/>
@@ -13410,7 +13410,7 @@
           <a:p>
             <a:pPr algn="ctr"/>
             <a:r>
-              <a:rPr sz="1050" b="1">
+              <a:rPr sz="1150" b="1">
                 <a:solidFill>
                   <a:srgbClr val="1FA96B"/>
                 </a:solidFill>
@@ -13429,8 +13429,8 @@
         </p:nvSpPr>
         <p:spPr>
           <a:xfrm>
-            <a:off x="2628900" y="2194560"/>
-            <a:ext cx="2157984" cy="365760"/>
+            <a:off x="2647188" y="2377439"/>
+            <a:ext cx="2157984" cy="420624"/>
           </a:xfrm>
           <a:prstGeom prst="roundRect">
             <a:avLst>
@@ -13475,8 +13475,8 @@
         </p:nvSpPr>
         <p:spPr>
           <a:xfrm>
-            <a:off x="2628900" y="2194560"/>
-            <a:ext cx="2157984" cy="365760"/>
+            <a:off x="2647188" y="2377439"/>
+            <a:ext cx="2157984" cy="420624"/>
           </a:xfrm>
           <a:prstGeom prst="rect">
             <a:avLst/>
@@ -13491,7 +13491,7 @@
           <a:p>
             <a:pPr algn="ctr"/>
             <a:r>
-              <a:rPr sz="1050" b="1">
+              <a:rPr sz="1150" b="1">
                 <a:solidFill>
                   <a:srgbClr val="1FA96B"/>
                 </a:solidFill>
@@ -13510,8 +13510,8 @@
         </p:nvSpPr>
         <p:spPr>
           <a:xfrm>
-            <a:off x="4896612" y="2194560"/>
-            <a:ext cx="1449324" cy="365760"/>
+            <a:off x="4933188" y="2377439"/>
+            <a:ext cx="1449324" cy="420624"/>
           </a:xfrm>
           <a:prstGeom prst="roundRect">
             <a:avLst>
@@ -13556,8 +13556,8 @@
         </p:nvSpPr>
         <p:spPr>
           <a:xfrm>
-            <a:off x="4896612" y="2194560"/>
-            <a:ext cx="1449324" cy="365760"/>
+            <a:off x="4933188" y="2377439"/>
+            <a:ext cx="1449324" cy="420624"/>
           </a:xfrm>
           <a:prstGeom prst="rect">
             <a:avLst/>
@@ -13572,7 +13572,7 @@
           <a:p>
             <a:pPr algn="ctr"/>
             <a:r>
-              <a:rPr sz="1050" b="1">
+              <a:rPr sz="1150" b="1">
                 <a:solidFill>
                   <a:srgbClr val="1FA96B"/>
                 </a:solidFill>
@@ -13591,8 +13591,8 @@
         </p:nvSpPr>
         <p:spPr>
           <a:xfrm>
-            <a:off x="6455664" y="2194560"/>
-            <a:ext cx="2016252" cy="365760"/>
+            <a:off x="6510528" y="2377439"/>
+            <a:ext cx="2016252" cy="420624"/>
           </a:xfrm>
           <a:prstGeom prst="roundRect">
             <a:avLst>
@@ -13637,8 +13637,8 @@
         </p:nvSpPr>
         <p:spPr>
           <a:xfrm>
-            <a:off x="6455664" y="2194560"/>
-            <a:ext cx="2016252" cy="365760"/>
+            <a:off x="6510528" y="2377439"/>
+            <a:ext cx="2016252" cy="420624"/>
           </a:xfrm>
           <a:prstGeom prst="rect">
             <a:avLst/>
@@ -13653,7 +13653,7 @@
           <a:p>
             <a:pPr algn="ctr"/>
             <a:r>
-              <a:rPr sz="1050" b="1">
+              <a:rPr sz="1150" b="1">
                 <a:solidFill>
                   <a:srgbClr val="1FA96B"/>
                 </a:solidFill>
@@ -13672,8 +13672,8 @@
         </p:nvSpPr>
         <p:spPr>
           <a:xfrm>
-            <a:off x="8581644" y="2194560"/>
-            <a:ext cx="1165860" cy="365760"/>
+            <a:off x="8654796" y="2377439"/>
+            <a:ext cx="1165860" cy="420624"/>
           </a:xfrm>
           <a:prstGeom prst="roundRect">
             <a:avLst>
@@ -13718,8 +13718,8 @@
         </p:nvSpPr>
         <p:spPr>
           <a:xfrm>
-            <a:off x="8581644" y="2194560"/>
-            <a:ext cx="1165860" cy="365760"/>
+            <a:off x="8654796" y="2377439"/>
+            <a:ext cx="1165860" cy="420624"/>
           </a:xfrm>
           <a:prstGeom prst="rect">
             <a:avLst/>
@@ -13734,7 +13734,7 @@
           <a:p>
             <a:pPr algn="ctr"/>
             <a:r>
-              <a:rPr sz="1050" b="1">
+              <a:rPr sz="1150" b="1">
                 <a:solidFill>
                   <a:srgbClr val="1FA96B"/>
                 </a:solidFill>
@@ -13753,8 +13753,8 @@
         </p:nvSpPr>
         <p:spPr>
           <a:xfrm>
-            <a:off x="502920" y="2633472"/>
-            <a:ext cx="2299716" cy="365760"/>
+            <a:off x="502920" y="2880359"/>
+            <a:ext cx="2299716" cy="420624"/>
           </a:xfrm>
           <a:prstGeom prst="roundRect">
             <a:avLst>
@@ -13799,8 +13799,8 @@
         </p:nvSpPr>
         <p:spPr>
           <a:xfrm>
-            <a:off x="502920" y="2633472"/>
-            <a:ext cx="2299716" cy="365760"/>
+            <a:off x="502920" y="2880359"/>
+            <a:ext cx="2299716" cy="420624"/>
           </a:xfrm>
           <a:prstGeom prst="rect">
             <a:avLst/>
@@ -13815,7 +13815,7 @@
           <a:p>
             <a:pPr algn="ctr"/>
             <a:r>
-              <a:rPr sz="1050" b="1">
+              <a:rPr sz="1150" b="1">
                 <a:solidFill>
                   <a:srgbClr val="1FA96B"/>
                 </a:solidFill>
@@ -13828,53 +13828,14 @@
       </p:sp>
       <p:sp>
         <p:nvSpPr>
-          <p:cNvPr id="28" name="TextBox 27"/>
-          <p:cNvSpPr txBox="1"/>
-          <p:nvPr/>
-        </p:nvSpPr>
-        <p:spPr>
-          <a:xfrm>
-            <a:off x="502920" y="3291840"/>
-            <a:ext cx="3657600" cy="292608"/>
-          </a:xfrm>
-          <a:prstGeom prst="rect">
-            <a:avLst/>
-          </a:prstGeom>
-          <a:noFill/>
-        </p:spPr>
-        <p:txBody>
-          <a:bodyPr wrap="square" anchor="t" lIns="0" rIns="0" tIns="0" bIns="0">
-            <a:spAutoFit/>
-          </a:bodyPr>
-          <a:lstStyle/>
-          <a:p>
-            <a:pPr algn="l">
-              <a:lnSpc>
-                <a:spcPct val="115000"/>
-              </a:lnSpc>
-            </a:pPr>
-            <a:r>
-              <a:rPr sz="1300" b="1" i="0">
-                <a:solidFill>
-                  <a:srgbClr val="F28A3C"/>
-                </a:solidFill>
-                <a:latin typeface="맑은 고딕"/>
-              </a:rPr>
-              <a:t>◷ 설계 완료 · 구현 예정 (1)</a:t>
-            </a:r>
-          </a:p>
-        </p:txBody>
-      </p:sp>
-      <p:sp>
-        <p:nvSpPr>
-          <p:cNvPr id="29" name="Rounded Rectangle 28"/>
+          <p:cNvPr id="28" name="Rounded Rectangle 27"/>
           <p:cNvSpPr/>
           <p:nvPr/>
         </p:nvSpPr>
         <p:spPr>
           <a:xfrm>
-            <a:off x="502920" y="3657600"/>
-            <a:ext cx="2743200" cy="365760"/>
+            <a:off x="2930652" y="2880359"/>
+            <a:ext cx="1874519" cy="420624"/>
           </a:xfrm>
           <a:prstGeom prst="roundRect">
             <a:avLst>
@@ -13882,7 +13843,7 @@
             </a:avLst>
           </a:prstGeom>
           <a:solidFill>
-            <a:srgbClr val="FDECDA"/>
+            <a:srgbClr val="E2F7EC"/>
           </a:solidFill>
           <a:ln>
             <a:noFill/>
@@ -13913,14 +13874,14 @@
       </p:sp>
       <p:sp>
         <p:nvSpPr>
-          <p:cNvPr id="30" name="TextBox 29"/>
-          <p:cNvSpPr txBox="1"/>
-          <p:nvPr/>
-        </p:nvSpPr>
-        <p:spPr>
-          <a:xfrm>
-            <a:off x="502920" y="3657600"/>
-            <a:ext cx="2743200" cy="365760"/>
+          <p:cNvPr id="29" name="TextBox 28"/>
+          <p:cNvSpPr txBox="1"/>
+          <p:nvPr/>
+        </p:nvSpPr>
+        <p:spPr>
+          <a:xfrm>
+            <a:off x="2930652" y="2880359"/>
+            <a:ext cx="1874519" cy="420624"/>
           </a:xfrm>
           <a:prstGeom prst="rect">
             <a:avLst/>
@@ -13935,66 +13896,27 @@
           <a:p>
             <a:pPr algn="ctr"/>
             <a:r>
-              <a:rPr sz="1050" b="1">
-                <a:solidFill>
-                  <a:srgbClr val="F28A3C"/>
-                </a:solidFill>
-                <a:latin typeface="맑은 고딕"/>
-              </a:rPr>
-              <a:t>◷ 구역 간 이동 조회</a:t>
-            </a:r>
-          </a:p>
-        </p:txBody>
-      </p:sp>
-      <p:sp>
-        <p:nvSpPr>
-          <p:cNvPr id="31" name="TextBox 30"/>
-          <p:cNvSpPr txBox="1"/>
-          <p:nvPr/>
-        </p:nvSpPr>
-        <p:spPr>
-          <a:xfrm>
-            <a:off x="502920" y="4315968"/>
-            <a:ext cx="3657600" cy="292608"/>
-          </a:xfrm>
-          <a:prstGeom prst="rect">
-            <a:avLst/>
-          </a:prstGeom>
-          <a:noFill/>
-        </p:spPr>
-        <p:txBody>
-          <a:bodyPr wrap="square" anchor="t" lIns="0" rIns="0" tIns="0" bIns="0">
-            <a:spAutoFit/>
-          </a:bodyPr>
-          <a:lstStyle/>
-          <a:p>
-            <a:pPr algn="l">
-              <a:lnSpc>
-                <a:spcPct val="115000"/>
-              </a:lnSpc>
-            </a:pPr>
-            <a:r>
-              <a:rPr sz="1300" b="1" i="0">
-                <a:solidFill>
-                  <a:srgbClr val="E04B4B"/>
-                </a:solidFill>
-                <a:latin typeface="맑은 고딕"/>
-              </a:rPr>
-              <a:t>✕ 미구현 (2)</a:t>
-            </a:r>
-          </a:p>
-        </p:txBody>
-      </p:sp>
-      <p:sp>
-        <p:nvSpPr>
-          <p:cNvPr id="32" name="Rounded Rectangle 31"/>
+              <a:rPr sz="1150" b="1">
+                <a:solidFill>
+                  <a:srgbClr val="1FA96B"/>
+                </a:solidFill>
+                <a:latin typeface="맑은 고딕"/>
+              </a:rPr>
+              <a:t>✓ 구역 간 이동 조회</a:t>
+            </a:r>
+          </a:p>
+        </p:txBody>
+      </p:sp>
+      <p:sp>
+        <p:nvSpPr>
+          <p:cNvPr id="30" name="Rounded Rectangle 29"/>
           <p:cNvSpPr/>
           <p:nvPr/>
         </p:nvSpPr>
         <p:spPr>
           <a:xfrm>
-            <a:off x="502920" y="4681728"/>
-            <a:ext cx="1591056" cy="365760"/>
+            <a:off x="4933187" y="2880359"/>
+            <a:ext cx="1591056" cy="420624"/>
           </a:xfrm>
           <a:prstGeom prst="roundRect">
             <a:avLst>
@@ -14002,7 +13924,7 @@
             </a:avLst>
           </a:prstGeom>
           <a:solidFill>
-            <a:srgbClr val="FDE8E8"/>
+            <a:srgbClr val="E2F7EC"/>
           </a:solidFill>
           <a:ln>
             <a:noFill/>
@@ -14033,14 +13955,14 @@
       </p:sp>
       <p:sp>
         <p:nvSpPr>
-          <p:cNvPr id="33" name="TextBox 32"/>
-          <p:cNvSpPr txBox="1"/>
-          <p:nvPr/>
-        </p:nvSpPr>
-        <p:spPr>
-          <a:xfrm>
-            <a:off x="502920" y="4681728"/>
-            <a:ext cx="1591056" cy="365760"/>
+          <p:cNvPr id="31" name="TextBox 30"/>
+          <p:cNvSpPr txBox="1"/>
+          <p:nvPr/>
+        </p:nvSpPr>
+        <p:spPr>
+          <a:xfrm>
+            <a:off x="4933187" y="2880359"/>
+            <a:ext cx="1591056" cy="420624"/>
           </a:xfrm>
           <a:prstGeom prst="rect">
             <a:avLst/>
@@ -14055,27 +13977,27 @@
           <a:p>
             <a:pPr algn="ctr"/>
             <a:r>
-              <a:rPr sz="1050" b="1">
-                <a:solidFill>
-                  <a:srgbClr val="E04B4B"/>
-                </a:solidFill>
-                <a:latin typeface="맑은 고딕"/>
-              </a:rPr>
-              <a:t>✕ 비밀번호 재설정</a:t>
-            </a:r>
-          </a:p>
-        </p:txBody>
-      </p:sp>
-      <p:sp>
-        <p:nvSpPr>
-          <p:cNvPr id="34" name="Rounded Rectangle 33"/>
+              <a:rPr sz="1150" b="1">
+                <a:solidFill>
+                  <a:srgbClr val="1FA96B"/>
+                </a:solidFill>
+                <a:latin typeface="맑은 고딕"/>
+              </a:rPr>
+              <a:t>✓ 비밀번호 재설정</a:t>
+            </a:r>
+          </a:p>
+        </p:txBody>
+      </p:sp>
+      <p:sp>
+        <p:nvSpPr>
+          <p:cNvPr id="32" name="Rounded Rectangle 31"/>
           <p:cNvSpPr/>
           <p:nvPr/>
         </p:nvSpPr>
         <p:spPr>
           <a:xfrm>
-            <a:off x="2203704" y="4681728"/>
-            <a:ext cx="3008376" cy="365760"/>
+            <a:off x="6652259" y="2880359"/>
+            <a:ext cx="1591056" cy="420624"/>
           </a:xfrm>
           <a:prstGeom prst="roundRect">
             <a:avLst>
@@ -14083,7 +14005,7 @@
             </a:avLst>
           </a:prstGeom>
           <a:solidFill>
-            <a:srgbClr val="FDE8E8"/>
+            <a:srgbClr val="E2F7EC"/>
           </a:solidFill>
           <a:ln>
             <a:noFill/>
@@ -14114,14 +14036,14 @@
       </p:sp>
       <p:sp>
         <p:nvSpPr>
-          <p:cNvPr id="35" name="TextBox 34"/>
-          <p:cNvSpPr txBox="1"/>
-          <p:nvPr/>
-        </p:nvSpPr>
-        <p:spPr>
-          <a:xfrm>
-            <a:off x="2203704" y="4681728"/>
-            <a:ext cx="3008376" cy="365760"/>
+          <p:cNvPr id="33" name="TextBox 32"/>
+          <p:cNvSpPr txBox="1"/>
+          <p:nvPr/>
+        </p:nvSpPr>
+        <p:spPr>
+          <a:xfrm>
+            <a:off x="6652259" y="2880359"/>
+            <a:ext cx="1591056" cy="420624"/>
           </a:xfrm>
           <a:prstGeom prst="rect">
             <a:avLst/>
@@ -14136,38 +14058,40 @@
           <a:p>
             <a:pPr algn="ctr"/>
             <a:r>
-              <a:rPr sz="1050" b="1">
-                <a:solidFill>
-                  <a:srgbClr val="E04B4B"/>
-                </a:solidFill>
-                <a:latin typeface="맑은 고딕"/>
-              </a:rPr>
-              <a:t>✕ 관리자 간 관리 기능(acman)</a:t>
-            </a:r>
-          </a:p>
-        </p:txBody>
-      </p:sp>
-      <p:sp>
-        <p:nvSpPr>
-          <p:cNvPr id="36" name="Rounded Rectangle 35"/>
+              <a:rPr sz="1150" b="1">
+                <a:solidFill>
+                  <a:srgbClr val="1FA96B"/>
+                </a:solidFill>
+                <a:latin typeface="맑은 고딕"/>
+              </a:rPr>
+              <a:t>✓ 관리자 간 관리</a:t>
+            </a:r>
+          </a:p>
+        </p:txBody>
+      </p:sp>
+      <p:sp>
+        <p:nvSpPr>
+          <p:cNvPr id="34" name="Rounded Rectangle 33"/>
           <p:cNvSpPr/>
           <p:nvPr/>
         </p:nvSpPr>
         <p:spPr>
           <a:xfrm>
-            <a:off x="502920" y="5440680"/>
-            <a:ext cx="11201400" cy="621792"/>
+            <a:off x="502920" y="3749039"/>
+            <a:ext cx="11201400" cy="1371600"/>
           </a:xfrm>
           <a:prstGeom prst="roundRect">
             <a:avLst>
-              <a:gd name="adj" fmla="val 18000"/>
+              <a:gd name="adj" fmla="val 10000"/>
             </a:avLst>
           </a:prstGeom>
           <a:solidFill>
             <a:srgbClr val="EAECFC"/>
           </a:solidFill>
-          <a:ln>
-            <a:noFill/>
+          <a:ln w="12700">
+            <a:solidFill>
+              <a:srgbClr val="DDE1F2"/>
+            </a:solidFill>
           </a:ln>
           <a:effectLst/>
         </p:spPr>
@@ -14193,6 +14117,69 @@
           </a:p>
         </p:txBody>
       </p:sp>
+      <p:pic>
+        <p:nvPicPr>
+          <p:cNvPr id="35" name="Picture 34" descr="shield_check.png"/>
+          <p:cNvPicPr>
+            <a:picLocks noChangeAspect="1"/>
+          </p:cNvPicPr>
+          <p:nvPr/>
+        </p:nvPicPr>
+        <p:blipFill>
+          <a:blip r:embed="rId3"/>
+          <a:stretch>
+            <a:fillRect/>
+          </a:stretch>
+        </p:blipFill>
+        <p:spPr>
+          <a:xfrm>
+            <a:off x="822960" y="4023359"/>
+            <a:ext cx="822960" cy="822960"/>
+          </a:xfrm>
+          <a:prstGeom prst="rect">
+            <a:avLst/>
+          </a:prstGeom>
+        </p:spPr>
+      </p:pic>
+      <p:sp>
+        <p:nvSpPr>
+          <p:cNvPr id="36" name="TextBox 35"/>
+          <p:cNvSpPr txBox="1"/>
+          <p:nvPr/>
+        </p:nvSpPr>
+        <p:spPr>
+          <a:xfrm>
+            <a:off x="1920240" y="4005071"/>
+            <a:ext cx="9509760" cy="457200"/>
+          </a:xfrm>
+          <a:prstGeom prst="rect">
+            <a:avLst/>
+          </a:prstGeom>
+          <a:noFill/>
+        </p:spPr>
+        <p:txBody>
+          <a:bodyPr wrap="square" anchor="t" lIns="0" rIns="0" tIns="0" bIns="0">
+            <a:spAutoFit/>
+          </a:bodyPr>
+          <a:lstStyle/>
+          <a:p>
+            <a:pPr algn="l">
+              <a:lnSpc>
+                <a:spcPct val="115000"/>
+              </a:lnSpc>
+            </a:pPr>
+            <a:r>
+              <a:rPr sz="1600" b="1" i="0">
+                <a:solidFill>
+                  <a:srgbClr val="363FC9"/>
+                </a:solidFill>
+                <a:latin typeface="맑은 고딕"/>
+              </a:rPr>
+              <a:t>요구사항·기능명세서에 적힌 기능 전부 구현·검증 완료</a:t>
+            </a:r>
+          </a:p>
+        </p:txBody>
+      </p:sp>
       <p:sp>
         <p:nvSpPr>
           <p:cNvPr id="37" name="TextBox 36"/>
@@ -14201,7 +14188,94 @@
         </p:nvSpPr>
         <p:spPr>
           <a:xfrm>
-            <a:off x="731520" y="5440680"/>
+            <a:off x="1920240" y="4462271"/>
+            <a:ext cx="9509760" cy="502920"/>
+          </a:xfrm>
+          <a:prstGeom prst="rect">
+            <a:avLst/>
+          </a:prstGeom>
+          <a:noFill/>
+        </p:spPr>
+        <p:txBody>
+          <a:bodyPr wrap="square" anchor="t" lIns="0" rIns="0" tIns="0" bIns="0">
+            <a:spAutoFit/>
+          </a:bodyPr>
+          <a:lstStyle/>
+          <a:p>
+            <a:pPr algn="l">
+              <a:lnSpc>
+                <a:spcPct val="130000"/>
+              </a:lnSpc>
+            </a:pPr>
+            <a:r>
+              <a:rPr sz="1150" b="0" i="0">
+                <a:solidFill>
+                  <a:srgbClr val="26283A"/>
+                </a:solidFill>
+                <a:latin typeface="맑은 고딕"/>
+              </a:rPr>
+              <a:t>미구현·구현 예정으로 남은 항목 없음 — API 39개 전부 동작, 전 과정 로컬 MySQL+Spring Boot 기동 후 검증</a:t>
+            </a:r>
+          </a:p>
+        </p:txBody>
+      </p:sp>
+      <p:sp>
+        <p:nvSpPr>
+          <p:cNvPr id="38" name="Rounded Rectangle 37"/>
+          <p:cNvSpPr/>
+          <p:nvPr/>
+        </p:nvSpPr>
+        <p:spPr>
+          <a:xfrm>
+            <a:off x="502920" y="5394959"/>
+            <a:ext cx="11201400" cy="621792"/>
+          </a:xfrm>
+          <a:prstGeom prst="roundRect">
+            <a:avLst>
+              <a:gd name="adj" fmla="val 18000"/>
+            </a:avLst>
+          </a:prstGeom>
+          <a:solidFill>
+            <a:srgbClr val="FFFFFF"/>
+          </a:solidFill>
+          <a:ln w="12700">
+            <a:solidFill>
+              <a:srgbClr val="DDE1F2"/>
+            </a:solidFill>
+          </a:ln>
+          <a:effectLst/>
+        </p:spPr>
+        <p:style>
+          <a:lnRef idx="1">
+            <a:schemeClr val="accent1"/>
+          </a:lnRef>
+          <a:fillRef idx="3">
+            <a:schemeClr val="accent1"/>
+          </a:fillRef>
+          <a:effectRef idx="2">
+            <a:schemeClr val="accent1"/>
+          </a:effectRef>
+          <a:fontRef idx="minor">
+            <a:schemeClr val="lt1"/>
+          </a:fontRef>
+        </p:style>
+        <p:txBody>
+          <a:bodyPr rtlCol="0" anchor="ctr"/>
+          <a:lstStyle/>
+          <a:p>
+            <a:pPr algn="ctr"/>
+          </a:p>
+        </p:txBody>
+      </p:sp>
+      <p:sp>
+        <p:nvSpPr>
+          <p:cNvPr id="39" name="TextBox 38"/>
+          <p:cNvSpPr txBox="1"/>
+          <p:nvPr/>
+        </p:nvSpPr>
+        <p:spPr>
+          <a:xfrm>
+            <a:off x="731520" y="5394959"/>
             <a:ext cx="10698480" cy="621792"/>
           </a:xfrm>
           <a:prstGeom prst="rect">
@@ -14234,7 +14308,7 @@
       </p:sp>
       <p:sp>
         <p:nvSpPr>
-          <p:cNvPr id="38" name="TextBox 37"/>
+          <p:cNvPr id="40" name="TextBox 39"/>
           <p:cNvSpPr txBox="1"/>
           <p:nvPr/>
         </p:nvSpPr>
@@ -14273,7 +14347,7 @@
       </p:sp>
       <p:sp>
         <p:nvSpPr>
-          <p:cNvPr id="39" name="TextBox 38"/>
+          <p:cNvPr id="41" name="TextBox 40"/>
           <p:cNvSpPr txBox="1"/>
           <p:nvPr/>
         </p:nvSpPr>
@@ -14563,7 +14637,7 @@
       </p:sp>
       <p:pic>
         <p:nvPicPr>
-          <p:cNvPr id="8" name="Picture 7" descr="x_circle.png"/>
+          <p:cNvPr id="8" name="Picture 7" descr="browser.png"/>
           <p:cNvPicPr>
             <a:picLocks noChangeAspect="1"/>
           </p:cNvPicPr>
@@ -14619,7 +14693,7 @@
                 </a:solidFill>
                 <a:latin typeface="맑은 고딕"/>
               </a:rPr>
-              <a:t>구역 간 이동 조회</a:t>
+              <a:t>신규 3개 기능</a:t>
             </a:r>
           </a:p>
           <a:p>
@@ -14635,7 +14709,7 @@
                 </a:solidFill>
                 <a:latin typeface="맑은 고딕"/>
               </a:rPr>
-              <a:t>미구현</a:t>
+              <a:t>전용 화면 미구현</a:t>
             </a:r>
           </a:p>
         </p:txBody>
@@ -14721,7 +14795,7 @@
                 </a:solidFill>
                 <a:latin typeface="맑은 고딕"/>
               </a:rPr>
-              <a:t>●  zone_flows 집계 로직 자체가 아직 없음</a:t>
+              <a:t>●  구역 간 이동 조회·비밀번호 재설정·관리자 간 관리는 API만 구현</a:t>
             </a:r>
           </a:p>
           <a:p>
@@ -14740,7 +14814,7 @@
                 </a:solidFill>
                 <a:latin typeface="맑은 고딕"/>
               </a:rPr>
-              <a:t>●  요구사항·설계는 완료했지만 보류</a:t>
+              <a:t>●  web-dashboard·mobile-app에 전용 화면은 아직 없음</a:t>
             </a:r>
           </a:p>
           <a:p>
@@ -14759,7 +14833,7 @@
                 </a:solidFill>
                 <a:latin typeface="맑은 고딕"/>
               </a:rPr>
-              <a:t>●  다음 작업 1순위로 개선계획에 반영</a:t>
+              <a:t>●  UI 추가를 개선계획에 반영</a:t>
             </a:r>
           </a:p>
         </p:txBody>
@@ -15806,12 +15880,12 @@
         </p:nvSpPr>
         <p:spPr>
           <a:xfrm>
-            <a:off x="502920" y="1645920"/>
-            <a:ext cx="11201400" cy="713232"/>
+            <a:off x="502920" y="1691640"/>
+            <a:ext cx="11201400" cy="960120"/>
           </a:xfrm>
           <a:prstGeom prst="roundRect">
             <a:avLst>
-              <a:gd name="adj" fmla="val 20000"/>
+              <a:gd name="adj" fmla="val 15000"/>
             </a:avLst>
           </a:prstGeom>
           <a:solidFill>
@@ -15854,8 +15928,8 @@
         </p:nvSpPr>
         <p:spPr>
           <a:xfrm>
-            <a:off x="722376" y="1810512"/>
-            <a:ext cx="384048" cy="384048"/>
+            <a:off x="777240" y="1943100"/>
+            <a:ext cx="457200" cy="457200"/>
           </a:xfrm>
           <a:prstGeom prst="ellipse">
             <a:avLst/>
@@ -15888,7 +15962,7 @@
           <a:p>
             <a:pPr algn="ctr"/>
             <a:r>
-              <a:rPr sz="1600" b="1">
+              <a:rPr sz="1800" b="1">
                 <a:solidFill>
                   <a:srgbClr val="FFFFFF"/>
                 </a:solidFill>
@@ -15907,8 +15981,8 @@
         </p:nvSpPr>
         <p:spPr>
           <a:xfrm>
-            <a:off x="1280160" y="1645920"/>
-            <a:ext cx="10149840" cy="713232"/>
+            <a:off x="1508760" y="1691640"/>
+            <a:ext cx="10058400" cy="960120"/>
           </a:xfrm>
           <a:prstGeom prst="rect">
             <a:avLst/>
@@ -15927,13 +16001,13 @@
               </a:lnSpc>
             </a:pPr>
             <a:r>
-              <a:rPr sz="1300" b="0" i="0">
+              <a:rPr sz="1500" b="1" i="0">
                 <a:solidFill>
                   <a:srgbClr val="26283A"/>
                 </a:solidFill>
                 <a:latin typeface="맑은 고딕"/>
               </a:rPr>
-              <a:t>구역 간 이동 조회(zone_flows 집계) 구현</a:t>
+              <a:t>구역 간 이동 조회·비밀번호 재설정·관리자 간 관리 전용 화면(UI) 추가</a:t>
             </a:r>
           </a:p>
         </p:txBody>
@@ -15946,12 +16020,12 @@
         </p:nvSpPr>
         <p:spPr>
           <a:xfrm>
-            <a:off x="502920" y="2468880"/>
-            <a:ext cx="11201400" cy="713232"/>
+            <a:off x="502920" y="2852928"/>
+            <a:ext cx="11201400" cy="960120"/>
           </a:xfrm>
           <a:prstGeom prst="roundRect">
             <a:avLst>
-              <a:gd name="adj" fmla="val 20000"/>
+              <a:gd name="adj" fmla="val 15000"/>
             </a:avLst>
           </a:prstGeom>
           <a:solidFill>
@@ -15994,8 +16068,8 @@
         </p:nvSpPr>
         <p:spPr>
           <a:xfrm>
-            <a:off x="722376" y="2633472"/>
-            <a:ext cx="384048" cy="384048"/>
+            <a:off x="777240" y="3104388"/>
+            <a:ext cx="457200" cy="457200"/>
           </a:xfrm>
           <a:prstGeom prst="ellipse">
             <a:avLst/>
@@ -16028,7 +16102,7 @@
           <a:p>
             <a:pPr algn="ctr"/>
             <a:r>
-              <a:rPr sz="1600" b="1">
+              <a:rPr sz="1800" b="1">
                 <a:solidFill>
                   <a:srgbClr val="FFFFFF"/>
                 </a:solidFill>
@@ -16047,8 +16121,8 @@
         </p:nvSpPr>
         <p:spPr>
           <a:xfrm>
-            <a:off x="1280160" y="2468880"/>
-            <a:ext cx="10149840" cy="713232"/>
+            <a:off x="1508760" y="2852928"/>
+            <a:ext cx="10058400" cy="960120"/>
           </a:xfrm>
           <a:prstGeom prst="rect">
             <a:avLst/>
@@ -16067,13 +16141,13 @@
               </a:lnSpc>
             </a:pPr>
             <a:r>
-              <a:rPr sz="1300" b="0" i="0">
+              <a:rPr sz="1500" b="1" i="0">
                 <a:solidFill>
                   <a:srgbClr val="26283A"/>
                 </a:solidFill>
                 <a:latin typeface="맑은 고딕"/>
               </a:rPr>
-              <a:t>비밀번호 재설정 · 관리자 간 관리 기능 구현</a:t>
+              <a:t>유입유출·이벤트 중복방지 로직 위주 JUnit 단위테스트 추가</a:t>
             </a:r>
           </a:p>
         </p:txBody>
@@ -16086,12 +16160,12 @@
         </p:nvSpPr>
         <p:spPr>
           <a:xfrm>
-            <a:off x="502920" y="3291840"/>
-            <a:ext cx="11201400" cy="713232"/>
+            <a:off x="502920" y="4014216"/>
+            <a:ext cx="11201400" cy="960120"/>
           </a:xfrm>
           <a:prstGeom prst="roundRect">
             <a:avLst>
-              <a:gd name="adj" fmla="val 20000"/>
+              <a:gd name="adj" fmla="val 15000"/>
             </a:avLst>
           </a:prstGeom>
           <a:solidFill>
@@ -16134,8 +16208,8 @@
         </p:nvSpPr>
         <p:spPr>
           <a:xfrm>
-            <a:off x="722376" y="3456432"/>
-            <a:ext cx="384048" cy="384048"/>
+            <a:off x="777240" y="4265676"/>
+            <a:ext cx="457200" cy="457200"/>
           </a:xfrm>
           <a:prstGeom prst="ellipse">
             <a:avLst/>
@@ -16168,7 +16242,7 @@
           <a:p>
             <a:pPr algn="ctr"/>
             <a:r>
-              <a:rPr sz="1600" b="1">
+              <a:rPr sz="1800" b="1">
                 <a:solidFill>
                   <a:srgbClr val="FFFFFF"/>
                 </a:solidFill>
@@ -16187,8 +16261,8 @@
         </p:nvSpPr>
         <p:spPr>
           <a:xfrm>
-            <a:off x="1280160" y="3291840"/>
-            <a:ext cx="10149840" cy="713232"/>
+            <a:off x="1508760" y="4014216"/>
+            <a:ext cx="10058400" cy="960120"/>
           </a:xfrm>
           <a:prstGeom prst="rect">
             <a:avLst/>
@@ -16207,13 +16281,13 @@
               </a:lnSpc>
             </a:pPr>
             <a:r>
-              <a:rPr sz="1300" b="0" i="0">
+              <a:rPr sz="1500" b="1" i="0">
                 <a:solidFill>
                   <a:srgbClr val="26283A"/>
                 </a:solidFill>
                 <a:latin typeface="맑은 고딕"/>
               </a:rPr>
-              <a:t>유입유출·이벤트 중복방지 로직 위주 JUnit 단위테스트 추가</a:t>
+              <a:t>YOLOv8m 교체 실험 후 속도·정확도 트레이드오프 재측정</a:t>
             </a:r>
           </a:p>
         </p:txBody>
@@ -16226,12 +16300,12 @@
         </p:nvSpPr>
         <p:spPr>
           <a:xfrm>
-            <a:off x="502920" y="4114800"/>
-            <a:ext cx="11201400" cy="713232"/>
+            <a:off x="502920" y="5175504"/>
+            <a:ext cx="11201400" cy="960120"/>
           </a:xfrm>
           <a:prstGeom prst="roundRect">
             <a:avLst>
-              <a:gd name="adj" fmla="val 20000"/>
+              <a:gd name="adj" fmla="val 15000"/>
             </a:avLst>
           </a:prstGeom>
           <a:solidFill>
@@ -16274,8 +16348,8 @@
         </p:nvSpPr>
         <p:spPr>
           <a:xfrm>
-            <a:off x="722376" y="4279392"/>
-            <a:ext cx="384048" cy="384048"/>
+            <a:off x="777240" y="5426964"/>
+            <a:ext cx="457200" cy="457200"/>
           </a:xfrm>
           <a:prstGeom prst="ellipse">
             <a:avLst/>
@@ -16308,7 +16382,7 @@
           <a:p>
             <a:pPr algn="ctr"/>
             <a:r>
-              <a:rPr sz="1600" b="1">
+              <a:rPr sz="1800" b="1">
                 <a:solidFill>
                   <a:srgbClr val="FFFFFF"/>
                 </a:solidFill>
@@ -16327,8 +16401,8 @@
         </p:nvSpPr>
         <p:spPr>
           <a:xfrm>
-            <a:off x="1280160" y="4114800"/>
-            <a:ext cx="10149840" cy="713232"/>
+            <a:off x="1508760" y="5175504"/>
+            <a:ext cx="10058400" cy="960120"/>
           </a:xfrm>
           <a:prstGeom prst="rect">
             <a:avLst/>
@@ -16347,152 +16421,12 @@
               </a:lnSpc>
             </a:pPr>
             <a:r>
-              <a:rPr sz="1300" b="0" i="0">
+              <a:rPr sz="1500" b="1" i="0">
                 <a:solidFill>
                   <a:srgbClr val="26283A"/>
                 </a:solidFill>
                 <a:latin typeface="맑은 고딕"/>
               </a:rPr>
-              <a:t>YOLOv8m 교체 실험 후 속도·정확도 트레이드오프 재측정</a:t>
-            </a:r>
-          </a:p>
-        </p:txBody>
-      </p:sp>
-      <p:sp>
-        <p:nvSpPr>
-          <p:cNvPr id="19" name="Rounded Rectangle 18"/>
-          <p:cNvSpPr/>
-          <p:nvPr/>
-        </p:nvSpPr>
-        <p:spPr>
-          <a:xfrm>
-            <a:off x="502920" y="4937760"/>
-            <a:ext cx="11201400" cy="713232"/>
-          </a:xfrm>
-          <a:prstGeom prst="roundRect">
-            <a:avLst>
-              <a:gd name="adj" fmla="val 20000"/>
-            </a:avLst>
-          </a:prstGeom>
-          <a:solidFill>
-            <a:srgbClr val="FFFFFF"/>
-          </a:solidFill>
-          <a:ln w="12700">
-            <a:solidFill>
-              <a:srgbClr val="DDE1F2"/>
-            </a:solidFill>
-          </a:ln>
-          <a:effectLst/>
-        </p:spPr>
-        <p:style>
-          <a:lnRef idx="1">
-            <a:schemeClr val="accent1"/>
-          </a:lnRef>
-          <a:fillRef idx="3">
-            <a:schemeClr val="accent1"/>
-          </a:fillRef>
-          <a:effectRef idx="2">
-            <a:schemeClr val="accent1"/>
-          </a:effectRef>
-          <a:fontRef idx="minor">
-            <a:schemeClr val="lt1"/>
-          </a:fontRef>
-        </p:style>
-        <p:txBody>
-          <a:bodyPr rtlCol="0" anchor="ctr"/>
-          <a:lstStyle/>
-          <a:p>
-            <a:pPr algn="ctr"/>
-          </a:p>
-        </p:txBody>
-      </p:sp>
-      <p:sp>
-        <p:nvSpPr>
-          <p:cNvPr id="20" name="Oval 19"/>
-          <p:cNvSpPr/>
-          <p:nvPr/>
-        </p:nvSpPr>
-        <p:spPr>
-          <a:xfrm>
-            <a:off x="722376" y="5102352"/>
-            <a:ext cx="384048" cy="384048"/>
-          </a:xfrm>
-          <a:prstGeom prst="ellipse">
-            <a:avLst/>
-          </a:prstGeom>
-          <a:solidFill>
-            <a:srgbClr val="4A55E8"/>
-          </a:solidFill>
-          <a:ln>
-            <a:noFill/>
-          </a:ln>
-          <a:effectLst/>
-        </p:spPr>
-        <p:style>
-          <a:lnRef idx="1">
-            <a:schemeClr val="accent1"/>
-          </a:lnRef>
-          <a:fillRef idx="3">
-            <a:schemeClr val="accent1"/>
-          </a:fillRef>
-          <a:effectRef idx="2">
-            <a:schemeClr val="accent1"/>
-          </a:effectRef>
-          <a:fontRef idx="minor">
-            <a:schemeClr val="lt1"/>
-          </a:fontRef>
-        </p:style>
-        <p:txBody>
-          <a:bodyPr rtlCol="0" anchor="ctr" lIns="0" rIns="0" tIns="0" bIns="0"/>
-          <a:lstStyle/>
-          <a:p>
-            <a:pPr algn="ctr"/>
-            <a:r>
-              <a:rPr sz="1600" b="1">
-                <a:solidFill>
-                  <a:srgbClr val="FFFFFF"/>
-                </a:solidFill>
-                <a:latin typeface="맑은 고딕"/>
-              </a:rPr>
-              <a:t>5</a:t>
-            </a:r>
-          </a:p>
-        </p:txBody>
-      </p:sp>
-      <p:sp>
-        <p:nvSpPr>
-          <p:cNvPr id="21" name="TextBox 20"/>
-          <p:cNvSpPr txBox="1"/>
-          <p:nvPr/>
-        </p:nvSpPr>
-        <p:spPr>
-          <a:xfrm>
-            <a:off x="1280160" y="4937760"/>
-            <a:ext cx="10149840" cy="713232"/>
-          </a:xfrm>
-          <a:prstGeom prst="rect">
-            <a:avLst/>
-          </a:prstGeom>
-          <a:noFill/>
-        </p:spPr>
-        <p:txBody>
-          <a:bodyPr wrap="square" anchor="ctr" lIns="0" rIns="0" tIns="0" bIns="0">
-            <a:spAutoFit/>
-          </a:bodyPr>
-          <a:lstStyle/>
-          <a:p>
-            <a:pPr algn="l">
-              <a:lnSpc>
-                <a:spcPct val="115000"/>
-              </a:lnSpc>
-            </a:pPr>
-            <a:r>
-              <a:rPr sz="1300" b="0" i="0">
-                <a:solidFill>
-                  <a:srgbClr val="26283A"/>
-                </a:solidFill>
-                <a:latin typeface="맑은 고딕"/>
-              </a:rPr>
               <a:t>영상 신규 수집 시 다운로드 페이지 URL 즉시 기록 규칙화</a:t>
             </a:r>
           </a:p>
@@ -16500,7 +16434,7 @@
       </p:sp>
       <p:sp>
         <p:nvSpPr>
-          <p:cNvPr id="22" name="TextBox 21"/>
+          <p:cNvPr id="19" name="TextBox 18"/>
           <p:cNvSpPr txBox="1"/>
           <p:nvPr/>
         </p:nvSpPr>
@@ -16539,7 +16473,7 @@
       </p:sp>
       <p:sp>
         <p:nvSpPr>
-          <p:cNvPr id="23" name="TextBox 22"/>
+          <p:cNvPr id="20" name="TextBox 19"/>
           <p:cNvSpPr txBox="1"/>
           <p:nvPr/>
         </p:nvSpPr>
@@ -17032,7 +16966,7 @@
       </p:sp>
       <p:pic>
         <p:nvPicPr>
-          <p:cNvPr id="13" name="Picture 12" descr="gear.png"/>
+          <p:cNvPr id="13" name="Picture 12" descr="mobile.png"/>
           <p:cNvPicPr>
             <a:picLocks noChangeAspect="1"/>
           </p:cNvPicPr>
@@ -17088,7 +17022,7 @@
                 </a:solidFill>
                 <a:latin typeface="맑은 고딕"/>
               </a:rPr>
-              <a:t>잔여 기능 구현</a:t>
+              <a:t>관리자 전용 통합 콘솔</a:t>
             </a:r>
           </a:p>
         </p:txBody>
@@ -17127,7 +17061,7 @@
                 </a:solidFill>
                 <a:latin typeface="맑은 고딕"/>
               </a:rPr>
-              <a:t>구역 간 이동 조회(zone_flows 집계), 비밀번호 재설정, 관리자 간 관리 기능</a:t>
+              <a:t>임계치 설정·권한 관리(acman)·구역 간 이동 조회를 하나의 관리자 화면으로 통합</a:t>
             </a:r>
           </a:p>
         </p:txBody>
@@ -26278,7 +26212,7 @@
                 </a:solidFill>
                 <a:latin typeface="맑은 고딕"/>
               </a:rPr>
-              <a:t>계획 기능 vs 실제 구현 기능</a:t>
+              <a:t>실제 구현 기능 (설계된 기능 전부 구현 완료)</a:t>
             </a:r>
           </a:p>
         </p:txBody>
@@ -27029,7 +26963,7 @@
             </a:avLst>
           </a:prstGeom>
           <a:solidFill>
-            <a:srgbClr val="FDECDA"/>
+            <a:srgbClr val="E2F7EC"/>
           </a:solidFill>
           <a:ln>
             <a:noFill/>
@@ -27084,57 +27018,180 @@
             <a:r>
               <a:rPr sz="1050" b="1">
                 <a:solidFill>
-                  <a:srgbClr val="F28A3C"/>
-                </a:solidFill>
-                <a:latin typeface="맑은 고딕"/>
-              </a:rPr>
-              <a:t>◷ 구역 간 이동 조회</a:t>
-            </a:r>
-          </a:p>
-        </p:txBody>
-      </p:sp>
-      <p:sp>
-        <p:nvSpPr>
-          <p:cNvPr id="51" name="TextBox 50"/>
-          <p:cNvSpPr txBox="1"/>
-          <p:nvPr/>
-        </p:nvSpPr>
-        <p:spPr>
-          <a:xfrm>
-            <a:off x="3017520" y="6007608"/>
-            <a:ext cx="3657600" cy="274320"/>
-          </a:xfrm>
-          <a:prstGeom prst="rect">
-            <a:avLst/>
-          </a:prstGeom>
-          <a:noFill/>
-        </p:spPr>
-        <p:txBody>
-          <a:bodyPr wrap="square" anchor="t" lIns="0" rIns="0" tIns="0" bIns="0">
-            <a:spAutoFit/>
-          </a:bodyPr>
-          <a:lstStyle/>
-          <a:p>
-            <a:pPr algn="l">
-              <a:lnSpc>
-                <a:spcPct val="115000"/>
-              </a:lnSpc>
-            </a:pPr>
-            <a:r>
-              <a:rPr sz="1050" b="0" i="1">
-                <a:solidFill>
-                  <a:srgbClr val="F28A3C"/>
-                </a:solidFill>
-                <a:latin typeface="맑은 고딕"/>
-              </a:rPr>
-              <a:t>— 설계 완료 · 구현 예정</a:t>
-            </a:r>
+                  <a:srgbClr val="1FA96B"/>
+                </a:solidFill>
+                <a:latin typeface="맑은 고딕"/>
+              </a:rPr>
+              <a:t>✓ 구역 간 이동 조회</a:t>
+            </a:r>
+          </a:p>
+        </p:txBody>
+      </p:sp>
+      <p:sp>
+        <p:nvSpPr>
+          <p:cNvPr id="51" name="Rounded Rectangle 50"/>
+          <p:cNvSpPr/>
+          <p:nvPr/>
+        </p:nvSpPr>
+        <p:spPr>
+          <a:xfrm>
+            <a:off x="2971800" y="5943600"/>
+            <a:ext cx="1993392" cy="384048"/>
+          </a:xfrm>
+          <a:prstGeom prst="roundRect">
+            <a:avLst>
+              <a:gd name="adj" fmla="val 50000"/>
+            </a:avLst>
+          </a:prstGeom>
+          <a:solidFill>
+            <a:srgbClr val="E2F7EC"/>
+          </a:solidFill>
+          <a:ln>
+            <a:noFill/>
+          </a:ln>
+          <a:effectLst/>
+        </p:spPr>
+        <p:style>
+          <a:lnRef idx="1">
+            <a:schemeClr val="accent1"/>
+          </a:lnRef>
+          <a:fillRef idx="3">
+            <a:schemeClr val="accent1"/>
+          </a:fillRef>
+          <a:effectRef idx="2">
+            <a:schemeClr val="accent1"/>
+          </a:effectRef>
+          <a:fontRef idx="minor">
+            <a:schemeClr val="lt1"/>
+          </a:fontRef>
+        </p:style>
+        <p:txBody>
+          <a:bodyPr rtlCol="0" anchor="ctr"/>
+          <a:lstStyle/>
+          <a:p>
+            <a:pPr algn="ctr"/>
           </a:p>
         </p:txBody>
       </p:sp>
       <p:sp>
         <p:nvSpPr>
           <p:cNvPr id="52" name="TextBox 51"/>
+          <p:cNvSpPr txBox="1"/>
+          <p:nvPr/>
+        </p:nvSpPr>
+        <p:spPr>
+          <a:xfrm>
+            <a:off x="2971800" y="5943600"/>
+            <a:ext cx="1993392" cy="384048"/>
+          </a:xfrm>
+          <a:prstGeom prst="rect">
+            <a:avLst/>
+          </a:prstGeom>
+          <a:noFill/>
+        </p:spPr>
+        <p:txBody>
+          <a:bodyPr wrap="none" anchor="ctr" lIns="50800" rIns="50800" tIns="0" bIns="0">
+            <a:spAutoFit/>
+          </a:bodyPr>
+          <a:lstStyle/>
+          <a:p>
+            <a:pPr algn="ctr"/>
+            <a:r>
+              <a:rPr sz="1050" b="1">
+                <a:solidFill>
+                  <a:srgbClr val="1FA96B"/>
+                </a:solidFill>
+                <a:latin typeface="맑은 고딕"/>
+              </a:rPr>
+              <a:t>✓ 비밀번호 재설정</a:t>
+            </a:r>
+          </a:p>
+        </p:txBody>
+      </p:sp>
+      <p:sp>
+        <p:nvSpPr>
+          <p:cNvPr id="53" name="Rounded Rectangle 52"/>
+          <p:cNvSpPr/>
+          <p:nvPr/>
+        </p:nvSpPr>
+        <p:spPr>
+          <a:xfrm>
+            <a:off x="5084064" y="5943600"/>
+            <a:ext cx="1993392" cy="384048"/>
+          </a:xfrm>
+          <a:prstGeom prst="roundRect">
+            <a:avLst>
+              <a:gd name="adj" fmla="val 50000"/>
+            </a:avLst>
+          </a:prstGeom>
+          <a:solidFill>
+            <a:srgbClr val="E2F7EC"/>
+          </a:solidFill>
+          <a:ln>
+            <a:noFill/>
+          </a:ln>
+          <a:effectLst/>
+        </p:spPr>
+        <p:style>
+          <a:lnRef idx="1">
+            <a:schemeClr val="accent1"/>
+          </a:lnRef>
+          <a:fillRef idx="3">
+            <a:schemeClr val="accent1"/>
+          </a:fillRef>
+          <a:effectRef idx="2">
+            <a:schemeClr val="accent1"/>
+          </a:effectRef>
+          <a:fontRef idx="minor">
+            <a:schemeClr val="lt1"/>
+          </a:fontRef>
+        </p:style>
+        <p:txBody>
+          <a:bodyPr rtlCol="0" anchor="ctr"/>
+          <a:lstStyle/>
+          <a:p>
+            <a:pPr algn="ctr"/>
+          </a:p>
+        </p:txBody>
+      </p:sp>
+      <p:sp>
+        <p:nvSpPr>
+          <p:cNvPr id="54" name="TextBox 53"/>
+          <p:cNvSpPr txBox="1"/>
+          <p:nvPr/>
+        </p:nvSpPr>
+        <p:spPr>
+          <a:xfrm>
+            <a:off x="5084064" y="5943600"/>
+            <a:ext cx="1993392" cy="384048"/>
+          </a:xfrm>
+          <a:prstGeom prst="rect">
+            <a:avLst/>
+          </a:prstGeom>
+          <a:noFill/>
+        </p:spPr>
+        <p:txBody>
+          <a:bodyPr wrap="none" anchor="ctr" lIns="50800" rIns="50800" tIns="0" bIns="0">
+            <a:spAutoFit/>
+          </a:bodyPr>
+          <a:lstStyle/>
+          <a:p>
+            <a:pPr algn="ctr"/>
+            <a:r>
+              <a:rPr sz="1050" b="1">
+                <a:solidFill>
+                  <a:srgbClr val="1FA96B"/>
+                </a:solidFill>
+                <a:latin typeface="맑은 고딕"/>
+              </a:rPr>
+              <a:t>✓ 관리자 간 관리</a:t>
+            </a:r>
+          </a:p>
+        </p:txBody>
+      </p:sp>
+      <p:sp>
+        <p:nvSpPr>
+          <p:cNvPr id="55" name="TextBox 54"/>
           <p:cNvSpPr txBox="1"/>
           <p:nvPr/>
         </p:nvSpPr>
@@ -27173,7 +27230,7 @@
       </p:sp>
       <p:sp>
         <p:nvSpPr>
-          <p:cNvPr id="53" name="TextBox 52"/>
+          <p:cNvPr id="56" name="TextBox 55"/>
           <p:cNvSpPr txBox="1"/>
           <p:nvPr/>
         </p:nvSpPr>
